--- a/CaseStudy_Data_analysis_for_bike_sharing_company.pptx
+++ b/CaseStudy_Data_analysis_for_bike_sharing_company.pptx
@@ -213,6 +213,35 @@
 </p:presentation>
 </file>
 
+<file path=ppt/changesInfos/changesInfo1.xml><?xml version="1.0" encoding="utf-8"?>
+<pc:chgInfo xmlns:a="http://schemas.openxmlformats.org/drawingml/2006/main" xmlns:r="http://schemas.openxmlformats.org/officeDocument/2006/relationships" xmlns:ac="http://schemas.microsoft.com/office/drawing/2013/main/command" xmlns:pc="http://schemas.microsoft.com/office/powerpoint/2013/main/command">
+  <pc:docChgLst>
+    <pc:chgData name="Stefan Crasmareanu" userId="f13f3dc6586ee41e" providerId="LiveId" clId="{2A4A8B26-2C55-4D44-BAD1-A7A119B3E75F}"/>
+    <pc:docChg chg="modSld">
+      <pc:chgData name="Stefan Crasmareanu" userId="f13f3dc6586ee41e" providerId="LiveId" clId="{2A4A8B26-2C55-4D44-BAD1-A7A119B3E75F}" dt="2026-03-11T19:57:54.231" v="72" actId="14100"/>
+      <pc:docMkLst>
+        <pc:docMk/>
+      </pc:docMkLst>
+      <pc:sldChg chg="modSp mod">
+        <pc:chgData name="Stefan Crasmareanu" userId="f13f3dc6586ee41e" providerId="LiveId" clId="{2A4A8B26-2C55-4D44-BAD1-A7A119B3E75F}" dt="2026-03-11T19:57:54.231" v="72" actId="14100"/>
+        <pc:sldMkLst>
+          <pc:docMk/>
+          <pc:sldMk cId="3086147702" sldId="374"/>
+        </pc:sldMkLst>
+        <pc:spChg chg="mod">
+          <ac:chgData name="Stefan Crasmareanu" userId="f13f3dc6586ee41e" providerId="LiveId" clId="{2A4A8B26-2C55-4D44-BAD1-A7A119B3E75F}" dt="2026-03-11T19:57:54.231" v="72" actId="14100"/>
+          <ac:spMkLst>
+            <pc:docMk/>
+            <pc:sldMk cId="3086147702" sldId="374"/>
+            <ac:spMk id="12" creationId="{6B675EAC-1292-6CA6-A9C8-1D84B6755FF6}"/>
+          </ac:spMkLst>
+        </pc:spChg>
+      </pc:sldChg>
+    </pc:docChg>
+  </pc:docChgLst>
+</pc:chgInfo>
+</file>
+
 <file path=ppt/notesMasters/notesMaster1.xml><?xml version="1.0" encoding="utf-8"?>
 <p:notesMaster xmlns:a="http://schemas.openxmlformats.org/drawingml/2006/main" xmlns:r="http://schemas.openxmlformats.org/officeDocument/2006/relationships" xmlns:p="http://schemas.openxmlformats.org/presentationml/2006/main">
   <p:cSld>
@@ -295,7 +324,7 @@
           <a:p>
             <a:fld id="{6EE7A52F-9D89-7442-A8E9-48D1527B5F6B}" type="datetimeFigureOut">
               <a:rPr lang="en-US" smtClean="0"/>
-              <a:t>2/25/2026</a:t>
+              <a:t>3/11/2026</a:t>
             </a:fld>
             <a:endParaRPr lang="en-US" dirty="0"/>
           </a:p>
@@ -17204,7 +17233,7 @@
         <p:spPr>
           <a:xfrm>
             <a:off x="1104181" y="2286000"/>
-            <a:ext cx="9937630" cy="1569660"/>
+            <a:ext cx="10506974" cy="2308324"/>
           </a:xfrm>
           <a:prstGeom prst="rect">
             <a:avLst/>
@@ -17272,6 +17301,20 @@
                 </a:solidFill>
               </a:rPr>
               <a:t>Visualizations: Tableau Public</a:t>
+            </a:r>
+          </a:p>
+          <a:p>
+            <a:pPr marL="285750" indent="-285750">
+              <a:buFont typeface="Wingdings" panose="05000000000000000000" pitchFamily="2" charset="2"/>
+              <a:buChar char="Ø"/>
+            </a:pPr>
+            <a:r>
+              <a:rPr lang="en-GB" sz="2400" dirty="0">
+                <a:solidFill>
+                  <a:schemeClr val="bg1"/>
+                </a:solidFill>
+              </a:rPr>
+              <a:t>All code/resources can be accessed on GitHub profile: https://github.com/stefancrasmareanu-a11y/Case_study_bike_sharing_company/</a:t>
             </a:r>
             <a:endParaRPr lang="ro-RO" sz="2400" dirty="0">
               <a:solidFill>
@@ -21823,21 +21866,21 @@
 </file>
 
 <file path=customXml/item1.xml><?xml version="1.0" encoding="utf-8"?>
+<p:properties xmlns:p="http://schemas.microsoft.com/office/2006/metadata/properties" xmlns:xsi="http://www.w3.org/2001/XMLSchema-instance" xmlns:pc="http://schemas.microsoft.com/office/infopath/2007/PartnerControls">
+  <documentManagement>
+    <Status xmlns="71af3243-3dd4-4a8d-8c0d-dd76da1f02a5">Not started</Status>
+    <MediaServiceKeyPoints xmlns="71af3243-3dd4-4a8d-8c0d-dd76da1f02a5" xsi:nil="true"/>
+  </documentManagement>
+</p:properties>
+</file>
+
+<file path=customXml/item2.xml><?xml version="1.0" encoding="utf-8"?>
 <?mso-contentType ?>
 <FormTemplates xmlns="http://schemas.microsoft.com/sharepoint/v3/contenttype/forms">
   <Display>DocumentLibraryForm</Display>
   <Edit>DocumentLibraryForm</Edit>
   <New>DocumentLibraryForm</New>
 </FormTemplates>
-</file>
-
-<file path=customXml/item2.xml><?xml version="1.0" encoding="utf-8"?>
-<p:properties xmlns:p="http://schemas.microsoft.com/office/2006/metadata/properties" xmlns:xsi="http://www.w3.org/2001/XMLSchema-instance" xmlns:pc="http://schemas.microsoft.com/office/infopath/2007/PartnerControls">
-  <documentManagement>
-    <Status xmlns="71af3243-3dd4-4a8d-8c0d-dd76da1f02a5">Not started</Status>
-    <MediaServiceKeyPoints xmlns="71af3243-3dd4-4a8d-8c0d-dd76da1f02a5" xsi:nil="true"/>
-  </documentManagement>
-</p:properties>
 </file>
 
 <file path=customXml/item3.xml><?xml version="1.0" encoding="utf-8"?>
@@ -22062,19 +22105,19 @@
 </file>
 
 <file path=customXml/itemProps1.xml><?xml version="1.0" encoding="utf-8"?>
-<ds:datastoreItem xmlns:ds="http://schemas.openxmlformats.org/officeDocument/2006/customXml" ds:itemID="{3149A8C3-21EC-4C35-871F-CCC7148089A3}">
+<ds:datastoreItem xmlns:ds="http://schemas.openxmlformats.org/officeDocument/2006/customXml" ds:itemID="{081B53F0-FE0E-4C4C-84FF-93580062270A}">
   <ds:schemaRefs>
-    <ds:schemaRef ds:uri="http://schemas.microsoft.com/sharepoint/v3/contenttype/forms"/>
+    <ds:schemaRef ds:uri="http://schemas.microsoft.com/office/2006/metadata/properties"/>
+    <ds:schemaRef ds:uri="http://schemas.microsoft.com/office/infopath/2007/PartnerControls"/>
+    <ds:schemaRef ds:uri="71af3243-3dd4-4a8d-8c0d-dd76da1f02a5"/>
   </ds:schemaRefs>
 </ds:datastoreItem>
 </file>
 
 <file path=customXml/itemProps2.xml><?xml version="1.0" encoding="utf-8"?>
-<ds:datastoreItem xmlns:ds="http://schemas.openxmlformats.org/officeDocument/2006/customXml" ds:itemID="{081B53F0-FE0E-4C4C-84FF-93580062270A}">
+<ds:datastoreItem xmlns:ds="http://schemas.openxmlformats.org/officeDocument/2006/customXml" ds:itemID="{3149A8C3-21EC-4C35-871F-CCC7148089A3}">
   <ds:schemaRefs>
-    <ds:schemaRef ds:uri="http://schemas.microsoft.com/office/2006/metadata/properties"/>
-    <ds:schemaRef ds:uri="http://schemas.microsoft.com/office/infopath/2007/PartnerControls"/>
-    <ds:schemaRef ds:uri="71af3243-3dd4-4a8d-8c0d-dd76da1f02a5"/>
+    <ds:schemaRef ds:uri="http://schemas.microsoft.com/sharepoint/v3/contenttype/forms"/>
   </ds:schemaRefs>
 </ds:datastoreItem>
 </file>

--- a/CaseStudy_Data_analysis_for_bike_sharing_company.pptx
+++ b/CaseStudy_Data_analysis_for_bike_sharing_company.pptx
@@ -5,7 +5,7 @@
     <p:sldMasterId id="2147483658" r:id="rId4"/>
   </p:sldMasterIdLst>
   <p:notesMasterIdLst>
-    <p:notesMasterId r:id="rId31"/>
+    <p:notesMasterId r:id="rId38"/>
   </p:notesMasterIdLst>
   <p:sldIdLst>
     <p:sldId id="335" r:id="rId5"/>
@@ -32,8 +32,15 @@
     <p:sldId id="371" r:id="rId26"/>
     <p:sldId id="372" r:id="rId27"/>
     <p:sldId id="373" r:id="rId28"/>
-    <p:sldId id="374" r:id="rId29"/>
-    <p:sldId id="350" r:id="rId30"/>
+    <p:sldId id="376" r:id="rId29"/>
+    <p:sldId id="377" r:id="rId30"/>
+    <p:sldId id="378" r:id="rId31"/>
+    <p:sldId id="379" r:id="rId32"/>
+    <p:sldId id="380" r:id="rId33"/>
+    <p:sldId id="381" r:id="rId34"/>
+    <p:sldId id="382" r:id="rId35"/>
+    <p:sldId id="374" r:id="rId36"/>
+    <p:sldId id="350" r:id="rId37"/>
   </p:sldIdLst>
   <p:sldSz cx="12192000" cy="6858000"/>
   <p:notesSz cx="6858000" cy="9144000"/>
@@ -183,6 +190,17 @@
             <p14:sldId id="373"/>
           </p14:sldIdLst>
         </p14:section>
+        <p14:section name="Another approach using Machine Learning" id="{D5B42F25-04CF-4589-B1BD-4B715D64F12E}">
+          <p14:sldIdLst>
+            <p14:sldId id="376"/>
+            <p14:sldId id="377"/>
+            <p14:sldId id="378"/>
+            <p14:sldId id="379"/>
+            <p14:sldId id="380"/>
+            <p14:sldId id="381"/>
+            <p14:sldId id="382"/>
+          </p14:sldIdLst>
+        </p14:section>
         <p14:section name="Tools" id="{54108759-4892-43A6-911F-F8AA8443D721}">
           <p14:sldIdLst>
             <p14:sldId id="374"/>
@@ -217,25 +235,473 @@
 <pc:chgInfo xmlns:a="http://schemas.openxmlformats.org/drawingml/2006/main" xmlns:r="http://schemas.openxmlformats.org/officeDocument/2006/relationships" xmlns:ac="http://schemas.microsoft.com/office/drawing/2013/main/command" xmlns:pc="http://schemas.microsoft.com/office/powerpoint/2013/main/command">
   <pc:docChgLst>
     <pc:chgData name="Stefan Crasmareanu" userId="f13f3dc6586ee41e" providerId="LiveId" clId="{2A4A8B26-2C55-4D44-BAD1-A7A119B3E75F}"/>
-    <pc:docChg chg="modSld">
-      <pc:chgData name="Stefan Crasmareanu" userId="f13f3dc6586ee41e" providerId="LiveId" clId="{2A4A8B26-2C55-4D44-BAD1-A7A119B3E75F}" dt="2026-03-11T19:57:54.231" v="72" actId="14100"/>
+    <pc:docChg chg="custSel addSld modSld addSection modSection">
+      <pc:chgData name="Stefan Crasmareanu" userId="f13f3dc6586ee41e" providerId="LiveId" clId="{2A4A8B26-2C55-4D44-BAD1-A7A119B3E75F}" dt="2026-03-12T22:23:49.804" v="3075" actId="20577"/>
       <pc:docMkLst>
         <pc:docMk/>
       </pc:docMkLst>
       <pc:sldChg chg="modSp mod">
-        <pc:chgData name="Stefan Crasmareanu" userId="f13f3dc6586ee41e" providerId="LiveId" clId="{2A4A8B26-2C55-4D44-BAD1-A7A119B3E75F}" dt="2026-03-11T19:57:54.231" v="72" actId="14100"/>
+        <pc:chgData name="Stefan Crasmareanu" userId="f13f3dc6586ee41e" providerId="LiveId" clId="{2A4A8B26-2C55-4D44-BAD1-A7A119B3E75F}" dt="2026-03-12T21:46:30.500" v="128" actId="1076"/>
+        <pc:sldMkLst>
+          <pc:docMk/>
+          <pc:sldMk cId="738577510" sldId="351"/>
+        </pc:sldMkLst>
+        <pc:spChg chg="mod">
+          <ac:chgData name="Stefan Crasmareanu" userId="f13f3dc6586ee41e" providerId="LiveId" clId="{2A4A8B26-2C55-4D44-BAD1-A7A119B3E75F}" dt="2026-03-12T21:46:30.500" v="128" actId="1076"/>
+          <ac:spMkLst>
+            <pc:docMk/>
+            <pc:sldMk cId="738577510" sldId="351"/>
+            <ac:spMk id="2" creationId="{E209607A-1079-0440-B136-F827E83999C2}"/>
+          </ac:spMkLst>
+        </pc:spChg>
+      </pc:sldChg>
+      <pc:sldChg chg="modSp mod">
+        <pc:chgData name="Stefan Crasmareanu" userId="f13f3dc6586ee41e" providerId="LiveId" clId="{2A4A8B26-2C55-4D44-BAD1-A7A119B3E75F}" dt="2026-03-12T22:23:49.804" v="3075" actId="20577"/>
         <pc:sldMkLst>
           <pc:docMk/>
           <pc:sldMk cId="3086147702" sldId="374"/>
         </pc:sldMkLst>
         <pc:spChg chg="mod">
-          <ac:chgData name="Stefan Crasmareanu" userId="f13f3dc6586ee41e" providerId="LiveId" clId="{2A4A8B26-2C55-4D44-BAD1-A7A119B3E75F}" dt="2026-03-11T19:57:54.231" v="72" actId="14100"/>
+          <ac:chgData name="Stefan Crasmareanu" userId="f13f3dc6586ee41e" providerId="LiveId" clId="{2A4A8B26-2C55-4D44-BAD1-A7A119B3E75F}" dt="2026-03-12T22:23:49.804" v="3075" actId="20577"/>
           <ac:spMkLst>
             <pc:docMk/>
             <pc:sldMk cId="3086147702" sldId="374"/>
             <ac:spMk id="12" creationId="{6B675EAC-1292-6CA6-A9C8-1D84B6755FF6}"/>
           </ac:spMkLst>
         </pc:spChg>
+      </pc:sldChg>
+      <pc:sldChg chg="addSp delSp modSp add mod">
+        <pc:chgData name="Stefan Crasmareanu" userId="f13f3dc6586ee41e" providerId="LiveId" clId="{2A4A8B26-2C55-4D44-BAD1-A7A119B3E75F}" dt="2026-03-12T21:55:41.736" v="950" actId="1582"/>
+        <pc:sldMkLst>
+          <pc:docMk/>
+          <pc:sldMk cId="229704816" sldId="376"/>
+        </pc:sldMkLst>
+        <pc:spChg chg="mod">
+          <ac:chgData name="Stefan Crasmareanu" userId="f13f3dc6586ee41e" providerId="LiveId" clId="{2A4A8B26-2C55-4D44-BAD1-A7A119B3E75F}" dt="2026-03-12T21:50:23.277" v="635" actId="1076"/>
+          <ac:spMkLst>
+            <pc:docMk/>
+            <pc:sldMk cId="229704816" sldId="376"/>
+            <ac:spMk id="2" creationId="{50C6B568-B1DB-45C7-6EEE-0ABB24399F4F}"/>
+          </ac:spMkLst>
+        </pc:spChg>
+        <pc:spChg chg="add del mod">
+          <ac:chgData name="Stefan Crasmareanu" userId="f13f3dc6586ee41e" providerId="LiveId" clId="{2A4A8B26-2C55-4D44-BAD1-A7A119B3E75F}" dt="2026-03-12T21:52:51.287" v="764" actId="478"/>
+          <ac:spMkLst>
+            <pc:docMk/>
+            <pc:sldMk cId="229704816" sldId="376"/>
+            <ac:spMk id="4" creationId="{872F1480-C1D4-E4B3-BF0F-1B27AD9EEB80}"/>
+          </ac:spMkLst>
+        </pc:spChg>
+        <pc:spChg chg="add del mod">
+          <ac:chgData name="Stefan Crasmareanu" userId="f13f3dc6586ee41e" providerId="LiveId" clId="{2A4A8B26-2C55-4D44-BAD1-A7A119B3E75F}" dt="2026-03-12T21:52:55.426" v="766" actId="478"/>
+          <ac:spMkLst>
+            <pc:docMk/>
+            <pc:sldMk cId="229704816" sldId="376"/>
+            <ac:spMk id="6" creationId="{116C577E-2788-C127-09D1-3A98DA0A5F9F}"/>
+          </ac:spMkLst>
+        </pc:spChg>
+        <pc:spChg chg="add mod">
+          <ac:chgData name="Stefan Crasmareanu" userId="f13f3dc6586ee41e" providerId="LiveId" clId="{2A4A8B26-2C55-4D44-BAD1-A7A119B3E75F}" dt="2026-03-12T21:53:16.818" v="803" actId="20577"/>
+          <ac:spMkLst>
+            <pc:docMk/>
+            <pc:sldMk cId="229704816" sldId="376"/>
+            <ac:spMk id="7" creationId="{20156D89-94B0-0682-66A0-46795D6EC8C6}"/>
+          </ac:spMkLst>
+        </pc:spChg>
+        <pc:spChg chg="add mod">
+          <ac:chgData name="Stefan Crasmareanu" userId="f13f3dc6586ee41e" providerId="LiveId" clId="{2A4A8B26-2C55-4D44-BAD1-A7A119B3E75F}" dt="2026-03-12T21:53:34.817" v="837" actId="20577"/>
+          <ac:spMkLst>
+            <pc:docMk/>
+            <pc:sldMk cId="229704816" sldId="376"/>
+            <ac:spMk id="9" creationId="{1A171DAF-79D4-01AF-D6B4-90164397C1B8}"/>
+          </ac:spMkLst>
+        </pc:spChg>
+        <pc:spChg chg="add mod">
+          <ac:chgData name="Stefan Crasmareanu" userId="f13f3dc6586ee41e" providerId="LiveId" clId="{2A4A8B26-2C55-4D44-BAD1-A7A119B3E75F}" dt="2026-03-12T21:53:53.541" v="879" actId="20577"/>
+          <ac:spMkLst>
+            <pc:docMk/>
+            <pc:sldMk cId="229704816" sldId="376"/>
+            <ac:spMk id="10" creationId="{9CC5A7EC-9E44-FE98-EC44-BB45B59F9F34}"/>
+          </ac:spMkLst>
+        </pc:spChg>
+        <pc:spChg chg="add mod">
+          <ac:chgData name="Stefan Crasmareanu" userId="f13f3dc6586ee41e" providerId="LiveId" clId="{2A4A8B26-2C55-4D44-BAD1-A7A119B3E75F}" dt="2026-03-12T21:54:17.551" v="934" actId="14100"/>
+          <ac:spMkLst>
+            <pc:docMk/>
+            <pc:sldMk cId="229704816" sldId="376"/>
+            <ac:spMk id="11" creationId="{3C381707-BFF1-CC9E-2F5B-9A855ED9D6EC}"/>
+          </ac:spMkLst>
+        </pc:spChg>
+        <pc:spChg chg="del">
+          <ac:chgData name="Stefan Crasmareanu" userId="f13f3dc6586ee41e" providerId="LiveId" clId="{2A4A8B26-2C55-4D44-BAD1-A7A119B3E75F}" dt="2026-03-12T21:52:49.119" v="763" actId="478"/>
+          <ac:spMkLst>
+            <pc:docMk/>
+            <pc:sldMk cId="229704816" sldId="376"/>
+            <ac:spMk id="12" creationId="{014E3A6E-61B4-5F2D-8B67-7E9D55FD2521}"/>
+          </ac:spMkLst>
+        </pc:spChg>
+        <pc:spChg chg="mod">
+          <ac:chgData name="Stefan Crasmareanu" userId="f13f3dc6586ee41e" providerId="LiveId" clId="{2A4A8B26-2C55-4D44-BAD1-A7A119B3E75F}" dt="2026-03-12T21:50:19.922" v="634" actId="1076"/>
+          <ac:spMkLst>
+            <pc:docMk/>
+            <pc:sldMk cId="229704816" sldId="376"/>
+            <ac:spMk id="15" creationId="{7BBBDB6A-F3ED-8BC5-8CA7-BCC68BF29C85}"/>
+          </ac:spMkLst>
+        </pc:spChg>
+        <pc:spChg chg="del">
+          <ac:chgData name="Stefan Crasmareanu" userId="f13f3dc6586ee41e" providerId="LiveId" clId="{2A4A8B26-2C55-4D44-BAD1-A7A119B3E75F}" dt="2026-03-12T21:52:53.772" v="765" actId="478"/>
+          <ac:spMkLst>
+            <pc:docMk/>
+            <pc:sldMk cId="229704816" sldId="376"/>
+            <ac:spMk id="16" creationId="{71BF2655-858F-BE28-8FC0-CA2923A16AC3}"/>
+          </ac:spMkLst>
+        </pc:spChg>
+        <pc:spChg chg="mod">
+          <ac:chgData name="Stefan Crasmareanu" userId="f13f3dc6586ee41e" providerId="LiveId" clId="{2A4A8B26-2C55-4D44-BAD1-A7A119B3E75F}" dt="2026-03-12T21:52:47.574" v="762" actId="14100"/>
+          <ac:spMkLst>
+            <pc:docMk/>
+            <pc:sldMk cId="229704816" sldId="376"/>
+            <ac:spMk id="18" creationId="{ABCDAB9F-AA42-B47A-D4AC-030889817937}"/>
+          </ac:spMkLst>
+        </pc:spChg>
+        <pc:spChg chg="mod">
+          <ac:chgData name="Stefan Crasmareanu" userId="f13f3dc6586ee41e" providerId="LiveId" clId="{2A4A8B26-2C55-4D44-BAD1-A7A119B3E75F}" dt="2026-03-12T21:51:04.272" v="739" actId="14100"/>
+          <ac:spMkLst>
+            <pc:docMk/>
+            <pc:sldMk cId="229704816" sldId="376"/>
+            <ac:spMk id="45" creationId="{B00D866B-27DB-08B9-94FD-B8CDCC646ABC}"/>
+          </ac:spMkLst>
+        </pc:spChg>
+        <pc:cxnChg chg="add mod">
+          <ac:chgData name="Stefan Crasmareanu" userId="f13f3dc6586ee41e" providerId="LiveId" clId="{2A4A8B26-2C55-4D44-BAD1-A7A119B3E75F}" dt="2026-03-12T21:55:41.736" v="950" actId="1582"/>
+          <ac:cxnSpMkLst>
+            <pc:docMk/>
+            <pc:sldMk cId="229704816" sldId="376"/>
+            <ac:cxnSpMk id="14" creationId="{C7DE52F3-D430-3455-BDF0-1B7633B41411}"/>
+          </ac:cxnSpMkLst>
+        </pc:cxnChg>
+        <pc:cxnChg chg="add mod">
+          <ac:chgData name="Stefan Crasmareanu" userId="f13f3dc6586ee41e" providerId="LiveId" clId="{2A4A8B26-2C55-4D44-BAD1-A7A119B3E75F}" dt="2026-03-12T21:55:41.736" v="950" actId="1582"/>
+          <ac:cxnSpMkLst>
+            <pc:docMk/>
+            <pc:sldMk cId="229704816" sldId="376"/>
+            <ac:cxnSpMk id="19" creationId="{DDDE5319-3155-5D4D-5EA9-FBC300FB5905}"/>
+          </ac:cxnSpMkLst>
+        </pc:cxnChg>
+        <pc:cxnChg chg="add mod">
+          <ac:chgData name="Stefan Crasmareanu" userId="f13f3dc6586ee41e" providerId="LiveId" clId="{2A4A8B26-2C55-4D44-BAD1-A7A119B3E75F}" dt="2026-03-12T21:55:41.736" v="950" actId="1582"/>
+          <ac:cxnSpMkLst>
+            <pc:docMk/>
+            <pc:sldMk cId="229704816" sldId="376"/>
+            <ac:cxnSpMk id="21" creationId="{7E98EE45-6DFB-4FB3-BC47-CF7A6D1A30A1}"/>
+          </ac:cxnSpMkLst>
+        </pc:cxnChg>
+        <pc:cxnChg chg="add mod">
+          <ac:chgData name="Stefan Crasmareanu" userId="f13f3dc6586ee41e" providerId="LiveId" clId="{2A4A8B26-2C55-4D44-BAD1-A7A119B3E75F}" dt="2026-03-12T21:55:41.736" v="950" actId="1582"/>
+          <ac:cxnSpMkLst>
+            <pc:docMk/>
+            <pc:sldMk cId="229704816" sldId="376"/>
+            <ac:cxnSpMk id="23" creationId="{6EC53414-2C37-1AC6-AF65-F4939BA82C97}"/>
+          </ac:cxnSpMkLst>
+        </pc:cxnChg>
+        <pc:cxnChg chg="add mod">
+          <ac:chgData name="Stefan Crasmareanu" userId="f13f3dc6586ee41e" providerId="LiveId" clId="{2A4A8B26-2C55-4D44-BAD1-A7A119B3E75F}" dt="2026-03-12T21:55:41.736" v="950" actId="1582"/>
+          <ac:cxnSpMkLst>
+            <pc:docMk/>
+            <pc:sldMk cId="229704816" sldId="376"/>
+            <ac:cxnSpMk id="24" creationId="{18A699F6-6BE6-4E7D-638C-E27A69508EDE}"/>
+          </ac:cxnSpMkLst>
+        </pc:cxnChg>
+      </pc:sldChg>
+      <pc:sldChg chg="addSp modSp add mod">
+        <pc:chgData name="Stefan Crasmareanu" userId="f13f3dc6586ee41e" providerId="LiveId" clId="{2A4A8B26-2C55-4D44-BAD1-A7A119B3E75F}" dt="2026-03-12T22:23:18.322" v="3011" actId="20577"/>
+        <pc:sldMkLst>
+          <pc:docMk/>
+          <pc:sldMk cId="280570596" sldId="377"/>
+        </pc:sldMkLst>
+        <pc:spChg chg="mod">
+          <ac:chgData name="Stefan Crasmareanu" userId="f13f3dc6586ee41e" providerId="LiveId" clId="{2A4A8B26-2C55-4D44-BAD1-A7A119B3E75F}" dt="2026-03-12T22:23:18.322" v="3011" actId="20577"/>
+          <ac:spMkLst>
+            <pc:docMk/>
+            <pc:sldMk cId="280570596" sldId="377"/>
+            <ac:spMk id="2" creationId="{F5087830-525B-DC6F-E5AC-7853FBA441BC}"/>
+          </ac:spMkLst>
+        </pc:spChg>
+        <pc:spChg chg="mod">
+          <ac:chgData name="Stefan Crasmareanu" userId="f13f3dc6586ee41e" providerId="LiveId" clId="{2A4A8B26-2C55-4D44-BAD1-A7A119B3E75F}" dt="2026-03-12T21:56:03.090" v="971" actId="20577"/>
+          <ac:spMkLst>
+            <pc:docMk/>
+            <pc:sldMk cId="280570596" sldId="377"/>
+            <ac:spMk id="3" creationId="{ABB7637F-1EEA-9221-2346-17AC0BAE1810}"/>
+          </ac:spMkLst>
+        </pc:spChg>
+        <pc:picChg chg="add mod ord">
+          <ac:chgData name="Stefan Crasmareanu" userId="f13f3dc6586ee41e" providerId="LiveId" clId="{2A4A8B26-2C55-4D44-BAD1-A7A119B3E75F}" dt="2026-03-12T22:05:43.294" v="1821" actId="14100"/>
+          <ac:picMkLst>
+            <pc:docMk/>
+            <pc:sldMk cId="280570596" sldId="377"/>
+            <ac:picMk id="5" creationId="{A549AFE0-94D8-5D75-D63E-6CE3C34BD030}"/>
+          </ac:picMkLst>
+        </pc:picChg>
+      </pc:sldChg>
+      <pc:sldChg chg="addSp delSp modSp add mod">
+        <pc:chgData name="Stefan Crasmareanu" userId="f13f3dc6586ee41e" providerId="LiveId" clId="{2A4A8B26-2C55-4D44-BAD1-A7A119B3E75F}" dt="2026-03-12T22:07:53.768" v="2032" actId="12"/>
+        <pc:sldMkLst>
+          <pc:docMk/>
+          <pc:sldMk cId="3095719389" sldId="378"/>
+        </pc:sldMkLst>
+        <pc:spChg chg="del">
+          <ac:chgData name="Stefan Crasmareanu" userId="f13f3dc6586ee41e" providerId="LiveId" clId="{2A4A8B26-2C55-4D44-BAD1-A7A119B3E75F}" dt="2026-03-12T22:02:18.113" v="1505" actId="478"/>
+          <ac:spMkLst>
+            <pc:docMk/>
+            <pc:sldMk cId="3095719389" sldId="378"/>
+            <ac:spMk id="2" creationId="{2176DA9D-9EF6-2BE2-8BD3-64FD6836E6E5}"/>
+          </ac:spMkLst>
+        </pc:spChg>
+        <pc:spChg chg="mod">
+          <ac:chgData name="Stefan Crasmareanu" userId="f13f3dc6586ee41e" providerId="LiveId" clId="{2A4A8B26-2C55-4D44-BAD1-A7A119B3E75F}" dt="2026-03-12T22:02:15.033" v="1504" actId="20577"/>
+          <ac:spMkLst>
+            <pc:docMk/>
+            <pc:sldMk cId="3095719389" sldId="378"/>
+            <ac:spMk id="3" creationId="{3CB63237-AA3B-897D-9997-DE7A5F910A5D}"/>
+          </ac:spMkLst>
+        </pc:spChg>
+        <pc:spChg chg="add mod">
+          <ac:chgData name="Stefan Crasmareanu" userId="f13f3dc6586ee41e" providerId="LiveId" clId="{2A4A8B26-2C55-4D44-BAD1-A7A119B3E75F}" dt="2026-03-12T22:07:47.612" v="2031" actId="12"/>
+          <ac:spMkLst>
+            <pc:docMk/>
+            <pc:sldMk cId="3095719389" sldId="378"/>
+            <ac:spMk id="8" creationId="{60C993B2-396E-F635-826D-C81FD70E310D}"/>
+          </ac:spMkLst>
+        </pc:spChg>
+        <pc:spChg chg="add mod">
+          <ac:chgData name="Stefan Crasmareanu" userId="f13f3dc6586ee41e" providerId="LiveId" clId="{2A4A8B26-2C55-4D44-BAD1-A7A119B3E75F}" dt="2026-03-12T22:07:53.768" v="2032" actId="12"/>
+          <ac:spMkLst>
+            <pc:docMk/>
+            <pc:sldMk cId="3095719389" sldId="378"/>
+            <ac:spMk id="9" creationId="{17B6C132-407C-3114-0AB8-3CED365AC271}"/>
+          </ac:spMkLst>
+        </pc:spChg>
+        <pc:picChg chg="del">
+          <ac:chgData name="Stefan Crasmareanu" userId="f13f3dc6586ee41e" providerId="LiveId" clId="{2A4A8B26-2C55-4D44-BAD1-A7A119B3E75F}" dt="2026-03-12T22:02:19.333" v="1506" actId="478"/>
+          <ac:picMkLst>
+            <pc:docMk/>
+            <pc:sldMk cId="3095719389" sldId="378"/>
+            <ac:picMk id="5" creationId="{12796F13-0539-FBC6-177B-A06262C78D5E}"/>
+          </ac:picMkLst>
+        </pc:picChg>
+        <pc:picChg chg="add mod">
+          <ac:chgData name="Stefan Crasmareanu" userId="f13f3dc6586ee41e" providerId="LiveId" clId="{2A4A8B26-2C55-4D44-BAD1-A7A119B3E75F}" dt="2026-03-12T22:06:02.971" v="1823" actId="1076"/>
+          <ac:picMkLst>
+            <pc:docMk/>
+            <pc:sldMk cId="3095719389" sldId="378"/>
+            <ac:picMk id="7" creationId="{EBA8D579-5F4C-5146-19B0-FADC45DAAE19}"/>
+          </ac:picMkLst>
+        </pc:picChg>
+      </pc:sldChg>
+      <pc:sldChg chg="addSp delSp modSp add mod">
+        <pc:chgData name="Stefan Crasmareanu" userId="f13f3dc6586ee41e" providerId="LiveId" clId="{2A4A8B26-2C55-4D44-BAD1-A7A119B3E75F}" dt="2026-03-12T22:09:29.959" v="2110" actId="1076"/>
+        <pc:sldMkLst>
+          <pc:docMk/>
+          <pc:sldMk cId="1530432536" sldId="379"/>
+        </pc:sldMkLst>
+        <pc:spChg chg="mod">
+          <ac:chgData name="Stefan Crasmareanu" userId="f13f3dc6586ee41e" providerId="LiveId" clId="{2A4A8B26-2C55-4D44-BAD1-A7A119B3E75F}" dt="2026-03-12T22:08:14.778" v="2059" actId="20577"/>
+          <ac:spMkLst>
+            <pc:docMk/>
+            <pc:sldMk cId="1530432536" sldId="379"/>
+            <ac:spMk id="3" creationId="{55AF6D98-F847-62AA-CC7C-9C8D43EC165B}"/>
+          </ac:spMkLst>
+        </pc:spChg>
+        <pc:spChg chg="add mod">
+          <ac:chgData name="Stefan Crasmareanu" userId="f13f3dc6586ee41e" providerId="LiveId" clId="{2A4A8B26-2C55-4D44-BAD1-A7A119B3E75F}" dt="2026-03-12T22:09:29.959" v="2110" actId="1076"/>
+          <ac:spMkLst>
+            <pc:docMk/>
+            <pc:sldMk cId="1530432536" sldId="379"/>
+            <ac:spMk id="5" creationId="{B71C4752-64D0-AA73-6AB5-BEA85399BE6B}"/>
+          </ac:spMkLst>
+        </pc:spChg>
+        <pc:spChg chg="del">
+          <ac:chgData name="Stefan Crasmareanu" userId="f13f3dc6586ee41e" providerId="LiveId" clId="{2A4A8B26-2C55-4D44-BAD1-A7A119B3E75F}" dt="2026-03-12T22:08:18.659" v="2061" actId="478"/>
+          <ac:spMkLst>
+            <pc:docMk/>
+            <pc:sldMk cId="1530432536" sldId="379"/>
+            <ac:spMk id="8" creationId="{B86BE7A9-A6FD-6DB9-3B0E-2036B6783E05}"/>
+          </ac:spMkLst>
+        </pc:spChg>
+        <pc:spChg chg="del">
+          <ac:chgData name="Stefan Crasmareanu" userId="f13f3dc6586ee41e" providerId="LiveId" clId="{2A4A8B26-2C55-4D44-BAD1-A7A119B3E75F}" dt="2026-03-12T22:08:20.432" v="2062" actId="478"/>
+          <ac:spMkLst>
+            <pc:docMk/>
+            <pc:sldMk cId="1530432536" sldId="379"/>
+            <ac:spMk id="9" creationId="{49DAF73E-B53D-8AEA-8241-D5B919CC1179}"/>
+          </ac:spMkLst>
+        </pc:spChg>
+        <pc:picChg chg="add mod">
+          <ac:chgData name="Stefan Crasmareanu" userId="f13f3dc6586ee41e" providerId="LiveId" clId="{2A4A8B26-2C55-4D44-BAD1-A7A119B3E75F}" dt="2026-03-12T22:08:51.574" v="2067" actId="1076"/>
+          <ac:picMkLst>
+            <pc:docMk/>
+            <pc:sldMk cId="1530432536" sldId="379"/>
+            <ac:picMk id="4" creationId="{8388452E-5EEA-32CC-F85D-10E7830FEC28}"/>
+          </ac:picMkLst>
+        </pc:picChg>
+        <pc:picChg chg="del">
+          <ac:chgData name="Stefan Crasmareanu" userId="f13f3dc6586ee41e" providerId="LiveId" clId="{2A4A8B26-2C55-4D44-BAD1-A7A119B3E75F}" dt="2026-03-12T22:08:16.754" v="2060" actId="478"/>
+          <ac:picMkLst>
+            <pc:docMk/>
+            <pc:sldMk cId="1530432536" sldId="379"/>
+            <ac:picMk id="7" creationId="{F295E082-A652-4CC5-413F-91AD2E2C2A49}"/>
+          </ac:picMkLst>
+        </pc:picChg>
+      </pc:sldChg>
+      <pc:sldChg chg="addSp delSp modSp add mod">
+        <pc:chgData name="Stefan Crasmareanu" userId="f13f3dc6586ee41e" providerId="LiveId" clId="{2A4A8B26-2C55-4D44-BAD1-A7A119B3E75F}" dt="2026-03-12T22:19:42.481" v="2533" actId="12"/>
+        <pc:sldMkLst>
+          <pc:docMk/>
+          <pc:sldMk cId="1444017642" sldId="380"/>
+        </pc:sldMkLst>
+        <pc:spChg chg="mod">
+          <ac:chgData name="Stefan Crasmareanu" userId="f13f3dc6586ee41e" providerId="LiveId" clId="{2A4A8B26-2C55-4D44-BAD1-A7A119B3E75F}" dt="2026-03-12T22:10:08.248" v="2126" actId="20577"/>
+          <ac:spMkLst>
+            <pc:docMk/>
+            <pc:sldMk cId="1444017642" sldId="380"/>
+            <ac:spMk id="3" creationId="{1AA77A20-3D1A-8433-D9FD-9A96376EFC63}"/>
+          </ac:spMkLst>
+        </pc:spChg>
+        <pc:spChg chg="del">
+          <ac:chgData name="Stefan Crasmareanu" userId="f13f3dc6586ee41e" providerId="LiveId" clId="{2A4A8B26-2C55-4D44-BAD1-A7A119B3E75F}" dt="2026-03-12T22:10:11.939" v="2128" actId="478"/>
+          <ac:spMkLst>
+            <pc:docMk/>
+            <pc:sldMk cId="1444017642" sldId="380"/>
+            <ac:spMk id="5" creationId="{A869CB58-F6BF-DA52-95DD-BD28AF520703}"/>
+          </ac:spMkLst>
+        </pc:spChg>
+        <pc:spChg chg="add mod">
+          <ac:chgData name="Stefan Crasmareanu" userId="f13f3dc6586ee41e" providerId="LiveId" clId="{2A4A8B26-2C55-4D44-BAD1-A7A119B3E75F}" dt="2026-03-12T22:19:42.481" v="2533" actId="12"/>
+          <ac:spMkLst>
+            <pc:docMk/>
+            <pc:sldMk cId="1444017642" sldId="380"/>
+            <ac:spMk id="8" creationId="{C50E9609-9A1A-88AA-918B-673641356BBB}"/>
+          </ac:spMkLst>
+        </pc:spChg>
+        <pc:picChg chg="del">
+          <ac:chgData name="Stefan Crasmareanu" userId="f13f3dc6586ee41e" providerId="LiveId" clId="{2A4A8B26-2C55-4D44-BAD1-A7A119B3E75F}" dt="2026-03-12T22:10:09.865" v="2127" actId="478"/>
+          <ac:picMkLst>
+            <pc:docMk/>
+            <pc:sldMk cId="1444017642" sldId="380"/>
+            <ac:picMk id="4" creationId="{5CCBDBE8-34BE-4803-A847-B2580A12B21A}"/>
+          </ac:picMkLst>
+        </pc:picChg>
+        <pc:picChg chg="add mod">
+          <ac:chgData name="Stefan Crasmareanu" userId="f13f3dc6586ee41e" providerId="LiveId" clId="{2A4A8B26-2C55-4D44-BAD1-A7A119B3E75F}" dt="2026-03-12T22:11:02.147" v="2132" actId="1076"/>
+          <ac:picMkLst>
+            <pc:docMk/>
+            <pc:sldMk cId="1444017642" sldId="380"/>
+            <ac:picMk id="7" creationId="{D57901CF-A629-EDDC-9AF8-2B2FCF5DF3B8}"/>
+          </ac:picMkLst>
+        </pc:picChg>
+      </pc:sldChg>
+      <pc:sldChg chg="addSp delSp modSp add mod">
+        <pc:chgData name="Stefan Crasmareanu" userId="f13f3dc6586ee41e" providerId="LiveId" clId="{2A4A8B26-2C55-4D44-BAD1-A7A119B3E75F}" dt="2026-03-12T22:12:30.197" v="2191" actId="14100"/>
+        <pc:sldMkLst>
+          <pc:docMk/>
+          <pc:sldMk cId="938725909" sldId="381"/>
+        </pc:sldMkLst>
+        <pc:spChg chg="mod">
+          <ac:chgData name="Stefan Crasmareanu" userId="f13f3dc6586ee41e" providerId="LiveId" clId="{2A4A8B26-2C55-4D44-BAD1-A7A119B3E75F}" dt="2026-03-12T22:11:47.641" v="2185" actId="404"/>
+          <ac:spMkLst>
+            <pc:docMk/>
+            <pc:sldMk cId="938725909" sldId="381"/>
+            <ac:spMk id="3" creationId="{6F65AEE5-76B7-FD54-AEB1-A53257A5CCA7}"/>
+          </ac:spMkLst>
+        </pc:spChg>
+        <pc:picChg chg="add mod">
+          <ac:chgData name="Stefan Crasmareanu" userId="f13f3dc6586ee41e" providerId="LiveId" clId="{2A4A8B26-2C55-4D44-BAD1-A7A119B3E75F}" dt="2026-03-12T22:12:30.197" v="2191" actId="14100"/>
+          <ac:picMkLst>
+            <pc:docMk/>
+            <pc:sldMk cId="938725909" sldId="381"/>
+            <ac:picMk id="4" creationId="{05E72CE8-89EE-E070-740C-F4E1C4B38DA1}"/>
+          </ac:picMkLst>
+        </pc:picChg>
+        <pc:picChg chg="del">
+          <ac:chgData name="Stefan Crasmareanu" userId="f13f3dc6586ee41e" providerId="LiveId" clId="{2A4A8B26-2C55-4D44-BAD1-A7A119B3E75F}" dt="2026-03-12T22:11:50.382" v="2186" actId="478"/>
+          <ac:picMkLst>
+            <pc:docMk/>
+            <pc:sldMk cId="938725909" sldId="381"/>
+            <ac:picMk id="7" creationId="{C3160CB9-ACA7-B2B0-0F70-CF4E4972D01D}"/>
+          </ac:picMkLst>
+        </pc:picChg>
+      </pc:sldChg>
+      <pc:sldChg chg="addSp modSp new mod">
+        <pc:chgData name="Stefan Crasmareanu" userId="f13f3dc6586ee41e" providerId="LiveId" clId="{2A4A8B26-2C55-4D44-BAD1-A7A119B3E75F}" dt="2026-03-12T22:22:10.143" v="2903" actId="255"/>
+        <pc:sldMkLst>
+          <pc:docMk/>
+          <pc:sldMk cId="3301087357" sldId="382"/>
+        </pc:sldMkLst>
+        <pc:spChg chg="mod">
+          <ac:chgData name="Stefan Crasmareanu" userId="f13f3dc6586ee41e" providerId="LiveId" clId="{2A4A8B26-2C55-4D44-BAD1-A7A119B3E75F}" dt="2026-03-12T22:12:58.842" v="2243" actId="20577"/>
+          <ac:spMkLst>
+            <pc:docMk/>
+            <pc:sldMk cId="3301087357" sldId="382"/>
+            <ac:spMk id="2" creationId="{83AB1B63-B26E-8081-1706-83036DDBF2AA}"/>
+          </ac:spMkLst>
+        </pc:spChg>
+        <pc:spChg chg="add mod">
+          <ac:chgData name="Stefan Crasmareanu" userId="f13f3dc6586ee41e" providerId="LiveId" clId="{2A4A8B26-2C55-4D44-BAD1-A7A119B3E75F}" dt="2026-03-12T22:15:02.751" v="2267" actId="1076"/>
+          <ac:spMkLst>
+            <pc:docMk/>
+            <pc:sldMk cId="3301087357" sldId="382"/>
+            <ac:spMk id="5" creationId="{3D253109-12CE-9A65-1577-62ABE61D7274}"/>
+          </ac:spMkLst>
+        </pc:spChg>
+        <pc:spChg chg="add mod">
+          <ac:chgData name="Stefan Crasmareanu" userId="f13f3dc6586ee41e" providerId="LiveId" clId="{2A4A8B26-2C55-4D44-BAD1-A7A119B3E75F}" dt="2026-03-12T22:16:34.199" v="2473" actId="20577"/>
+          <ac:spMkLst>
+            <pc:docMk/>
+            <pc:sldMk cId="3301087357" sldId="382"/>
+            <ac:spMk id="6" creationId="{898B12A2-0B20-13BC-4949-E6584839B031}"/>
+          </ac:spMkLst>
+        </pc:spChg>
+        <pc:spChg chg="add mod">
+          <ac:chgData name="Stefan Crasmareanu" userId="f13f3dc6586ee41e" providerId="LiveId" clId="{2A4A8B26-2C55-4D44-BAD1-A7A119B3E75F}" dt="2026-03-12T22:16:46.430" v="2480" actId="20577"/>
+          <ac:spMkLst>
+            <pc:docMk/>
+            <pc:sldMk cId="3301087357" sldId="382"/>
+            <ac:spMk id="7" creationId="{60B48F94-0E13-E077-F80F-51A8D3D8E25D}"/>
+          </ac:spMkLst>
+        </pc:spChg>
+        <pc:spChg chg="add mod">
+          <ac:chgData name="Stefan Crasmareanu" userId="f13f3dc6586ee41e" providerId="LiveId" clId="{2A4A8B26-2C55-4D44-BAD1-A7A119B3E75F}" dt="2026-03-12T22:21:00.971" v="2709" actId="14100"/>
+          <ac:spMkLst>
+            <pc:docMk/>
+            <pc:sldMk cId="3301087357" sldId="382"/>
+            <ac:spMk id="10" creationId="{8C6D7051-84FC-7169-551F-15DC80B6134C}"/>
+          </ac:spMkLst>
+        </pc:spChg>
+        <pc:spChg chg="add mod">
+          <ac:chgData name="Stefan Crasmareanu" userId="f13f3dc6586ee41e" providerId="LiveId" clId="{2A4A8B26-2C55-4D44-BAD1-A7A119B3E75F}" dt="2026-03-12T22:22:10.143" v="2903" actId="255"/>
+          <ac:spMkLst>
+            <pc:docMk/>
+            <pc:sldMk cId="3301087357" sldId="382"/>
+            <ac:spMk id="11" creationId="{3D6DB3D8-0D5E-669D-3B75-3F860FC47F57}"/>
+          </ac:spMkLst>
+        </pc:spChg>
+        <pc:picChg chg="add mod">
+          <ac:chgData name="Stefan Crasmareanu" userId="f13f3dc6586ee41e" providerId="LiveId" clId="{2A4A8B26-2C55-4D44-BAD1-A7A119B3E75F}" dt="2026-03-12T22:15:04.888" v="2268" actId="1076"/>
+          <ac:picMkLst>
+            <pc:docMk/>
+            <pc:sldMk cId="3301087357" sldId="382"/>
+            <ac:picMk id="4" creationId="{DC06273E-1BD4-CF7E-49B1-54B273DD8DB5}"/>
+          </ac:picMkLst>
+        </pc:picChg>
+        <pc:picChg chg="add mod">
+          <ac:chgData name="Stefan Crasmareanu" userId="f13f3dc6586ee41e" providerId="LiveId" clId="{2A4A8B26-2C55-4D44-BAD1-A7A119B3E75F}" dt="2026-03-12T22:18:51.365" v="2483" actId="14100"/>
+          <ac:picMkLst>
+            <pc:docMk/>
+            <pc:sldMk cId="3301087357" sldId="382"/>
+            <ac:picMk id="9" creationId="{E2A201B7-FC87-91E6-74F9-0D1F7BF52484}"/>
+          </ac:picMkLst>
+        </pc:picChg>
       </pc:sldChg>
     </pc:docChg>
   </pc:docChgLst>
@@ -324,7 +790,7 @@
           <a:p>
             <a:fld id="{6EE7A52F-9D89-7442-A8E9-48D1527B5F6B}" type="datetimeFigureOut">
               <a:rPr lang="en-US" smtClean="0"/>
-              <a:t>3/11/2026</a:t>
+              <a:t>3/12/2026</a:t>
             </a:fld>
             <a:endParaRPr lang="en-US" dirty="0"/>
           </a:p>
@@ -14275,7 +14741,7 @@
         </p:nvSpPr>
         <p:spPr>
           <a:xfrm>
-            <a:off x="1028699" y="1651425"/>
+            <a:off x="1028699" y="1625545"/>
             <a:ext cx="9142716" cy="3744930"/>
           </a:xfrm>
         </p:spPr>
@@ -14291,7 +14757,7 @@
               <a:buAutoNum type="arabicPeriod"/>
             </a:pPr>
             <a:r>
-              <a:rPr lang="en-US" dirty="0">
+              <a:rPr lang="en-US" sz="2400" dirty="0">
                 <a:cs typeface="Calibri"/>
               </a:rPr>
               <a:t>Introduction and context</a:t>
@@ -14306,7 +14772,7 @@
               <a:buAutoNum type="arabicPeriod"/>
             </a:pPr>
             <a:r>
-              <a:rPr lang="en-US" dirty="0">
+              <a:rPr lang="en-US" sz="2400" dirty="0">
                 <a:cs typeface="Calibri"/>
               </a:rPr>
               <a:t>Business Task &amp; Data available</a:t>
@@ -14321,7 +14787,7 @@
               <a:buAutoNum type="arabicPeriod"/>
             </a:pPr>
             <a:r>
-              <a:rPr lang="en-US" dirty="0">
+              <a:rPr lang="en-US" sz="2400" dirty="0">
                 <a:cs typeface="Calibri"/>
               </a:rPr>
               <a:t>Steps in cleaning, processing </a:t>
@@ -14336,7 +14802,7 @@
               <a:buAutoNum type="arabicPeriod"/>
             </a:pPr>
             <a:r>
-              <a:rPr lang="en-US" dirty="0">
+              <a:rPr lang="en-US" sz="2400" dirty="0">
                 <a:cs typeface="Calibri"/>
               </a:rPr>
               <a:t>Analysis</a:t>
@@ -14351,7 +14817,7 @@
               <a:buAutoNum type="arabicPeriod"/>
             </a:pPr>
             <a:r>
-              <a:rPr lang="en-US" dirty="0">
+              <a:rPr lang="en-US" sz="2400" dirty="0">
                 <a:cs typeface="Calibri"/>
               </a:rPr>
               <a:t>Conclusions</a:t>
@@ -14366,7 +14832,7 @@
               <a:buAutoNum type="arabicPeriod"/>
             </a:pPr>
             <a:r>
-              <a:rPr lang="en-US" dirty="0">
+              <a:rPr lang="en-US" sz="2400" dirty="0">
                 <a:cs typeface="Calibri"/>
               </a:rPr>
               <a:t>Proposals</a:t>
@@ -14381,7 +14847,22 @@
               <a:buAutoNum type="arabicPeriod"/>
             </a:pPr>
             <a:r>
-              <a:rPr lang="en-US" dirty="0">
+              <a:rPr lang="en-US" sz="2400" dirty="0">
+                <a:cs typeface="Calibri"/>
+              </a:rPr>
+              <a:t>Another approach using Machine Learning</a:t>
+            </a:r>
+          </a:p>
+          <a:p>
+            <a:pPr marL="514350" indent="-514350">
+              <a:lnSpc>
+                <a:spcPct val="110000"/>
+              </a:lnSpc>
+              <a:buFont typeface="+mj-lt"/>
+              <a:buAutoNum type="arabicPeriod"/>
+            </a:pPr>
+            <a:r>
+              <a:rPr lang="en-US" sz="2400" dirty="0">
                 <a:cs typeface="Calibri"/>
               </a:rPr>
               <a:t>Tools used</a:t>
@@ -14393,7 +14874,7 @@
                 <a:spcPct val="110000"/>
               </a:lnSpc>
             </a:pPr>
-            <a:endParaRPr lang="en-US" dirty="0"/>
+            <a:endParaRPr lang="en-US" sz="2400" dirty="0"/>
           </a:p>
         </p:txBody>
       </p:sp>
@@ -17134,7 +17615,7 @@
         <p:cNvPr id="1" name="">
           <a:extLst>
             <a:ext uri="{FF2B5EF4-FFF2-40B4-BE49-F238E27FC236}">
-              <a16:creationId xmlns:a16="http://schemas.microsoft.com/office/drawing/2014/main" id="{070803D1-4851-730E-6257-279D4AADAA4E}"/>
+              <a16:creationId xmlns:a16="http://schemas.microsoft.com/office/drawing/2014/main" id="{99B28806-FF2A-C724-9A3A-304E5658D6A5}"/>
             </a:ext>
           </a:extLst>
         </p:cNvPr>
@@ -17151,10 +17632,10 @@
       </p:grpSpPr>
       <p:sp>
         <p:nvSpPr>
-          <p:cNvPr id="9" name="Title 8">
-            <a:extLst>
-              <a:ext uri="{FF2B5EF4-FFF2-40B4-BE49-F238E27FC236}">
-                <a16:creationId xmlns:a16="http://schemas.microsoft.com/office/drawing/2014/main" id="{020CC891-1A25-5370-C542-ECC7CCFBFDE8}"/>
+          <p:cNvPr id="2" name="Title 1">
+            <a:extLst>
+              <a:ext uri="{FF2B5EF4-FFF2-40B4-BE49-F238E27FC236}">
+                <a16:creationId xmlns:a16="http://schemas.microsoft.com/office/drawing/2014/main" id="{50C6B568-B1DB-45C7-6EEE-0ABB24399F4F}"/>
               </a:ext>
             </a:extLst>
           </p:cNvPr>
@@ -17167,8 +17648,8 @@
         </p:nvSpPr>
         <p:spPr>
           <a:xfrm>
-            <a:off x="1028699" y="999068"/>
-            <a:ext cx="10582456" cy="645284"/>
+            <a:off x="752655" y="106651"/>
+            <a:ext cx="9849209" cy="646112"/>
           </a:xfrm>
         </p:spPr>
         <p:txBody>
@@ -17176,19 +17657,18 @@
           <a:lstStyle/>
           <a:p>
             <a:r>
-              <a:rPr lang="en-GB" dirty="0"/>
-              <a:t>Tools</a:t>
-            </a:r>
-            <a:endParaRPr lang="ro-RO" dirty="0"/>
-          </a:p>
-        </p:txBody>
-      </p:sp>
-      <p:sp>
-        <p:nvSpPr>
-          <p:cNvPr id="8" name="Slide Number Placeholder 7">
-            <a:extLst>
-              <a:ext uri="{FF2B5EF4-FFF2-40B4-BE49-F238E27FC236}">
-                <a16:creationId xmlns:a16="http://schemas.microsoft.com/office/drawing/2014/main" id="{EF63EEA4-2D44-0E5F-EF04-0DF4B14C2EE3}"/>
+              <a:rPr lang="en-US" sz="3600" dirty="0"/>
+              <a:t>Another approach using Machine Learning</a:t>
+            </a:r>
+          </a:p>
+        </p:txBody>
+      </p:sp>
+      <p:sp>
+        <p:nvSpPr>
+          <p:cNvPr id="18" name="Text Placeholder 17">
+            <a:extLst>
+              <a:ext uri="{FF2B5EF4-FFF2-40B4-BE49-F238E27FC236}">
+                <a16:creationId xmlns:a16="http://schemas.microsoft.com/office/drawing/2014/main" id="{ABCDAB9F-AA42-B47A-D4AC-030889817937}"/>
               </a:ext>
             </a:extLst>
           </p:cNvPr>
@@ -17196,13 +17676,72 @@
             <a:spLocks noGrp="1"/>
           </p:cNvSpPr>
           <p:nvPr>
-            <p:ph type="sldNum" sz="quarter" idx="4294967295"/>
+            <p:ph type="body" sz="quarter" idx="25"/>
           </p:nvPr>
         </p:nvSpPr>
         <p:spPr>
           <a:xfrm>
-            <a:off x="11779250" y="6292850"/>
-            <a:ext cx="412750" cy="182563"/>
+            <a:off x="968376" y="3825799"/>
+            <a:ext cx="2654717" cy="599552"/>
+          </a:xfrm>
+          <a:ln w="28575">
+            <a:solidFill>
+              <a:schemeClr val="bg1">
+                <a:lumMod val="95000"/>
+                <a:lumOff val="5000"/>
+              </a:schemeClr>
+            </a:solidFill>
+          </a:ln>
+        </p:spPr>
+        <p:txBody>
+          <a:bodyPr/>
+          <a:lstStyle/>
+          <a:p>
+            <a:pPr marL="285750" indent="-285750">
+              <a:buFont typeface="Arial" panose="020B0604020202020204" pitchFamily="34" charset="0"/>
+              <a:buChar char="•"/>
+            </a:pPr>
+            <a:r>
+              <a:rPr lang="en-US" sz="1800" b="1" dirty="0" err="1">
+                <a:solidFill>
+                  <a:srgbClr val="7F1368"/>
+                </a:solidFill>
+                <a:latin typeface="Aptos Narrow" panose="020B0004020202020204" pitchFamily="34" charset="0"/>
+              </a:rPr>
+              <a:t>BigQuery</a:t>
+            </a:r>
+            <a:r>
+              <a:rPr lang="en-US" sz="1800" b="1" dirty="0">
+                <a:solidFill>
+                  <a:srgbClr val="7F1368"/>
+                </a:solidFill>
+                <a:latin typeface="Aptos Narrow" panose="020B0004020202020204" pitchFamily="34" charset="0"/>
+              </a:rPr>
+              <a:t> dataset</a:t>
+            </a:r>
+          </a:p>
+        </p:txBody>
+      </p:sp>
+      <p:sp>
+        <p:nvSpPr>
+          <p:cNvPr id="8" name="Slide Number Placeholder 7">
+            <a:extLst>
+              <a:ext uri="{FF2B5EF4-FFF2-40B4-BE49-F238E27FC236}">
+                <a16:creationId xmlns:a16="http://schemas.microsoft.com/office/drawing/2014/main" id="{C8ED1BFF-A585-7FCE-2728-564B91D87D45}"/>
+              </a:ext>
+            </a:extLst>
+          </p:cNvPr>
+          <p:cNvSpPr>
+            <a:spLocks noGrp="1"/>
+          </p:cNvSpPr>
+          <p:nvPr>
+            <p:ph type="sldNum" sz="quarter" idx="28"/>
+          </p:nvPr>
+        </p:nvSpPr>
+        <p:spPr>
+          <a:xfrm>
+            <a:off x="11493500" y="6292334"/>
+            <a:ext cx="412750" cy="182880"/>
           </a:xfrm>
         </p:spPr>
         <p:txBody>
@@ -17220,10 +17759,10 @@
       </p:sp>
       <p:sp>
         <p:nvSpPr>
-          <p:cNvPr id="12" name="TextBox 11">
-            <a:extLst>
-              <a:ext uri="{FF2B5EF4-FFF2-40B4-BE49-F238E27FC236}">
-                <a16:creationId xmlns:a16="http://schemas.microsoft.com/office/drawing/2014/main" id="{6B675EAC-1292-6CA6-A9C8-1D84B6755FF6}"/>
+          <p:cNvPr id="15" name="TextBox 14">
+            <a:extLst>
+              <a:ext uri="{FF2B5EF4-FFF2-40B4-BE49-F238E27FC236}">
+                <a16:creationId xmlns:a16="http://schemas.microsoft.com/office/drawing/2014/main" id="{7BBBDB6A-F3ED-8BC5-8CA7-BCC68BF29C85}"/>
               </a:ext>
             </a:extLst>
           </p:cNvPr>
@@ -17232,8 +17771,8 @@
         </p:nvSpPr>
         <p:spPr>
           <a:xfrm>
-            <a:off x="1104181" y="2286000"/>
-            <a:ext cx="10506974" cy="2308324"/>
+            <a:off x="752655" y="752763"/>
+            <a:ext cx="11043934" cy="1702582"/>
           </a:xfrm>
           <a:prstGeom prst="rect">
             <a:avLst/>
@@ -17241,82 +17780,58 @@
           <a:noFill/>
         </p:spPr>
         <p:txBody>
-          <a:bodyPr wrap="square" rtlCol="0">
+          <a:bodyPr wrap="square">
             <a:spAutoFit/>
           </a:bodyPr>
           <a:lstStyle/>
           <a:p>
-            <a:pPr marL="285750" indent="-285750">
-              <a:buFont typeface="Wingdings" panose="05000000000000000000" pitchFamily="2" charset="2"/>
-              <a:buChar char="Ø"/>
+            <a:pPr>
+              <a:lnSpc>
+                <a:spcPct val="150000"/>
+              </a:lnSpc>
             </a:pPr>
             <a:r>
-              <a:rPr lang="en-GB" sz="2400" dirty="0">
+              <a:rPr lang="en-GB" dirty="0">
                 <a:solidFill>
                   <a:schemeClr val="bg1"/>
                 </a:solidFill>
               </a:rPr>
-              <a:t>Spreadsheets editor: Microsoft Excel 2019</a:t>
-            </a:r>
-          </a:p>
-          <a:p>
-            <a:pPr marL="285750" indent="-285750">
-              <a:buFont typeface="Wingdings" panose="05000000000000000000" pitchFamily="2" charset="2"/>
-              <a:buChar char="Ø"/>
-            </a:pPr>
-            <a:r>
-              <a:rPr lang="en-GB" sz="2400" dirty="0">
-                <a:solidFill>
-                  <a:schemeClr val="bg1"/>
-                </a:solidFill>
-              </a:rPr>
-              <a:t>Relational Data Base Management System: </a:t>
-            </a:r>
-            <a:r>
-              <a:rPr lang="en-GB" sz="2400" dirty="0" err="1">
-                <a:solidFill>
-                  <a:schemeClr val="bg1"/>
-                </a:solidFill>
-              </a:rPr>
-              <a:t>BigQuery</a:t>
-            </a:r>
-            <a:r>
-              <a:rPr lang="en-GB" sz="2400" dirty="0">
-                <a:solidFill>
-                  <a:schemeClr val="bg1"/>
-                </a:solidFill>
-              </a:rPr>
-              <a:t> (with SQL syntax)</a:t>
-            </a:r>
-          </a:p>
-          <a:p>
-            <a:pPr marL="285750" indent="-285750">
-              <a:buFont typeface="Wingdings" panose="05000000000000000000" pitchFamily="2" charset="2"/>
-              <a:buChar char="Ø"/>
-            </a:pPr>
-            <a:r>
-              <a:rPr lang="en-GB" sz="2400" dirty="0">
-                <a:solidFill>
-                  <a:schemeClr val="bg1"/>
-                </a:solidFill>
-              </a:rPr>
-              <a:t>Visualizations: Tableau Public</a:t>
-            </a:r>
-          </a:p>
-          <a:p>
-            <a:pPr marL="285750" indent="-285750">
-              <a:buFont typeface="Wingdings" panose="05000000000000000000" pitchFamily="2" charset="2"/>
-              <a:buChar char="Ø"/>
-            </a:pPr>
-            <a:r>
-              <a:rPr lang="en-GB" sz="2400" dirty="0">
-                <a:solidFill>
-                  <a:schemeClr val="bg1"/>
-                </a:solidFill>
-              </a:rPr>
-              <a:t>All code/resources can be accessed on GitHub profile: https://github.com/stefancrasmareanu-a11y/Case_study_bike_sharing_company/</a:t>
-            </a:r>
-            <a:endParaRPr lang="ro-RO" sz="2400" dirty="0">
+              <a:t>The authors of the case study task propose to analyse data in order to discover what makes the casuals different from the members, and propose strategies accordingly. Another approach to the issue could be to discover which of the currently casual riders already behave like members – thus are more likely to be persuaded in acquiring memberships.</a:t>
+            </a:r>
+          </a:p>
+        </p:txBody>
+      </p:sp>
+      <p:sp>
+        <p:nvSpPr>
+          <p:cNvPr id="30" name="Footer Placeholder 4">
+            <a:extLst>
+              <a:ext uri="{FF2B5EF4-FFF2-40B4-BE49-F238E27FC236}">
+                <a16:creationId xmlns:a16="http://schemas.microsoft.com/office/drawing/2014/main" id="{91993CB3-90B2-CFB1-4B3E-F3480B713A50}"/>
+              </a:ext>
+            </a:extLst>
+          </p:cNvPr>
+          <p:cNvSpPr>
+            <a:spLocks noGrp="1"/>
+          </p:cNvSpPr>
+          <p:nvPr>
+            <p:ph type="ftr" sz="quarter" idx="12"/>
+          </p:nvPr>
+        </p:nvSpPr>
+        <p:spPr>
+          <a:xfrm>
+            <a:off x="7486650" y="6294120"/>
+            <a:ext cx="2274318" cy="181094"/>
+          </a:xfrm>
+        </p:spPr>
+        <p:txBody>
+          <a:bodyPr/>
+          <a:lstStyle/>
+          <a:p>
+            <a:r>
+              <a:rPr lang="en-US" dirty="0"/>
+              <a:t>Data Analysis Case Study</a:t>
+            </a:r>
+            <a:endParaRPr lang="en-US" dirty="0">
               <a:solidFill>
                 <a:schemeClr val="bg1"/>
               </a:solidFill>
@@ -17326,10 +17841,10 @@
       </p:sp>
       <p:sp>
         <p:nvSpPr>
-          <p:cNvPr id="13" name="Footer Placeholder 4">
-            <a:extLst>
-              <a:ext uri="{FF2B5EF4-FFF2-40B4-BE49-F238E27FC236}">
-                <a16:creationId xmlns:a16="http://schemas.microsoft.com/office/drawing/2014/main" id="{7CC1FC98-A728-377B-DEDB-BD6CAF1299AB}"/>
+          <p:cNvPr id="31" name="Date Placeholder 5">
+            <a:extLst>
+              <a:ext uri="{FF2B5EF4-FFF2-40B4-BE49-F238E27FC236}">
+                <a16:creationId xmlns:a16="http://schemas.microsoft.com/office/drawing/2014/main" id="{845088A9-1B70-BC7D-54D1-D1E55B98135E}"/>
               </a:ext>
             </a:extLst>
           </p:cNvPr>
@@ -17340,135 +17855,7 @@
         </p:nvSpPr>
         <p:spPr>
           <a:xfrm>
-            <a:off x="7478023" y="6381766"/>
-            <a:ext cx="2274318" cy="181094"/>
-          </a:xfrm>
-          <a:prstGeom prst="rect">
-            <a:avLst/>
-          </a:prstGeom>
-        </p:spPr>
-        <p:txBody>
-          <a:bodyPr vert="horz" lIns="0" tIns="45720" rIns="0" bIns="45720" rtlCol="0" anchor="ctr"/>
-          <a:lstStyle>
-            <a:defPPr>
-              <a:defRPr lang="en-US"/>
-            </a:defPPr>
-            <a:lvl1pPr marL="0" algn="l" defTabSz="914400" rtl="0" eaLnBrk="1" latinLnBrk="0" hangingPunct="1">
-              <a:defRPr sz="1200" b="0" kern="1200">
-                <a:solidFill>
-                  <a:schemeClr val="bg1"/>
-                </a:solidFill>
-                <a:latin typeface="+mn-lt"/>
-                <a:ea typeface="+mn-ea"/>
-                <a:cs typeface="+mn-cs"/>
-              </a:defRPr>
-            </a:lvl1pPr>
-            <a:lvl2pPr marL="457200" algn="l" defTabSz="914400" rtl="0" eaLnBrk="1" latinLnBrk="0" hangingPunct="1">
-              <a:defRPr sz="1800" kern="1200">
-                <a:solidFill>
-                  <a:schemeClr val="tx1"/>
-                </a:solidFill>
-                <a:latin typeface="+mn-lt"/>
-                <a:ea typeface="+mn-ea"/>
-                <a:cs typeface="+mn-cs"/>
-              </a:defRPr>
-            </a:lvl2pPr>
-            <a:lvl3pPr marL="914400" algn="l" defTabSz="914400" rtl="0" eaLnBrk="1" latinLnBrk="0" hangingPunct="1">
-              <a:defRPr sz="1800" kern="1200">
-                <a:solidFill>
-                  <a:schemeClr val="tx1"/>
-                </a:solidFill>
-                <a:latin typeface="+mn-lt"/>
-                <a:ea typeface="+mn-ea"/>
-                <a:cs typeface="+mn-cs"/>
-              </a:defRPr>
-            </a:lvl3pPr>
-            <a:lvl4pPr marL="1371600" algn="l" defTabSz="914400" rtl="0" eaLnBrk="1" latinLnBrk="0" hangingPunct="1">
-              <a:defRPr sz="1800" kern="1200">
-                <a:solidFill>
-                  <a:schemeClr val="tx1"/>
-                </a:solidFill>
-                <a:latin typeface="+mn-lt"/>
-                <a:ea typeface="+mn-ea"/>
-                <a:cs typeface="+mn-cs"/>
-              </a:defRPr>
-            </a:lvl4pPr>
-            <a:lvl5pPr marL="1828800" algn="l" defTabSz="914400" rtl="0" eaLnBrk="1" latinLnBrk="0" hangingPunct="1">
-              <a:defRPr sz="1800" kern="1200">
-                <a:solidFill>
-                  <a:schemeClr val="tx1"/>
-                </a:solidFill>
-                <a:latin typeface="+mn-lt"/>
-                <a:ea typeface="+mn-ea"/>
-                <a:cs typeface="+mn-cs"/>
-              </a:defRPr>
-            </a:lvl5pPr>
-            <a:lvl6pPr marL="2286000" algn="l" defTabSz="914400" rtl="0" eaLnBrk="1" latinLnBrk="0" hangingPunct="1">
-              <a:defRPr sz="1800" kern="1200">
-                <a:solidFill>
-                  <a:schemeClr val="tx1"/>
-                </a:solidFill>
-                <a:latin typeface="+mn-lt"/>
-                <a:ea typeface="+mn-ea"/>
-                <a:cs typeface="+mn-cs"/>
-              </a:defRPr>
-            </a:lvl6pPr>
-            <a:lvl7pPr marL="2743200" algn="l" defTabSz="914400" rtl="0" eaLnBrk="1" latinLnBrk="0" hangingPunct="1">
-              <a:defRPr sz="1800" kern="1200">
-                <a:solidFill>
-                  <a:schemeClr val="tx1"/>
-                </a:solidFill>
-                <a:latin typeface="+mn-lt"/>
-                <a:ea typeface="+mn-ea"/>
-                <a:cs typeface="+mn-cs"/>
-              </a:defRPr>
-            </a:lvl7pPr>
-            <a:lvl8pPr marL="3200400" algn="l" defTabSz="914400" rtl="0" eaLnBrk="1" latinLnBrk="0" hangingPunct="1">
-              <a:defRPr sz="1800" kern="1200">
-                <a:solidFill>
-                  <a:schemeClr val="tx1"/>
-                </a:solidFill>
-                <a:latin typeface="+mn-lt"/>
-                <a:ea typeface="+mn-ea"/>
-                <a:cs typeface="+mn-cs"/>
-              </a:defRPr>
-            </a:lvl8pPr>
-            <a:lvl9pPr marL="3657600" algn="l" defTabSz="914400" rtl="0" eaLnBrk="1" latinLnBrk="0" hangingPunct="1">
-              <a:defRPr sz="1800" kern="1200">
-                <a:solidFill>
-                  <a:schemeClr val="tx1"/>
-                </a:solidFill>
-                <a:latin typeface="+mn-lt"/>
-                <a:ea typeface="+mn-ea"/>
-                <a:cs typeface="+mn-cs"/>
-              </a:defRPr>
-            </a:lvl9pPr>
-          </a:lstStyle>
-          <a:p>
-            <a:r>
-              <a:rPr lang="en-US" dirty="0"/>
-              <a:t>Data Analysis Case Study</a:t>
-            </a:r>
-          </a:p>
-        </p:txBody>
-      </p:sp>
-      <p:sp>
-        <p:nvSpPr>
-          <p:cNvPr id="14" name="Date Placeholder 5">
-            <a:extLst>
-              <a:ext uri="{FF2B5EF4-FFF2-40B4-BE49-F238E27FC236}">
-                <a16:creationId xmlns:a16="http://schemas.microsoft.com/office/drawing/2014/main" id="{77333B79-60C8-7471-9411-84E4495B2B41}"/>
-              </a:ext>
-            </a:extLst>
-          </p:cNvPr>
-          <p:cNvSpPr txBox="1">
-            <a:spLocks/>
-          </p:cNvSpPr>
-          <p:nvPr/>
-        </p:nvSpPr>
-        <p:spPr>
-          <a:xfrm>
-            <a:off x="9822191" y="6379980"/>
+            <a:off x="9830818" y="6292334"/>
             <a:ext cx="1522982" cy="182880"/>
           </a:xfrm>
           <a:prstGeom prst="rect">
@@ -17584,10 +17971,1149 @@
           </a:p>
         </p:txBody>
       </p:sp>
+      <p:sp>
+        <p:nvSpPr>
+          <p:cNvPr id="45" name="TextBox 44">
+            <a:extLst>
+              <a:ext uri="{FF2B5EF4-FFF2-40B4-BE49-F238E27FC236}">
+                <a16:creationId xmlns:a16="http://schemas.microsoft.com/office/drawing/2014/main" id="{B00D866B-27DB-08B9-94FD-B8CDCC646ABC}"/>
+              </a:ext>
+            </a:extLst>
+          </p:cNvPr>
+          <p:cNvSpPr txBox="1"/>
+          <p:nvPr/>
+        </p:nvSpPr>
+        <p:spPr>
+          <a:xfrm>
+            <a:off x="757147" y="2716241"/>
+            <a:ext cx="10396808" cy="871585"/>
+          </a:xfrm>
+          <a:prstGeom prst="rect">
+            <a:avLst/>
+          </a:prstGeom>
+          <a:noFill/>
+        </p:spPr>
+        <p:txBody>
+          <a:bodyPr wrap="square">
+            <a:spAutoFit/>
+          </a:bodyPr>
+          <a:lstStyle/>
+          <a:p>
+            <a:pPr>
+              <a:lnSpc>
+                <a:spcPct val="150000"/>
+              </a:lnSpc>
+            </a:pPr>
+            <a:r>
+              <a:rPr lang="en-GB" dirty="0">
+                <a:solidFill>
+                  <a:schemeClr val="bg1"/>
+                </a:solidFill>
+              </a:rPr>
+              <a:t>Thus, I developed the following scheme, with the aim to build a membership recommendation calculator:</a:t>
+            </a:r>
+          </a:p>
+        </p:txBody>
+      </p:sp>
+      <p:sp>
+        <p:nvSpPr>
+          <p:cNvPr id="7" name="Text Placeholder 17">
+            <a:extLst>
+              <a:ext uri="{FF2B5EF4-FFF2-40B4-BE49-F238E27FC236}">
+                <a16:creationId xmlns:a16="http://schemas.microsoft.com/office/drawing/2014/main" id="{20156D89-94B0-0682-66A0-46795D6EC8C6}"/>
+              </a:ext>
+            </a:extLst>
+          </p:cNvPr>
+          <p:cNvSpPr txBox="1">
+            <a:spLocks/>
+          </p:cNvSpPr>
+          <p:nvPr/>
+        </p:nvSpPr>
+        <p:spPr>
+          <a:xfrm>
+            <a:off x="4286670" y="3825799"/>
+            <a:ext cx="2654717" cy="599552"/>
+          </a:xfrm>
+          <a:prstGeom prst="rect">
+            <a:avLst/>
+          </a:prstGeom>
+          <a:ln w="28575">
+            <a:solidFill>
+              <a:schemeClr val="bg1">
+                <a:lumMod val="95000"/>
+                <a:lumOff val="5000"/>
+              </a:schemeClr>
+            </a:solidFill>
+          </a:ln>
+        </p:spPr>
+        <p:txBody>
+          <a:bodyPr/>
+          <a:lstStyle>
+            <a:lvl1pPr marL="0" indent="0" algn="l" defTabSz="914400" rtl="0" eaLnBrk="1" latinLnBrk="0" hangingPunct="1">
+              <a:lnSpc>
+                <a:spcPct val="100000"/>
+              </a:lnSpc>
+              <a:spcBef>
+                <a:spcPts val="1000"/>
+              </a:spcBef>
+              <a:buFont typeface="Arial" panose="020B0604020202020204" pitchFamily="34" charset="0"/>
+              <a:buNone/>
+              <a:defRPr sz="1400" kern="1200">
+                <a:solidFill>
+                  <a:schemeClr val="bg1"/>
+                </a:solidFill>
+                <a:latin typeface="+mn-lt"/>
+                <a:ea typeface="+mn-ea"/>
+                <a:cs typeface="+mn-cs"/>
+              </a:defRPr>
+            </a:lvl1pPr>
+            <a:lvl2pPr marL="685800" indent="-228600" algn="l" defTabSz="914400" rtl="0" eaLnBrk="1" latinLnBrk="0" hangingPunct="1">
+              <a:lnSpc>
+                <a:spcPct val="90000"/>
+              </a:lnSpc>
+              <a:spcBef>
+                <a:spcPts val="500"/>
+              </a:spcBef>
+              <a:buFont typeface="Arial" panose="020B0604020202020204" pitchFamily="34" charset="0"/>
+              <a:buNone/>
+              <a:defRPr sz="1400" kern="1200">
+                <a:solidFill>
+                  <a:schemeClr val="bg1"/>
+                </a:solidFill>
+                <a:latin typeface="+mn-lt"/>
+                <a:ea typeface="+mn-ea"/>
+                <a:cs typeface="+mn-cs"/>
+              </a:defRPr>
+            </a:lvl2pPr>
+            <a:lvl3pPr marL="1143000" indent="-228600" algn="l" defTabSz="914400" rtl="0" eaLnBrk="1" latinLnBrk="0" hangingPunct="1">
+              <a:lnSpc>
+                <a:spcPct val="90000"/>
+              </a:lnSpc>
+              <a:spcBef>
+                <a:spcPts val="500"/>
+              </a:spcBef>
+              <a:buFont typeface="Arial" panose="020B0604020202020204" pitchFamily="34" charset="0"/>
+              <a:buNone/>
+              <a:defRPr sz="1400" kern="1200">
+                <a:solidFill>
+                  <a:schemeClr val="bg1"/>
+                </a:solidFill>
+                <a:latin typeface="+mn-lt"/>
+                <a:ea typeface="+mn-ea"/>
+                <a:cs typeface="+mn-cs"/>
+              </a:defRPr>
+            </a:lvl3pPr>
+            <a:lvl4pPr marL="1600200" indent="-228600" algn="l" defTabSz="914400" rtl="0" eaLnBrk="1" latinLnBrk="0" hangingPunct="1">
+              <a:lnSpc>
+                <a:spcPct val="90000"/>
+              </a:lnSpc>
+              <a:spcBef>
+                <a:spcPts val="500"/>
+              </a:spcBef>
+              <a:buFont typeface="Arial" panose="020B0604020202020204" pitchFamily="34" charset="0"/>
+              <a:buNone/>
+              <a:defRPr sz="1400" kern="1200">
+                <a:solidFill>
+                  <a:schemeClr val="bg1"/>
+                </a:solidFill>
+                <a:latin typeface="+mn-lt"/>
+                <a:ea typeface="+mn-ea"/>
+                <a:cs typeface="+mn-cs"/>
+              </a:defRPr>
+            </a:lvl4pPr>
+            <a:lvl5pPr marL="2057400" indent="-228600" algn="l" defTabSz="914400" rtl="0" eaLnBrk="1" latinLnBrk="0" hangingPunct="1">
+              <a:lnSpc>
+                <a:spcPct val="90000"/>
+              </a:lnSpc>
+              <a:spcBef>
+                <a:spcPts val="500"/>
+              </a:spcBef>
+              <a:buFont typeface="Arial" panose="020B0604020202020204" pitchFamily="34" charset="0"/>
+              <a:buNone/>
+              <a:defRPr sz="1400" kern="1200">
+                <a:solidFill>
+                  <a:schemeClr val="bg1"/>
+                </a:solidFill>
+                <a:latin typeface="+mn-lt"/>
+                <a:ea typeface="+mn-ea"/>
+                <a:cs typeface="+mn-cs"/>
+              </a:defRPr>
+            </a:lvl5pPr>
+            <a:lvl6pPr marL="2514600" indent="-228600" algn="l" defTabSz="914400" rtl="0" eaLnBrk="1" latinLnBrk="0" hangingPunct="1">
+              <a:lnSpc>
+                <a:spcPct val="90000"/>
+              </a:lnSpc>
+              <a:spcBef>
+                <a:spcPts val="500"/>
+              </a:spcBef>
+              <a:buFont typeface="Arial" panose="020B0604020202020204" pitchFamily="34" charset="0"/>
+              <a:buChar char="•"/>
+              <a:defRPr sz="1800" kern="1200">
+                <a:solidFill>
+                  <a:schemeClr val="tx1"/>
+                </a:solidFill>
+                <a:latin typeface="+mn-lt"/>
+                <a:ea typeface="+mn-ea"/>
+                <a:cs typeface="+mn-cs"/>
+              </a:defRPr>
+            </a:lvl6pPr>
+            <a:lvl7pPr marL="2971800" indent="-228600" algn="l" defTabSz="914400" rtl="0" eaLnBrk="1" latinLnBrk="0" hangingPunct="1">
+              <a:lnSpc>
+                <a:spcPct val="90000"/>
+              </a:lnSpc>
+              <a:spcBef>
+                <a:spcPts val="500"/>
+              </a:spcBef>
+              <a:buFont typeface="Arial" panose="020B0604020202020204" pitchFamily="34" charset="0"/>
+              <a:buChar char="•"/>
+              <a:defRPr sz="1800" kern="1200">
+                <a:solidFill>
+                  <a:schemeClr val="tx1"/>
+                </a:solidFill>
+                <a:latin typeface="+mn-lt"/>
+                <a:ea typeface="+mn-ea"/>
+                <a:cs typeface="+mn-cs"/>
+              </a:defRPr>
+            </a:lvl7pPr>
+            <a:lvl8pPr marL="3429000" indent="-228600" algn="l" defTabSz="914400" rtl="0" eaLnBrk="1" latinLnBrk="0" hangingPunct="1">
+              <a:lnSpc>
+                <a:spcPct val="90000"/>
+              </a:lnSpc>
+              <a:spcBef>
+                <a:spcPts val="500"/>
+              </a:spcBef>
+              <a:buFont typeface="Arial" panose="020B0604020202020204" pitchFamily="34" charset="0"/>
+              <a:buChar char="•"/>
+              <a:defRPr sz="1800" kern="1200">
+                <a:solidFill>
+                  <a:schemeClr val="tx1"/>
+                </a:solidFill>
+                <a:latin typeface="+mn-lt"/>
+                <a:ea typeface="+mn-ea"/>
+                <a:cs typeface="+mn-cs"/>
+              </a:defRPr>
+            </a:lvl8pPr>
+            <a:lvl9pPr marL="3886200" indent="-228600" algn="l" defTabSz="914400" rtl="0" eaLnBrk="1" latinLnBrk="0" hangingPunct="1">
+              <a:lnSpc>
+                <a:spcPct val="90000"/>
+              </a:lnSpc>
+              <a:spcBef>
+                <a:spcPts val="500"/>
+              </a:spcBef>
+              <a:buFont typeface="Arial" panose="020B0604020202020204" pitchFamily="34" charset="0"/>
+              <a:buChar char="•"/>
+              <a:defRPr sz="1800" kern="1200">
+                <a:solidFill>
+                  <a:schemeClr val="tx1"/>
+                </a:solidFill>
+                <a:latin typeface="+mn-lt"/>
+                <a:ea typeface="+mn-ea"/>
+                <a:cs typeface="+mn-cs"/>
+              </a:defRPr>
+            </a:lvl9pPr>
+          </a:lstStyle>
+          <a:p>
+            <a:pPr marL="285750" indent="-285750">
+              <a:buFont typeface="Arial" panose="020B0604020202020204" pitchFamily="34" charset="0"/>
+              <a:buChar char="•"/>
+            </a:pPr>
+            <a:r>
+              <a:rPr lang="en-US" sz="1800" b="1" dirty="0">
+                <a:solidFill>
+                  <a:srgbClr val="7F1368"/>
+                </a:solidFill>
+                <a:latin typeface="Aptos Narrow" panose="020B0004020202020204" pitchFamily="34" charset="0"/>
+              </a:rPr>
+              <a:t>SQL feature query</a:t>
+            </a:r>
+          </a:p>
+        </p:txBody>
+      </p:sp>
+      <p:sp>
+        <p:nvSpPr>
+          <p:cNvPr id="9" name="Text Placeholder 17">
+            <a:extLst>
+              <a:ext uri="{FF2B5EF4-FFF2-40B4-BE49-F238E27FC236}">
+                <a16:creationId xmlns:a16="http://schemas.microsoft.com/office/drawing/2014/main" id="{1A171DAF-79D4-01AF-D6B4-90164397C1B8}"/>
+              </a:ext>
+            </a:extLst>
+          </p:cNvPr>
+          <p:cNvSpPr txBox="1">
+            <a:spLocks/>
+          </p:cNvSpPr>
+          <p:nvPr/>
+        </p:nvSpPr>
+        <p:spPr>
+          <a:xfrm>
+            <a:off x="7806248" y="3848722"/>
+            <a:ext cx="2654717" cy="599552"/>
+          </a:xfrm>
+          <a:prstGeom prst="rect">
+            <a:avLst/>
+          </a:prstGeom>
+          <a:ln w="28575">
+            <a:solidFill>
+              <a:schemeClr val="bg1">
+                <a:lumMod val="95000"/>
+                <a:lumOff val="5000"/>
+              </a:schemeClr>
+            </a:solidFill>
+          </a:ln>
+        </p:spPr>
+        <p:txBody>
+          <a:bodyPr/>
+          <a:lstStyle>
+            <a:lvl1pPr marL="0" indent="0" algn="l" defTabSz="914400" rtl="0" eaLnBrk="1" latinLnBrk="0" hangingPunct="1">
+              <a:lnSpc>
+                <a:spcPct val="100000"/>
+              </a:lnSpc>
+              <a:spcBef>
+                <a:spcPts val="1000"/>
+              </a:spcBef>
+              <a:buFont typeface="Arial" panose="020B0604020202020204" pitchFamily="34" charset="0"/>
+              <a:buNone/>
+              <a:defRPr sz="1400" kern="1200">
+                <a:solidFill>
+                  <a:schemeClr val="bg1"/>
+                </a:solidFill>
+                <a:latin typeface="+mn-lt"/>
+                <a:ea typeface="+mn-ea"/>
+                <a:cs typeface="+mn-cs"/>
+              </a:defRPr>
+            </a:lvl1pPr>
+            <a:lvl2pPr marL="685800" indent="-228600" algn="l" defTabSz="914400" rtl="0" eaLnBrk="1" latinLnBrk="0" hangingPunct="1">
+              <a:lnSpc>
+                <a:spcPct val="90000"/>
+              </a:lnSpc>
+              <a:spcBef>
+                <a:spcPts val="500"/>
+              </a:spcBef>
+              <a:buFont typeface="Arial" panose="020B0604020202020204" pitchFamily="34" charset="0"/>
+              <a:buNone/>
+              <a:defRPr sz="1400" kern="1200">
+                <a:solidFill>
+                  <a:schemeClr val="bg1"/>
+                </a:solidFill>
+                <a:latin typeface="+mn-lt"/>
+                <a:ea typeface="+mn-ea"/>
+                <a:cs typeface="+mn-cs"/>
+              </a:defRPr>
+            </a:lvl2pPr>
+            <a:lvl3pPr marL="1143000" indent="-228600" algn="l" defTabSz="914400" rtl="0" eaLnBrk="1" latinLnBrk="0" hangingPunct="1">
+              <a:lnSpc>
+                <a:spcPct val="90000"/>
+              </a:lnSpc>
+              <a:spcBef>
+                <a:spcPts val="500"/>
+              </a:spcBef>
+              <a:buFont typeface="Arial" panose="020B0604020202020204" pitchFamily="34" charset="0"/>
+              <a:buNone/>
+              <a:defRPr sz="1400" kern="1200">
+                <a:solidFill>
+                  <a:schemeClr val="bg1"/>
+                </a:solidFill>
+                <a:latin typeface="+mn-lt"/>
+                <a:ea typeface="+mn-ea"/>
+                <a:cs typeface="+mn-cs"/>
+              </a:defRPr>
+            </a:lvl3pPr>
+            <a:lvl4pPr marL="1600200" indent="-228600" algn="l" defTabSz="914400" rtl="0" eaLnBrk="1" latinLnBrk="0" hangingPunct="1">
+              <a:lnSpc>
+                <a:spcPct val="90000"/>
+              </a:lnSpc>
+              <a:spcBef>
+                <a:spcPts val="500"/>
+              </a:spcBef>
+              <a:buFont typeface="Arial" panose="020B0604020202020204" pitchFamily="34" charset="0"/>
+              <a:buNone/>
+              <a:defRPr sz="1400" kern="1200">
+                <a:solidFill>
+                  <a:schemeClr val="bg1"/>
+                </a:solidFill>
+                <a:latin typeface="+mn-lt"/>
+                <a:ea typeface="+mn-ea"/>
+                <a:cs typeface="+mn-cs"/>
+              </a:defRPr>
+            </a:lvl4pPr>
+            <a:lvl5pPr marL="2057400" indent="-228600" algn="l" defTabSz="914400" rtl="0" eaLnBrk="1" latinLnBrk="0" hangingPunct="1">
+              <a:lnSpc>
+                <a:spcPct val="90000"/>
+              </a:lnSpc>
+              <a:spcBef>
+                <a:spcPts val="500"/>
+              </a:spcBef>
+              <a:buFont typeface="Arial" panose="020B0604020202020204" pitchFamily="34" charset="0"/>
+              <a:buNone/>
+              <a:defRPr sz="1400" kern="1200">
+                <a:solidFill>
+                  <a:schemeClr val="bg1"/>
+                </a:solidFill>
+                <a:latin typeface="+mn-lt"/>
+                <a:ea typeface="+mn-ea"/>
+                <a:cs typeface="+mn-cs"/>
+              </a:defRPr>
+            </a:lvl5pPr>
+            <a:lvl6pPr marL="2514600" indent="-228600" algn="l" defTabSz="914400" rtl="0" eaLnBrk="1" latinLnBrk="0" hangingPunct="1">
+              <a:lnSpc>
+                <a:spcPct val="90000"/>
+              </a:lnSpc>
+              <a:spcBef>
+                <a:spcPts val="500"/>
+              </a:spcBef>
+              <a:buFont typeface="Arial" panose="020B0604020202020204" pitchFamily="34" charset="0"/>
+              <a:buChar char="•"/>
+              <a:defRPr sz="1800" kern="1200">
+                <a:solidFill>
+                  <a:schemeClr val="tx1"/>
+                </a:solidFill>
+                <a:latin typeface="+mn-lt"/>
+                <a:ea typeface="+mn-ea"/>
+                <a:cs typeface="+mn-cs"/>
+              </a:defRPr>
+            </a:lvl6pPr>
+            <a:lvl7pPr marL="2971800" indent="-228600" algn="l" defTabSz="914400" rtl="0" eaLnBrk="1" latinLnBrk="0" hangingPunct="1">
+              <a:lnSpc>
+                <a:spcPct val="90000"/>
+              </a:lnSpc>
+              <a:spcBef>
+                <a:spcPts val="500"/>
+              </a:spcBef>
+              <a:buFont typeface="Arial" panose="020B0604020202020204" pitchFamily="34" charset="0"/>
+              <a:buChar char="•"/>
+              <a:defRPr sz="1800" kern="1200">
+                <a:solidFill>
+                  <a:schemeClr val="tx1"/>
+                </a:solidFill>
+                <a:latin typeface="+mn-lt"/>
+                <a:ea typeface="+mn-ea"/>
+                <a:cs typeface="+mn-cs"/>
+              </a:defRPr>
+            </a:lvl7pPr>
+            <a:lvl8pPr marL="3429000" indent="-228600" algn="l" defTabSz="914400" rtl="0" eaLnBrk="1" latinLnBrk="0" hangingPunct="1">
+              <a:lnSpc>
+                <a:spcPct val="90000"/>
+              </a:lnSpc>
+              <a:spcBef>
+                <a:spcPts val="500"/>
+              </a:spcBef>
+              <a:buFont typeface="Arial" panose="020B0604020202020204" pitchFamily="34" charset="0"/>
+              <a:buChar char="•"/>
+              <a:defRPr sz="1800" kern="1200">
+                <a:solidFill>
+                  <a:schemeClr val="tx1"/>
+                </a:solidFill>
+                <a:latin typeface="+mn-lt"/>
+                <a:ea typeface="+mn-ea"/>
+                <a:cs typeface="+mn-cs"/>
+              </a:defRPr>
+            </a:lvl8pPr>
+            <a:lvl9pPr marL="3886200" indent="-228600" algn="l" defTabSz="914400" rtl="0" eaLnBrk="1" latinLnBrk="0" hangingPunct="1">
+              <a:lnSpc>
+                <a:spcPct val="90000"/>
+              </a:lnSpc>
+              <a:spcBef>
+                <a:spcPts val="500"/>
+              </a:spcBef>
+              <a:buFont typeface="Arial" panose="020B0604020202020204" pitchFamily="34" charset="0"/>
+              <a:buChar char="•"/>
+              <a:defRPr sz="1800" kern="1200">
+                <a:solidFill>
+                  <a:schemeClr val="tx1"/>
+                </a:solidFill>
+                <a:latin typeface="+mn-lt"/>
+                <a:ea typeface="+mn-ea"/>
+                <a:cs typeface="+mn-cs"/>
+              </a:defRPr>
+            </a:lvl9pPr>
+          </a:lstStyle>
+          <a:p>
+            <a:pPr marL="285750" indent="-285750">
+              <a:buFont typeface="Arial" panose="020B0604020202020204" pitchFamily="34" charset="0"/>
+              <a:buChar char="•"/>
+            </a:pPr>
+            <a:r>
+              <a:rPr lang="en-US" sz="1800" b="1" dirty="0">
+                <a:solidFill>
+                  <a:srgbClr val="7F1368"/>
+                </a:solidFill>
+                <a:latin typeface="Aptos Narrow" panose="020B0004020202020204" pitchFamily="34" charset="0"/>
+              </a:rPr>
+              <a:t>Python </a:t>
+            </a:r>
+            <a:r>
+              <a:rPr lang="en-US" sz="1800" b="1" dirty="0" err="1">
+                <a:solidFill>
+                  <a:srgbClr val="7F1368"/>
+                </a:solidFill>
+                <a:latin typeface="Aptos Narrow" panose="020B0004020202020204" pitchFamily="34" charset="0"/>
+              </a:rPr>
+              <a:t>dataframe</a:t>
+            </a:r>
+            <a:endParaRPr lang="en-US" sz="1800" b="1" dirty="0">
+              <a:solidFill>
+                <a:srgbClr val="7F1368"/>
+              </a:solidFill>
+              <a:latin typeface="Aptos Narrow" panose="020B0004020202020204" pitchFamily="34" charset="0"/>
+            </a:endParaRPr>
+          </a:p>
+        </p:txBody>
+      </p:sp>
+      <p:sp>
+        <p:nvSpPr>
+          <p:cNvPr id="10" name="Text Placeholder 17">
+            <a:extLst>
+              <a:ext uri="{FF2B5EF4-FFF2-40B4-BE49-F238E27FC236}">
+                <a16:creationId xmlns:a16="http://schemas.microsoft.com/office/drawing/2014/main" id="{9CC5A7EC-9E44-FE98-EC44-BB45B59F9F34}"/>
+              </a:ext>
+            </a:extLst>
+          </p:cNvPr>
+          <p:cNvSpPr txBox="1">
+            <a:spLocks/>
+          </p:cNvSpPr>
+          <p:nvPr/>
+        </p:nvSpPr>
+        <p:spPr>
+          <a:xfrm>
+            <a:off x="2161697" y="5148436"/>
+            <a:ext cx="2654717" cy="599552"/>
+          </a:xfrm>
+          <a:prstGeom prst="rect">
+            <a:avLst/>
+          </a:prstGeom>
+          <a:ln w="28575">
+            <a:solidFill>
+              <a:schemeClr val="bg1">
+                <a:lumMod val="95000"/>
+                <a:lumOff val="5000"/>
+              </a:schemeClr>
+            </a:solidFill>
+          </a:ln>
+        </p:spPr>
+        <p:txBody>
+          <a:bodyPr/>
+          <a:lstStyle>
+            <a:lvl1pPr marL="0" indent="0" algn="l" defTabSz="914400" rtl="0" eaLnBrk="1" latinLnBrk="0" hangingPunct="1">
+              <a:lnSpc>
+                <a:spcPct val="100000"/>
+              </a:lnSpc>
+              <a:spcBef>
+                <a:spcPts val="1000"/>
+              </a:spcBef>
+              <a:buFont typeface="Arial" panose="020B0604020202020204" pitchFamily="34" charset="0"/>
+              <a:buNone/>
+              <a:defRPr sz="1400" kern="1200">
+                <a:solidFill>
+                  <a:schemeClr val="bg1"/>
+                </a:solidFill>
+                <a:latin typeface="+mn-lt"/>
+                <a:ea typeface="+mn-ea"/>
+                <a:cs typeface="+mn-cs"/>
+              </a:defRPr>
+            </a:lvl1pPr>
+            <a:lvl2pPr marL="685800" indent="-228600" algn="l" defTabSz="914400" rtl="0" eaLnBrk="1" latinLnBrk="0" hangingPunct="1">
+              <a:lnSpc>
+                <a:spcPct val="90000"/>
+              </a:lnSpc>
+              <a:spcBef>
+                <a:spcPts val="500"/>
+              </a:spcBef>
+              <a:buFont typeface="Arial" panose="020B0604020202020204" pitchFamily="34" charset="0"/>
+              <a:buNone/>
+              <a:defRPr sz="1400" kern="1200">
+                <a:solidFill>
+                  <a:schemeClr val="bg1"/>
+                </a:solidFill>
+                <a:latin typeface="+mn-lt"/>
+                <a:ea typeface="+mn-ea"/>
+                <a:cs typeface="+mn-cs"/>
+              </a:defRPr>
+            </a:lvl2pPr>
+            <a:lvl3pPr marL="1143000" indent="-228600" algn="l" defTabSz="914400" rtl="0" eaLnBrk="1" latinLnBrk="0" hangingPunct="1">
+              <a:lnSpc>
+                <a:spcPct val="90000"/>
+              </a:lnSpc>
+              <a:spcBef>
+                <a:spcPts val="500"/>
+              </a:spcBef>
+              <a:buFont typeface="Arial" panose="020B0604020202020204" pitchFamily="34" charset="0"/>
+              <a:buNone/>
+              <a:defRPr sz="1400" kern="1200">
+                <a:solidFill>
+                  <a:schemeClr val="bg1"/>
+                </a:solidFill>
+                <a:latin typeface="+mn-lt"/>
+                <a:ea typeface="+mn-ea"/>
+                <a:cs typeface="+mn-cs"/>
+              </a:defRPr>
+            </a:lvl3pPr>
+            <a:lvl4pPr marL="1600200" indent="-228600" algn="l" defTabSz="914400" rtl="0" eaLnBrk="1" latinLnBrk="0" hangingPunct="1">
+              <a:lnSpc>
+                <a:spcPct val="90000"/>
+              </a:lnSpc>
+              <a:spcBef>
+                <a:spcPts val="500"/>
+              </a:spcBef>
+              <a:buFont typeface="Arial" panose="020B0604020202020204" pitchFamily="34" charset="0"/>
+              <a:buNone/>
+              <a:defRPr sz="1400" kern="1200">
+                <a:solidFill>
+                  <a:schemeClr val="bg1"/>
+                </a:solidFill>
+                <a:latin typeface="+mn-lt"/>
+                <a:ea typeface="+mn-ea"/>
+                <a:cs typeface="+mn-cs"/>
+              </a:defRPr>
+            </a:lvl4pPr>
+            <a:lvl5pPr marL="2057400" indent="-228600" algn="l" defTabSz="914400" rtl="0" eaLnBrk="1" latinLnBrk="0" hangingPunct="1">
+              <a:lnSpc>
+                <a:spcPct val="90000"/>
+              </a:lnSpc>
+              <a:spcBef>
+                <a:spcPts val="500"/>
+              </a:spcBef>
+              <a:buFont typeface="Arial" panose="020B0604020202020204" pitchFamily="34" charset="0"/>
+              <a:buNone/>
+              <a:defRPr sz="1400" kern="1200">
+                <a:solidFill>
+                  <a:schemeClr val="bg1"/>
+                </a:solidFill>
+                <a:latin typeface="+mn-lt"/>
+                <a:ea typeface="+mn-ea"/>
+                <a:cs typeface="+mn-cs"/>
+              </a:defRPr>
+            </a:lvl5pPr>
+            <a:lvl6pPr marL="2514600" indent="-228600" algn="l" defTabSz="914400" rtl="0" eaLnBrk="1" latinLnBrk="0" hangingPunct="1">
+              <a:lnSpc>
+                <a:spcPct val="90000"/>
+              </a:lnSpc>
+              <a:spcBef>
+                <a:spcPts val="500"/>
+              </a:spcBef>
+              <a:buFont typeface="Arial" panose="020B0604020202020204" pitchFamily="34" charset="0"/>
+              <a:buChar char="•"/>
+              <a:defRPr sz="1800" kern="1200">
+                <a:solidFill>
+                  <a:schemeClr val="tx1"/>
+                </a:solidFill>
+                <a:latin typeface="+mn-lt"/>
+                <a:ea typeface="+mn-ea"/>
+                <a:cs typeface="+mn-cs"/>
+              </a:defRPr>
+            </a:lvl6pPr>
+            <a:lvl7pPr marL="2971800" indent="-228600" algn="l" defTabSz="914400" rtl="0" eaLnBrk="1" latinLnBrk="0" hangingPunct="1">
+              <a:lnSpc>
+                <a:spcPct val="90000"/>
+              </a:lnSpc>
+              <a:spcBef>
+                <a:spcPts val="500"/>
+              </a:spcBef>
+              <a:buFont typeface="Arial" panose="020B0604020202020204" pitchFamily="34" charset="0"/>
+              <a:buChar char="•"/>
+              <a:defRPr sz="1800" kern="1200">
+                <a:solidFill>
+                  <a:schemeClr val="tx1"/>
+                </a:solidFill>
+                <a:latin typeface="+mn-lt"/>
+                <a:ea typeface="+mn-ea"/>
+                <a:cs typeface="+mn-cs"/>
+              </a:defRPr>
+            </a:lvl7pPr>
+            <a:lvl8pPr marL="3429000" indent="-228600" algn="l" defTabSz="914400" rtl="0" eaLnBrk="1" latinLnBrk="0" hangingPunct="1">
+              <a:lnSpc>
+                <a:spcPct val="90000"/>
+              </a:lnSpc>
+              <a:spcBef>
+                <a:spcPts val="500"/>
+              </a:spcBef>
+              <a:buFont typeface="Arial" panose="020B0604020202020204" pitchFamily="34" charset="0"/>
+              <a:buChar char="•"/>
+              <a:defRPr sz="1800" kern="1200">
+                <a:solidFill>
+                  <a:schemeClr val="tx1"/>
+                </a:solidFill>
+                <a:latin typeface="+mn-lt"/>
+                <a:ea typeface="+mn-ea"/>
+                <a:cs typeface="+mn-cs"/>
+              </a:defRPr>
+            </a:lvl8pPr>
+            <a:lvl9pPr marL="3886200" indent="-228600" algn="l" defTabSz="914400" rtl="0" eaLnBrk="1" latinLnBrk="0" hangingPunct="1">
+              <a:lnSpc>
+                <a:spcPct val="90000"/>
+              </a:lnSpc>
+              <a:spcBef>
+                <a:spcPts val="500"/>
+              </a:spcBef>
+              <a:buFont typeface="Arial" panose="020B0604020202020204" pitchFamily="34" charset="0"/>
+              <a:buChar char="•"/>
+              <a:defRPr sz="1800" kern="1200">
+                <a:solidFill>
+                  <a:schemeClr val="tx1"/>
+                </a:solidFill>
+                <a:latin typeface="+mn-lt"/>
+                <a:ea typeface="+mn-ea"/>
+                <a:cs typeface="+mn-cs"/>
+              </a:defRPr>
+            </a:lvl9pPr>
+          </a:lstStyle>
+          <a:p>
+            <a:pPr marL="285750" indent="-285750">
+              <a:buFont typeface="Arial" panose="020B0604020202020204" pitchFamily="34" charset="0"/>
+              <a:buChar char="•"/>
+            </a:pPr>
+            <a:r>
+              <a:rPr lang="en-US" sz="1800" b="1" dirty="0">
+                <a:solidFill>
+                  <a:srgbClr val="7F1368"/>
+                </a:solidFill>
+                <a:latin typeface="Aptos Narrow" panose="020B0004020202020204" pitchFamily="34" charset="0"/>
+              </a:rPr>
+              <a:t>Machine Learning model</a:t>
+            </a:r>
+          </a:p>
+        </p:txBody>
+      </p:sp>
+      <p:sp>
+        <p:nvSpPr>
+          <p:cNvPr id="11" name="Text Placeholder 17">
+            <a:extLst>
+              <a:ext uri="{FF2B5EF4-FFF2-40B4-BE49-F238E27FC236}">
+                <a16:creationId xmlns:a16="http://schemas.microsoft.com/office/drawing/2014/main" id="{3C381707-BFF1-CC9E-2F5B-9A855ED9D6EC}"/>
+              </a:ext>
+            </a:extLst>
+          </p:cNvPr>
+          <p:cNvSpPr txBox="1">
+            <a:spLocks/>
+          </p:cNvSpPr>
+          <p:nvPr/>
+        </p:nvSpPr>
+        <p:spPr>
+          <a:xfrm>
+            <a:off x="6159291" y="5161639"/>
+            <a:ext cx="3671527" cy="599552"/>
+          </a:xfrm>
+          <a:prstGeom prst="rect">
+            <a:avLst/>
+          </a:prstGeom>
+          <a:ln w="28575">
+            <a:solidFill>
+              <a:schemeClr val="bg1">
+                <a:lumMod val="95000"/>
+                <a:lumOff val="5000"/>
+              </a:schemeClr>
+            </a:solidFill>
+          </a:ln>
+        </p:spPr>
+        <p:txBody>
+          <a:bodyPr/>
+          <a:lstStyle>
+            <a:lvl1pPr marL="0" indent="0" algn="l" defTabSz="914400" rtl="0" eaLnBrk="1" latinLnBrk="0" hangingPunct="1">
+              <a:lnSpc>
+                <a:spcPct val="100000"/>
+              </a:lnSpc>
+              <a:spcBef>
+                <a:spcPts val="1000"/>
+              </a:spcBef>
+              <a:buFont typeface="Arial" panose="020B0604020202020204" pitchFamily="34" charset="0"/>
+              <a:buNone/>
+              <a:defRPr sz="1400" kern="1200">
+                <a:solidFill>
+                  <a:schemeClr val="bg1"/>
+                </a:solidFill>
+                <a:latin typeface="+mn-lt"/>
+                <a:ea typeface="+mn-ea"/>
+                <a:cs typeface="+mn-cs"/>
+              </a:defRPr>
+            </a:lvl1pPr>
+            <a:lvl2pPr marL="685800" indent="-228600" algn="l" defTabSz="914400" rtl="0" eaLnBrk="1" latinLnBrk="0" hangingPunct="1">
+              <a:lnSpc>
+                <a:spcPct val="90000"/>
+              </a:lnSpc>
+              <a:spcBef>
+                <a:spcPts val="500"/>
+              </a:spcBef>
+              <a:buFont typeface="Arial" panose="020B0604020202020204" pitchFamily="34" charset="0"/>
+              <a:buNone/>
+              <a:defRPr sz="1400" kern="1200">
+                <a:solidFill>
+                  <a:schemeClr val="bg1"/>
+                </a:solidFill>
+                <a:latin typeface="+mn-lt"/>
+                <a:ea typeface="+mn-ea"/>
+                <a:cs typeface="+mn-cs"/>
+              </a:defRPr>
+            </a:lvl2pPr>
+            <a:lvl3pPr marL="1143000" indent="-228600" algn="l" defTabSz="914400" rtl="0" eaLnBrk="1" latinLnBrk="0" hangingPunct="1">
+              <a:lnSpc>
+                <a:spcPct val="90000"/>
+              </a:lnSpc>
+              <a:spcBef>
+                <a:spcPts val="500"/>
+              </a:spcBef>
+              <a:buFont typeface="Arial" panose="020B0604020202020204" pitchFamily="34" charset="0"/>
+              <a:buNone/>
+              <a:defRPr sz="1400" kern="1200">
+                <a:solidFill>
+                  <a:schemeClr val="bg1"/>
+                </a:solidFill>
+                <a:latin typeface="+mn-lt"/>
+                <a:ea typeface="+mn-ea"/>
+                <a:cs typeface="+mn-cs"/>
+              </a:defRPr>
+            </a:lvl3pPr>
+            <a:lvl4pPr marL="1600200" indent="-228600" algn="l" defTabSz="914400" rtl="0" eaLnBrk="1" latinLnBrk="0" hangingPunct="1">
+              <a:lnSpc>
+                <a:spcPct val="90000"/>
+              </a:lnSpc>
+              <a:spcBef>
+                <a:spcPts val="500"/>
+              </a:spcBef>
+              <a:buFont typeface="Arial" panose="020B0604020202020204" pitchFamily="34" charset="0"/>
+              <a:buNone/>
+              <a:defRPr sz="1400" kern="1200">
+                <a:solidFill>
+                  <a:schemeClr val="bg1"/>
+                </a:solidFill>
+                <a:latin typeface="+mn-lt"/>
+                <a:ea typeface="+mn-ea"/>
+                <a:cs typeface="+mn-cs"/>
+              </a:defRPr>
+            </a:lvl4pPr>
+            <a:lvl5pPr marL="2057400" indent="-228600" algn="l" defTabSz="914400" rtl="0" eaLnBrk="1" latinLnBrk="0" hangingPunct="1">
+              <a:lnSpc>
+                <a:spcPct val="90000"/>
+              </a:lnSpc>
+              <a:spcBef>
+                <a:spcPts val="500"/>
+              </a:spcBef>
+              <a:buFont typeface="Arial" panose="020B0604020202020204" pitchFamily="34" charset="0"/>
+              <a:buNone/>
+              <a:defRPr sz="1400" kern="1200">
+                <a:solidFill>
+                  <a:schemeClr val="bg1"/>
+                </a:solidFill>
+                <a:latin typeface="+mn-lt"/>
+                <a:ea typeface="+mn-ea"/>
+                <a:cs typeface="+mn-cs"/>
+              </a:defRPr>
+            </a:lvl5pPr>
+            <a:lvl6pPr marL="2514600" indent="-228600" algn="l" defTabSz="914400" rtl="0" eaLnBrk="1" latinLnBrk="0" hangingPunct="1">
+              <a:lnSpc>
+                <a:spcPct val="90000"/>
+              </a:lnSpc>
+              <a:spcBef>
+                <a:spcPts val="500"/>
+              </a:spcBef>
+              <a:buFont typeface="Arial" panose="020B0604020202020204" pitchFamily="34" charset="0"/>
+              <a:buChar char="•"/>
+              <a:defRPr sz="1800" kern="1200">
+                <a:solidFill>
+                  <a:schemeClr val="tx1"/>
+                </a:solidFill>
+                <a:latin typeface="+mn-lt"/>
+                <a:ea typeface="+mn-ea"/>
+                <a:cs typeface="+mn-cs"/>
+              </a:defRPr>
+            </a:lvl6pPr>
+            <a:lvl7pPr marL="2971800" indent="-228600" algn="l" defTabSz="914400" rtl="0" eaLnBrk="1" latinLnBrk="0" hangingPunct="1">
+              <a:lnSpc>
+                <a:spcPct val="90000"/>
+              </a:lnSpc>
+              <a:spcBef>
+                <a:spcPts val="500"/>
+              </a:spcBef>
+              <a:buFont typeface="Arial" panose="020B0604020202020204" pitchFamily="34" charset="0"/>
+              <a:buChar char="•"/>
+              <a:defRPr sz="1800" kern="1200">
+                <a:solidFill>
+                  <a:schemeClr val="tx1"/>
+                </a:solidFill>
+                <a:latin typeface="+mn-lt"/>
+                <a:ea typeface="+mn-ea"/>
+                <a:cs typeface="+mn-cs"/>
+              </a:defRPr>
+            </a:lvl7pPr>
+            <a:lvl8pPr marL="3429000" indent="-228600" algn="l" defTabSz="914400" rtl="0" eaLnBrk="1" latinLnBrk="0" hangingPunct="1">
+              <a:lnSpc>
+                <a:spcPct val="90000"/>
+              </a:lnSpc>
+              <a:spcBef>
+                <a:spcPts val="500"/>
+              </a:spcBef>
+              <a:buFont typeface="Arial" panose="020B0604020202020204" pitchFamily="34" charset="0"/>
+              <a:buChar char="•"/>
+              <a:defRPr sz="1800" kern="1200">
+                <a:solidFill>
+                  <a:schemeClr val="tx1"/>
+                </a:solidFill>
+                <a:latin typeface="+mn-lt"/>
+                <a:ea typeface="+mn-ea"/>
+                <a:cs typeface="+mn-cs"/>
+              </a:defRPr>
+            </a:lvl8pPr>
+            <a:lvl9pPr marL="3886200" indent="-228600" algn="l" defTabSz="914400" rtl="0" eaLnBrk="1" latinLnBrk="0" hangingPunct="1">
+              <a:lnSpc>
+                <a:spcPct val="90000"/>
+              </a:lnSpc>
+              <a:spcBef>
+                <a:spcPts val="500"/>
+              </a:spcBef>
+              <a:buFont typeface="Arial" panose="020B0604020202020204" pitchFamily="34" charset="0"/>
+              <a:buChar char="•"/>
+              <a:defRPr sz="1800" kern="1200">
+                <a:solidFill>
+                  <a:schemeClr val="tx1"/>
+                </a:solidFill>
+                <a:latin typeface="+mn-lt"/>
+                <a:ea typeface="+mn-ea"/>
+                <a:cs typeface="+mn-cs"/>
+              </a:defRPr>
+            </a:lvl9pPr>
+          </a:lstStyle>
+          <a:p>
+            <a:pPr marL="285750" indent="-285750">
+              <a:buFont typeface="Arial" panose="020B0604020202020204" pitchFamily="34" charset="0"/>
+              <a:buChar char="•"/>
+            </a:pPr>
+            <a:r>
+              <a:rPr lang="en-US" sz="1800" b="1" dirty="0">
+                <a:solidFill>
+                  <a:srgbClr val="7F1368"/>
+                </a:solidFill>
+                <a:latin typeface="Aptos Narrow" panose="020B0004020202020204" pitchFamily="34" charset="0"/>
+              </a:rPr>
+              <a:t>Membership recommendation calculator</a:t>
+            </a:r>
+          </a:p>
+        </p:txBody>
+      </p:sp>
+      <p:cxnSp>
+        <p:nvCxnSpPr>
+          <p:cNvPr id="14" name="Straight Arrow Connector 13">
+            <a:extLst>
+              <a:ext uri="{FF2B5EF4-FFF2-40B4-BE49-F238E27FC236}">
+                <a16:creationId xmlns:a16="http://schemas.microsoft.com/office/drawing/2014/main" id="{C7DE52F3-D430-3455-BDF0-1B7633B41411}"/>
+              </a:ext>
+            </a:extLst>
+          </p:cNvPr>
+          <p:cNvCxnSpPr>
+            <a:cxnSpLocks/>
+            <a:stCxn id="18" idx="3"/>
+            <a:endCxn id="7" idx="1"/>
+          </p:cNvCxnSpPr>
+          <p:nvPr/>
+        </p:nvCxnSpPr>
+        <p:spPr>
+          <a:xfrm>
+            <a:off x="3623093" y="4125575"/>
+            <a:ext cx="663577" cy="0"/>
+          </a:xfrm>
+          <a:prstGeom prst="straightConnector1">
+            <a:avLst/>
+          </a:prstGeom>
+          <a:ln w="9525">
+            <a:solidFill>
+              <a:schemeClr val="bg1"/>
+            </a:solidFill>
+            <a:tailEnd type="triangle"/>
+          </a:ln>
+        </p:spPr>
+        <p:style>
+          <a:lnRef idx="1">
+            <a:schemeClr val="accent1"/>
+          </a:lnRef>
+          <a:fillRef idx="0">
+            <a:schemeClr val="accent1"/>
+          </a:fillRef>
+          <a:effectRef idx="0">
+            <a:schemeClr val="accent1"/>
+          </a:effectRef>
+          <a:fontRef idx="minor">
+            <a:schemeClr val="tx1"/>
+          </a:fontRef>
+        </p:style>
+      </p:cxnSp>
+      <p:cxnSp>
+        <p:nvCxnSpPr>
+          <p:cNvPr id="19" name="Straight Arrow Connector 18">
+            <a:extLst>
+              <a:ext uri="{FF2B5EF4-FFF2-40B4-BE49-F238E27FC236}">
+                <a16:creationId xmlns:a16="http://schemas.microsoft.com/office/drawing/2014/main" id="{DDDE5319-3155-5D4D-5EA9-FBC300FB5905}"/>
+              </a:ext>
+            </a:extLst>
+          </p:cNvPr>
+          <p:cNvCxnSpPr>
+            <a:cxnSpLocks/>
+            <a:endCxn id="9" idx="1"/>
+          </p:cNvCxnSpPr>
+          <p:nvPr/>
+        </p:nvCxnSpPr>
+        <p:spPr>
+          <a:xfrm>
+            <a:off x="6941387" y="4133475"/>
+            <a:ext cx="864861" cy="15023"/>
+          </a:xfrm>
+          <a:prstGeom prst="straightConnector1">
+            <a:avLst/>
+          </a:prstGeom>
+          <a:ln w="9525">
+            <a:solidFill>
+              <a:schemeClr val="bg1"/>
+            </a:solidFill>
+            <a:tailEnd type="triangle"/>
+          </a:ln>
+        </p:spPr>
+        <p:style>
+          <a:lnRef idx="1">
+            <a:schemeClr val="accent1"/>
+          </a:lnRef>
+          <a:fillRef idx="0">
+            <a:schemeClr val="accent1"/>
+          </a:fillRef>
+          <a:effectRef idx="0">
+            <a:schemeClr val="accent1"/>
+          </a:effectRef>
+          <a:fontRef idx="minor">
+            <a:schemeClr val="tx1"/>
+          </a:fontRef>
+        </p:style>
+      </p:cxnSp>
+      <p:cxnSp>
+        <p:nvCxnSpPr>
+          <p:cNvPr id="21" name="Straight Arrow Connector 20">
+            <a:extLst>
+              <a:ext uri="{FF2B5EF4-FFF2-40B4-BE49-F238E27FC236}">
+                <a16:creationId xmlns:a16="http://schemas.microsoft.com/office/drawing/2014/main" id="{7E98EE45-6DFB-4FB3-BC47-CF7A6D1A30A1}"/>
+              </a:ext>
+            </a:extLst>
+          </p:cNvPr>
+          <p:cNvCxnSpPr>
+            <a:cxnSpLocks/>
+            <a:endCxn id="11" idx="1"/>
+          </p:cNvCxnSpPr>
+          <p:nvPr/>
+        </p:nvCxnSpPr>
+        <p:spPr>
+          <a:xfrm>
+            <a:off x="4816414" y="5442541"/>
+            <a:ext cx="1342877" cy="18874"/>
+          </a:xfrm>
+          <a:prstGeom prst="straightConnector1">
+            <a:avLst/>
+          </a:prstGeom>
+          <a:ln w="9525">
+            <a:solidFill>
+              <a:schemeClr val="bg1"/>
+            </a:solidFill>
+            <a:tailEnd type="triangle"/>
+          </a:ln>
+        </p:spPr>
+        <p:style>
+          <a:lnRef idx="1">
+            <a:schemeClr val="accent1"/>
+          </a:lnRef>
+          <a:fillRef idx="0">
+            <a:schemeClr val="accent1"/>
+          </a:fillRef>
+          <a:effectRef idx="0">
+            <a:schemeClr val="accent1"/>
+          </a:effectRef>
+          <a:fontRef idx="minor">
+            <a:schemeClr val="tx1"/>
+          </a:fontRef>
+        </p:style>
+      </p:cxnSp>
+      <p:cxnSp>
+        <p:nvCxnSpPr>
+          <p:cNvPr id="23" name="Straight Arrow Connector 22">
+            <a:extLst>
+              <a:ext uri="{FF2B5EF4-FFF2-40B4-BE49-F238E27FC236}">
+                <a16:creationId xmlns:a16="http://schemas.microsoft.com/office/drawing/2014/main" id="{6EC53414-2C37-1AC6-AF65-F4939BA82C97}"/>
+              </a:ext>
+            </a:extLst>
+          </p:cNvPr>
+          <p:cNvCxnSpPr>
+            <a:cxnSpLocks/>
+          </p:cNvCxnSpPr>
+          <p:nvPr/>
+        </p:nvCxnSpPr>
+        <p:spPr>
+          <a:xfrm>
+            <a:off x="882111" y="5447565"/>
+            <a:ext cx="1279586" cy="0"/>
+          </a:xfrm>
+          <a:prstGeom prst="straightConnector1">
+            <a:avLst/>
+          </a:prstGeom>
+          <a:ln w="9525">
+            <a:solidFill>
+              <a:schemeClr val="bg1"/>
+            </a:solidFill>
+            <a:tailEnd type="triangle"/>
+          </a:ln>
+        </p:spPr>
+        <p:style>
+          <a:lnRef idx="1">
+            <a:schemeClr val="accent1"/>
+          </a:lnRef>
+          <a:fillRef idx="0">
+            <a:schemeClr val="accent1"/>
+          </a:fillRef>
+          <a:effectRef idx="0">
+            <a:schemeClr val="accent1"/>
+          </a:effectRef>
+          <a:fontRef idx="minor">
+            <a:schemeClr val="tx1"/>
+          </a:fontRef>
+        </p:style>
+      </p:cxnSp>
+      <p:cxnSp>
+        <p:nvCxnSpPr>
+          <p:cNvPr id="24" name="Straight Arrow Connector 23">
+            <a:extLst>
+              <a:ext uri="{FF2B5EF4-FFF2-40B4-BE49-F238E27FC236}">
+                <a16:creationId xmlns:a16="http://schemas.microsoft.com/office/drawing/2014/main" id="{18A699F6-6BE6-4E7D-638C-E27A69508EDE}"/>
+              </a:ext>
+            </a:extLst>
+          </p:cNvPr>
+          <p:cNvCxnSpPr>
+            <a:cxnSpLocks/>
+          </p:cNvCxnSpPr>
+          <p:nvPr/>
+        </p:nvCxnSpPr>
+        <p:spPr>
+          <a:xfrm>
+            <a:off x="10460965" y="4148498"/>
+            <a:ext cx="1279586" cy="0"/>
+          </a:xfrm>
+          <a:prstGeom prst="straightConnector1">
+            <a:avLst/>
+          </a:prstGeom>
+          <a:ln w="9525">
+            <a:solidFill>
+              <a:schemeClr val="bg1"/>
+            </a:solidFill>
+            <a:tailEnd type="triangle"/>
+          </a:ln>
+        </p:spPr>
+        <p:style>
+          <a:lnRef idx="1">
+            <a:schemeClr val="accent1"/>
+          </a:lnRef>
+          <a:fillRef idx="0">
+            <a:schemeClr val="accent1"/>
+          </a:fillRef>
+          <a:effectRef idx="0">
+            <a:schemeClr val="accent1"/>
+          </a:effectRef>
+          <a:fontRef idx="minor">
+            <a:schemeClr val="tx1"/>
+          </a:fontRef>
+        </p:style>
+      </p:cxnSp>
     </p:spTree>
     <p:extLst>
       <p:ext uri="{BB962C8B-B14F-4D97-AF65-F5344CB8AC3E}">
-        <p14:creationId xmlns:p14="http://schemas.microsoft.com/office/powerpoint/2010/main" val="3086147702"/>
+        <p14:creationId xmlns:p14="http://schemas.microsoft.com/office/powerpoint/2010/main" val="229704816"/>
       </p:ext>
     </p:extLst>
   </p:cSld>
@@ -17602,7 +19128,13 @@
   <p:cSld>
     <p:spTree>
       <p:nvGrpSpPr>
-        <p:cNvPr id="1" name=""/>
+        <p:cNvPr id="1" name="">
+          <a:extLst>
+            <a:ext uri="{FF2B5EF4-FFF2-40B4-BE49-F238E27FC236}">
+              <a16:creationId xmlns:a16="http://schemas.microsoft.com/office/drawing/2014/main" id="{763E15FF-937B-3052-1CAB-3AA7F5EC6305}"/>
+            </a:ext>
+          </a:extLst>
+        </p:cNvPr>
         <p:cNvGrpSpPr/>
         <p:nvPr/>
       </p:nvGrpSpPr>
@@ -17614,12 +19146,42 @@
           <a:chExt cx="0" cy="0"/>
         </a:xfrm>
       </p:grpSpPr>
-      <p:sp>
-        <p:nvSpPr>
-          <p:cNvPr id="2" name="Title 1">
-            <a:extLst>
-              <a:ext uri="{FF2B5EF4-FFF2-40B4-BE49-F238E27FC236}">
-                <a16:creationId xmlns:a16="http://schemas.microsoft.com/office/drawing/2014/main" id="{2AB67F85-B014-E54D-AC82-A789515E821B}"/>
+      <p:pic>
+        <p:nvPicPr>
+          <p:cNvPr id="5" name="Picture 4">
+            <a:extLst>
+              <a:ext uri="{FF2B5EF4-FFF2-40B4-BE49-F238E27FC236}">
+                <a16:creationId xmlns:a16="http://schemas.microsoft.com/office/drawing/2014/main" id="{A549AFE0-94D8-5D75-D63E-6CE3C34BD030}"/>
+              </a:ext>
+            </a:extLst>
+          </p:cNvPr>
+          <p:cNvPicPr>
+            <a:picLocks noChangeAspect="1"/>
+          </p:cNvPicPr>
+          <p:nvPr/>
+        </p:nvPicPr>
+        <p:blipFill>
+          <a:blip r:embed="rId2"/>
+          <a:stretch>
+            <a:fillRect/>
+          </a:stretch>
+        </p:blipFill>
+        <p:spPr>
+          <a:xfrm>
+            <a:off x="9325300" y="3726611"/>
+            <a:ext cx="2768935" cy="2741921"/>
+          </a:xfrm>
+          <a:prstGeom prst="rect">
+            <a:avLst/>
+          </a:prstGeom>
+        </p:spPr>
+      </p:pic>
+      <p:sp>
+        <p:nvSpPr>
+          <p:cNvPr id="3" name="Title 2">
+            <a:extLst>
+              <a:ext uri="{FF2B5EF4-FFF2-40B4-BE49-F238E27FC236}">
+                <a16:creationId xmlns:a16="http://schemas.microsoft.com/office/drawing/2014/main" id="{ABB7637F-1EEA-9221-2346-17AC0BAE1810}"/>
               </a:ext>
             </a:extLst>
           </p:cNvPr>
@@ -17630,155 +19192,30 @@
             <p:ph type="title"/>
           </p:nvPr>
         </p:nvSpPr>
-        <p:spPr/>
+        <p:spPr>
+          <a:xfrm>
+            <a:off x="1044475" y="389468"/>
+            <a:ext cx="10230250" cy="645284"/>
+          </a:xfrm>
+        </p:spPr>
         <p:txBody>
           <a:bodyPr/>
           <a:lstStyle/>
           <a:p>
             <a:r>
-              <a:rPr lang="en-US" dirty="0"/>
-              <a:t>Thank you!</a:t>
-            </a:r>
-          </a:p>
-        </p:txBody>
-      </p:sp>
-      <p:sp>
-        <p:nvSpPr>
-          <p:cNvPr id="3" name="Content Placeholder 2">
-            <a:extLst>
-              <a:ext uri="{FF2B5EF4-FFF2-40B4-BE49-F238E27FC236}">
-                <a16:creationId xmlns:a16="http://schemas.microsoft.com/office/drawing/2014/main" id="{8D87CE19-F795-8240-B223-A5CA7C9DE0E5}"/>
-              </a:ext>
-            </a:extLst>
-          </p:cNvPr>
-          <p:cNvSpPr>
-            <a:spLocks noGrp="1"/>
-          </p:cNvSpPr>
-          <p:nvPr>
-            <p:ph sz="half" idx="1"/>
-          </p:nvPr>
-        </p:nvSpPr>
-        <p:spPr/>
-        <p:txBody>
-          <a:bodyPr/>
-          <a:lstStyle/>
-          <a:p>
-            <a:r>
-              <a:rPr lang="en-US" dirty="0"/>
-              <a:t>For any question regarding this study, feel free to contact me. Any feedback is appreciated!</a:t>
-            </a:r>
-          </a:p>
-        </p:txBody>
-      </p:sp>
-      <p:pic>
-        <p:nvPicPr>
-          <p:cNvPr id="7" name="Picture Placeholder 6" descr="White Darts">
-            <a:extLst>
-              <a:ext uri="{FF2B5EF4-FFF2-40B4-BE49-F238E27FC236}">
-                <a16:creationId xmlns:a16="http://schemas.microsoft.com/office/drawing/2014/main" id="{8A7A839A-FCAC-2F45-B138-DD0DC7C61FB3}"/>
-              </a:ext>
-            </a:extLst>
-          </p:cNvPr>
-          <p:cNvPicPr>
-            <a:picLocks noGrp="1" noChangeAspect="1"/>
-          </p:cNvPicPr>
-          <p:nvPr>
-            <p:ph type="pic" sz="quarter" idx="10"/>
-          </p:nvPr>
-        </p:nvPicPr>
-        <p:blipFill>
-          <a:blip r:embed="rId2">
-            <a:extLst>
-              <a:ext uri="{28A0092B-C50C-407E-A947-70E740481C1C}">
-                <a14:useLocalDpi xmlns:a14="http://schemas.microsoft.com/office/drawing/2010/main" val="0"/>
-              </a:ext>
-            </a:extLst>
-          </a:blip>
-          <a:srcRect/>
-          <a:stretch>
-            <a:fillRect/>
-          </a:stretch>
-        </p:blipFill>
-        <p:spPr/>
-      </p:pic>
-      <p:sp>
-        <p:nvSpPr>
-          <p:cNvPr id="5" name="Content Placeholder 4">
-            <a:extLst>
-              <a:ext uri="{FF2B5EF4-FFF2-40B4-BE49-F238E27FC236}">
-                <a16:creationId xmlns:a16="http://schemas.microsoft.com/office/drawing/2014/main" id="{788D6534-C18A-6F43-BFAE-88E2F83FD9B4}"/>
-              </a:ext>
-            </a:extLst>
-          </p:cNvPr>
-          <p:cNvSpPr>
-            <a:spLocks noGrp="1"/>
-          </p:cNvSpPr>
-          <p:nvPr>
-            <p:ph sz="quarter" idx="12"/>
-          </p:nvPr>
-        </p:nvSpPr>
-        <p:spPr/>
-        <p:txBody>
-          <a:bodyPr/>
-          <a:lstStyle/>
-          <a:p>
-            <a:r>
-              <a:rPr lang="en-US" b="1" dirty="0"/>
-              <a:t>Stefan </a:t>
-            </a:r>
-            <a:r>
-              <a:rPr lang="en-US" b="1" dirty="0" err="1"/>
-              <a:t>Crasmareanu</a:t>
-            </a:r>
-            <a:r>
-              <a:rPr lang="en-US" dirty="0"/>
-              <a:t>      </a:t>
-            </a:r>
-          </a:p>
-          <a:p>
-            <a:r>
-              <a:rPr lang="en-US" dirty="0"/>
-              <a:t>stefancrasmareanu@gmail.com</a:t>
-            </a:r>
-          </a:p>
-        </p:txBody>
-      </p:sp>
-      <p:sp>
-        <p:nvSpPr>
-          <p:cNvPr id="8" name="Slide Number Placeholder 7">
-            <a:extLst>
-              <a:ext uri="{FF2B5EF4-FFF2-40B4-BE49-F238E27FC236}">
-                <a16:creationId xmlns:a16="http://schemas.microsoft.com/office/drawing/2014/main" id="{8A0CAF6B-5914-4E2F-90A1-4B2D92D5ADC0}"/>
-              </a:ext>
-            </a:extLst>
-          </p:cNvPr>
-          <p:cNvSpPr>
-            <a:spLocks noGrp="1"/>
-          </p:cNvSpPr>
-          <p:nvPr>
-            <p:ph type="sldNum" sz="quarter" idx="15"/>
-          </p:nvPr>
-        </p:nvSpPr>
-        <p:spPr/>
-        <p:txBody>
-          <a:bodyPr/>
-          <a:lstStyle/>
-          <a:p>
-            <a:fld id="{7782931A-7D25-4B4B-9464-57AE418934A3}" type="slidenum">
-              <a:rPr lang="en-US" smtClean="0"/>
-              <a:pPr/>
-              <a:t>26</a:t>
-            </a:fld>
-            <a:endParaRPr lang="en-US"/>
-          </a:p>
-        </p:txBody>
-      </p:sp>
-      <p:sp>
-        <p:nvSpPr>
-          <p:cNvPr id="4" name="Footer Placeholder 4">
-            <a:extLst>
-              <a:ext uri="{FF2B5EF4-FFF2-40B4-BE49-F238E27FC236}">
-                <a16:creationId xmlns:a16="http://schemas.microsoft.com/office/drawing/2014/main" id="{3B14A411-9C63-7B11-80AB-D12AC338CE29}"/>
+              <a:rPr lang="en-GB" sz="3600" dirty="0"/>
+              <a:t>Model considerations</a:t>
+            </a:r>
+            <a:endParaRPr lang="ro-RO" sz="3600" dirty="0"/>
+          </a:p>
+        </p:txBody>
+      </p:sp>
+      <p:sp>
+        <p:nvSpPr>
+          <p:cNvPr id="6" name="Footer Placeholder 4">
+            <a:extLst>
+              <a:ext uri="{FF2B5EF4-FFF2-40B4-BE49-F238E27FC236}">
+                <a16:creationId xmlns:a16="http://schemas.microsoft.com/office/drawing/2014/main" id="{3F843004-354F-FB5E-F0F7-E821439CAFC9}"/>
               </a:ext>
             </a:extLst>
           </p:cNvPr>
@@ -17789,7 +19226,7 @@
         </p:nvSpPr>
         <p:spPr>
           <a:xfrm>
-            <a:off x="7478023" y="6381766"/>
+            <a:off x="7717816" y="6470318"/>
             <a:ext cx="2274318" cy="181094"/>
           </a:xfrm>
           <a:prstGeom prst="rect">
@@ -17903,10 +19340,10 @@
       </p:sp>
       <p:sp>
         <p:nvSpPr>
-          <p:cNvPr id="9" name="Date Placeholder 5">
-            <a:extLst>
-              <a:ext uri="{FF2B5EF4-FFF2-40B4-BE49-F238E27FC236}">
-                <a16:creationId xmlns:a16="http://schemas.microsoft.com/office/drawing/2014/main" id="{8B67EBFD-B5B3-4AC4-6A3E-16F118EDC700}"/>
+          <p:cNvPr id="11" name="Date Placeholder 5">
+            <a:extLst>
+              <a:ext uri="{FF2B5EF4-FFF2-40B4-BE49-F238E27FC236}">
+                <a16:creationId xmlns:a16="http://schemas.microsoft.com/office/drawing/2014/main" id="{ED988173-14B4-E7C7-552C-4A5336BE4D56}"/>
               </a:ext>
             </a:extLst>
           </p:cNvPr>
@@ -17917,7 +19354,7 @@
         </p:nvSpPr>
         <p:spPr>
           <a:xfrm>
-            <a:off x="9822191" y="6379980"/>
+            <a:off x="10061984" y="6468532"/>
             <a:ext cx="1522982" cy="182880"/>
           </a:xfrm>
           <a:prstGeom prst="rect">
@@ -18033,10 +19470,1474 @@
           </a:p>
         </p:txBody>
       </p:sp>
+      <p:sp>
+        <p:nvSpPr>
+          <p:cNvPr id="2" name="TextBox 1">
+            <a:extLst>
+              <a:ext uri="{FF2B5EF4-FFF2-40B4-BE49-F238E27FC236}">
+                <a16:creationId xmlns:a16="http://schemas.microsoft.com/office/drawing/2014/main" id="{F5087830-525B-DC6F-E5AC-7853FBA441BC}"/>
+              </a:ext>
+            </a:extLst>
+          </p:cNvPr>
+          <p:cNvSpPr txBox="1"/>
+          <p:nvPr/>
+        </p:nvSpPr>
+        <p:spPr>
+          <a:xfrm>
+            <a:off x="506084" y="1376016"/>
+            <a:ext cx="10472468" cy="5078313"/>
+          </a:xfrm>
+          <a:prstGeom prst="rect">
+            <a:avLst/>
+          </a:prstGeom>
+          <a:noFill/>
+        </p:spPr>
+        <p:txBody>
+          <a:bodyPr wrap="square" rtlCol="0">
+            <a:spAutoFit/>
+          </a:bodyPr>
+          <a:lstStyle/>
+          <a:p>
+            <a:endParaRPr lang="en-GB" dirty="0">
+              <a:solidFill>
+                <a:schemeClr val="bg1"/>
+              </a:solidFill>
+            </a:endParaRPr>
+          </a:p>
+          <a:p>
+            <a:pPr marL="285750" indent="-285750">
+              <a:buFontTx/>
+              <a:buChar char="-"/>
+            </a:pPr>
+            <a:r>
+              <a:rPr lang="en-GB" dirty="0">
+                <a:solidFill>
+                  <a:schemeClr val="bg1"/>
+                </a:solidFill>
+              </a:rPr>
+              <a:t>While the dataset can be viewed as a time series, this is not the most viable approach for the current task -&gt; frequency, periodicity have little meaning when we don’t take into account the status of the clients;</a:t>
+            </a:r>
+          </a:p>
+          <a:p>
+            <a:endParaRPr lang="en-GB" dirty="0">
+              <a:solidFill>
+                <a:schemeClr val="bg1"/>
+              </a:solidFill>
+            </a:endParaRPr>
+          </a:p>
+          <a:p>
+            <a:pPr marL="285750" indent="-285750">
+              <a:buFontTx/>
+              <a:buChar char="-"/>
+            </a:pPr>
+            <a:r>
+              <a:rPr lang="en-GB" dirty="0">
+                <a:solidFill>
+                  <a:schemeClr val="bg1"/>
+                </a:solidFill>
+              </a:rPr>
+              <a:t>Main idea is to define patterns for members/casuals and classify behaviours by measurable similarities;</a:t>
+            </a:r>
+          </a:p>
+          <a:p>
+            <a:endParaRPr lang="en-GB" dirty="0">
+              <a:solidFill>
+                <a:schemeClr val="bg1"/>
+              </a:solidFill>
+            </a:endParaRPr>
+          </a:p>
+          <a:p>
+            <a:pPr marL="285750" indent="-285750">
+              <a:buFontTx/>
+              <a:buChar char="-"/>
+            </a:pPr>
+            <a:r>
+              <a:rPr lang="en-GB" dirty="0">
+                <a:solidFill>
+                  <a:schemeClr val="bg1"/>
+                </a:solidFill>
+              </a:rPr>
+              <a:t>Logistic regression is viable for the goal because it is designed to model binary outcomes and estimate the probability that an observation belongs to one of two categories;</a:t>
+            </a:r>
+          </a:p>
+          <a:p>
+            <a:pPr marL="285750" indent="-285750">
+              <a:buFontTx/>
+              <a:buChar char="-"/>
+            </a:pPr>
+            <a:endParaRPr lang="en-GB" dirty="0">
+              <a:solidFill>
+                <a:schemeClr val="bg1"/>
+              </a:solidFill>
+            </a:endParaRPr>
+          </a:p>
+          <a:p>
+            <a:pPr marL="285750" indent="-285750">
+              <a:buFontTx/>
+              <a:buChar char="-"/>
+            </a:pPr>
+            <a:r>
+              <a:rPr lang="en-GB" dirty="0">
+                <a:solidFill>
+                  <a:schemeClr val="bg1"/>
+                </a:solidFill>
+              </a:rPr>
+              <a:t>The data metrics that will be used are rides duration, time of the day when it </a:t>
+            </a:r>
+          </a:p>
+          <a:p>
+            <a:r>
+              <a:rPr lang="en-GB" dirty="0">
+                <a:solidFill>
+                  <a:schemeClr val="bg1"/>
+                </a:solidFill>
+              </a:rPr>
+              <a:t>occurs, day of the week (with special distinction for weekends), duration of the ride,</a:t>
+            </a:r>
+          </a:p>
+          <a:p>
+            <a:r>
+              <a:rPr lang="en-GB" dirty="0">
+                <a:solidFill>
+                  <a:schemeClr val="bg1"/>
+                </a:solidFill>
+              </a:rPr>
+              <a:t>as well as the type of bike that is chosen; </a:t>
+            </a:r>
+          </a:p>
+          <a:p>
+            <a:endParaRPr lang="en-GB" dirty="0">
+              <a:solidFill>
+                <a:schemeClr val="bg1"/>
+              </a:solidFill>
+            </a:endParaRPr>
+          </a:p>
+          <a:p>
+            <a:pPr marL="285750" indent="-285750">
+              <a:buFontTx/>
+              <a:buChar char="-"/>
+            </a:pPr>
+            <a:r>
+              <a:rPr lang="en-GB" dirty="0">
+                <a:solidFill>
+                  <a:schemeClr val="bg1"/>
+                </a:solidFill>
+              </a:rPr>
+              <a:t>The logistic regression function built-in the Python library scikit-learn will be used.</a:t>
+            </a:r>
+          </a:p>
+          <a:p>
+            <a:endParaRPr lang="en-GB" dirty="0">
+              <a:solidFill>
+                <a:schemeClr val="bg1"/>
+              </a:solidFill>
+            </a:endParaRPr>
+          </a:p>
+          <a:p>
+            <a:pPr marL="285750" indent="-285750">
+              <a:buFontTx/>
+              <a:buChar char="-"/>
+            </a:pPr>
+            <a:endParaRPr lang="en-GB" dirty="0">
+              <a:solidFill>
+                <a:schemeClr val="bg1"/>
+              </a:solidFill>
+            </a:endParaRPr>
+          </a:p>
+        </p:txBody>
+      </p:sp>
     </p:spTree>
     <p:extLst>
       <p:ext uri="{BB962C8B-B14F-4D97-AF65-F5344CB8AC3E}">
-        <p14:creationId xmlns:p14="http://schemas.microsoft.com/office/powerpoint/2010/main" val="1743235640"/>
+        <p14:creationId xmlns:p14="http://schemas.microsoft.com/office/powerpoint/2010/main" val="280570596"/>
+      </p:ext>
+    </p:extLst>
+  </p:cSld>
+  <p:clrMapOvr>
+    <a:masterClrMapping/>
+  </p:clrMapOvr>
+</p:sld>
+</file>
+
+<file path=ppt/slides/slide27.xml><?xml version="1.0" encoding="utf-8"?>
+<p:sld xmlns:a="http://schemas.openxmlformats.org/drawingml/2006/main" xmlns:r="http://schemas.openxmlformats.org/officeDocument/2006/relationships" xmlns:p="http://schemas.openxmlformats.org/presentationml/2006/main">
+  <p:cSld>
+    <p:spTree>
+      <p:nvGrpSpPr>
+        <p:cNvPr id="1" name="">
+          <a:extLst>
+            <a:ext uri="{FF2B5EF4-FFF2-40B4-BE49-F238E27FC236}">
+              <a16:creationId xmlns:a16="http://schemas.microsoft.com/office/drawing/2014/main" id="{4E6373F5-7D5B-C232-A1F0-21A53BEE14A5}"/>
+            </a:ext>
+          </a:extLst>
+        </p:cNvPr>
+        <p:cNvGrpSpPr/>
+        <p:nvPr/>
+      </p:nvGrpSpPr>
+      <p:grpSpPr>
+        <a:xfrm>
+          <a:off x="0" y="0"/>
+          <a:ext cx="0" cy="0"/>
+          <a:chOff x="0" y="0"/>
+          <a:chExt cx="0" cy="0"/>
+        </a:xfrm>
+      </p:grpSpPr>
+      <p:sp>
+        <p:nvSpPr>
+          <p:cNvPr id="3" name="Title 2">
+            <a:extLst>
+              <a:ext uri="{FF2B5EF4-FFF2-40B4-BE49-F238E27FC236}">
+                <a16:creationId xmlns:a16="http://schemas.microsoft.com/office/drawing/2014/main" id="{3CB63237-AA3B-897D-9997-DE7A5F910A5D}"/>
+              </a:ext>
+            </a:extLst>
+          </p:cNvPr>
+          <p:cNvSpPr>
+            <a:spLocks noGrp="1"/>
+          </p:cNvSpPr>
+          <p:nvPr>
+            <p:ph type="title"/>
+          </p:nvPr>
+        </p:nvSpPr>
+        <p:spPr>
+          <a:xfrm>
+            <a:off x="1044475" y="389468"/>
+            <a:ext cx="10230250" cy="645284"/>
+          </a:xfrm>
+        </p:spPr>
+        <p:txBody>
+          <a:bodyPr/>
+          <a:lstStyle/>
+          <a:p>
+            <a:r>
+              <a:rPr lang="en-GB" sz="3600" dirty="0"/>
+              <a:t>Bring data from SQL into Python</a:t>
+            </a:r>
+            <a:endParaRPr lang="ro-RO" sz="3600" dirty="0"/>
+          </a:p>
+        </p:txBody>
+      </p:sp>
+      <p:sp>
+        <p:nvSpPr>
+          <p:cNvPr id="6" name="Footer Placeholder 4">
+            <a:extLst>
+              <a:ext uri="{FF2B5EF4-FFF2-40B4-BE49-F238E27FC236}">
+                <a16:creationId xmlns:a16="http://schemas.microsoft.com/office/drawing/2014/main" id="{662D3F21-B21C-001F-F0CA-7013D32D2225}"/>
+              </a:ext>
+            </a:extLst>
+          </p:cNvPr>
+          <p:cNvSpPr txBox="1">
+            <a:spLocks/>
+          </p:cNvSpPr>
+          <p:nvPr/>
+        </p:nvSpPr>
+        <p:spPr>
+          <a:xfrm>
+            <a:off x="7717816" y="6470318"/>
+            <a:ext cx="2274318" cy="181094"/>
+          </a:xfrm>
+          <a:prstGeom prst="rect">
+            <a:avLst/>
+          </a:prstGeom>
+        </p:spPr>
+        <p:txBody>
+          <a:bodyPr vert="horz" lIns="0" tIns="45720" rIns="0" bIns="45720" rtlCol="0" anchor="ctr"/>
+          <a:lstStyle>
+            <a:defPPr>
+              <a:defRPr lang="en-US"/>
+            </a:defPPr>
+            <a:lvl1pPr marL="0" algn="l" defTabSz="914400" rtl="0" eaLnBrk="1" latinLnBrk="0" hangingPunct="1">
+              <a:defRPr sz="1200" b="0" kern="1200">
+                <a:solidFill>
+                  <a:schemeClr val="bg1"/>
+                </a:solidFill>
+                <a:latin typeface="+mn-lt"/>
+                <a:ea typeface="+mn-ea"/>
+                <a:cs typeface="+mn-cs"/>
+              </a:defRPr>
+            </a:lvl1pPr>
+            <a:lvl2pPr marL="457200" algn="l" defTabSz="914400" rtl="0" eaLnBrk="1" latinLnBrk="0" hangingPunct="1">
+              <a:defRPr sz="1800" kern="1200">
+                <a:solidFill>
+                  <a:schemeClr val="tx1"/>
+                </a:solidFill>
+                <a:latin typeface="+mn-lt"/>
+                <a:ea typeface="+mn-ea"/>
+                <a:cs typeface="+mn-cs"/>
+              </a:defRPr>
+            </a:lvl2pPr>
+            <a:lvl3pPr marL="914400" algn="l" defTabSz="914400" rtl="0" eaLnBrk="1" latinLnBrk="0" hangingPunct="1">
+              <a:defRPr sz="1800" kern="1200">
+                <a:solidFill>
+                  <a:schemeClr val="tx1"/>
+                </a:solidFill>
+                <a:latin typeface="+mn-lt"/>
+                <a:ea typeface="+mn-ea"/>
+                <a:cs typeface="+mn-cs"/>
+              </a:defRPr>
+            </a:lvl3pPr>
+            <a:lvl4pPr marL="1371600" algn="l" defTabSz="914400" rtl="0" eaLnBrk="1" latinLnBrk="0" hangingPunct="1">
+              <a:defRPr sz="1800" kern="1200">
+                <a:solidFill>
+                  <a:schemeClr val="tx1"/>
+                </a:solidFill>
+                <a:latin typeface="+mn-lt"/>
+                <a:ea typeface="+mn-ea"/>
+                <a:cs typeface="+mn-cs"/>
+              </a:defRPr>
+            </a:lvl4pPr>
+            <a:lvl5pPr marL="1828800" algn="l" defTabSz="914400" rtl="0" eaLnBrk="1" latinLnBrk="0" hangingPunct="1">
+              <a:defRPr sz="1800" kern="1200">
+                <a:solidFill>
+                  <a:schemeClr val="tx1"/>
+                </a:solidFill>
+                <a:latin typeface="+mn-lt"/>
+                <a:ea typeface="+mn-ea"/>
+                <a:cs typeface="+mn-cs"/>
+              </a:defRPr>
+            </a:lvl5pPr>
+            <a:lvl6pPr marL="2286000" algn="l" defTabSz="914400" rtl="0" eaLnBrk="1" latinLnBrk="0" hangingPunct="1">
+              <a:defRPr sz="1800" kern="1200">
+                <a:solidFill>
+                  <a:schemeClr val="tx1"/>
+                </a:solidFill>
+                <a:latin typeface="+mn-lt"/>
+                <a:ea typeface="+mn-ea"/>
+                <a:cs typeface="+mn-cs"/>
+              </a:defRPr>
+            </a:lvl6pPr>
+            <a:lvl7pPr marL="2743200" algn="l" defTabSz="914400" rtl="0" eaLnBrk="1" latinLnBrk="0" hangingPunct="1">
+              <a:defRPr sz="1800" kern="1200">
+                <a:solidFill>
+                  <a:schemeClr val="tx1"/>
+                </a:solidFill>
+                <a:latin typeface="+mn-lt"/>
+                <a:ea typeface="+mn-ea"/>
+                <a:cs typeface="+mn-cs"/>
+              </a:defRPr>
+            </a:lvl7pPr>
+            <a:lvl8pPr marL="3200400" algn="l" defTabSz="914400" rtl="0" eaLnBrk="1" latinLnBrk="0" hangingPunct="1">
+              <a:defRPr sz="1800" kern="1200">
+                <a:solidFill>
+                  <a:schemeClr val="tx1"/>
+                </a:solidFill>
+                <a:latin typeface="+mn-lt"/>
+                <a:ea typeface="+mn-ea"/>
+                <a:cs typeface="+mn-cs"/>
+              </a:defRPr>
+            </a:lvl8pPr>
+            <a:lvl9pPr marL="3657600" algn="l" defTabSz="914400" rtl="0" eaLnBrk="1" latinLnBrk="0" hangingPunct="1">
+              <a:defRPr sz="1800" kern="1200">
+                <a:solidFill>
+                  <a:schemeClr val="tx1"/>
+                </a:solidFill>
+                <a:latin typeface="+mn-lt"/>
+                <a:ea typeface="+mn-ea"/>
+                <a:cs typeface="+mn-cs"/>
+              </a:defRPr>
+            </a:lvl9pPr>
+          </a:lstStyle>
+          <a:p>
+            <a:r>
+              <a:rPr lang="en-US" dirty="0"/>
+              <a:t>Data Analysis Case Study</a:t>
+            </a:r>
+          </a:p>
+        </p:txBody>
+      </p:sp>
+      <p:sp>
+        <p:nvSpPr>
+          <p:cNvPr id="11" name="Date Placeholder 5">
+            <a:extLst>
+              <a:ext uri="{FF2B5EF4-FFF2-40B4-BE49-F238E27FC236}">
+                <a16:creationId xmlns:a16="http://schemas.microsoft.com/office/drawing/2014/main" id="{509F3B97-8DCD-B41D-F2D7-C1D3D36D8497}"/>
+              </a:ext>
+            </a:extLst>
+          </p:cNvPr>
+          <p:cNvSpPr txBox="1">
+            <a:spLocks/>
+          </p:cNvSpPr>
+          <p:nvPr/>
+        </p:nvSpPr>
+        <p:spPr>
+          <a:xfrm>
+            <a:off x="10061984" y="6468532"/>
+            <a:ext cx="1522982" cy="182880"/>
+          </a:xfrm>
+          <a:prstGeom prst="rect">
+            <a:avLst/>
+          </a:prstGeom>
+        </p:spPr>
+        <p:txBody>
+          <a:bodyPr lIns="0" tIns="0" rIns="0" bIns="0"/>
+          <a:lstStyle>
+            <a:defPPr>
+              <a:defRPr lang="en-US"/>
+            </a:defPPr>
+            <a:lvl1pPr marL="0" algn="l" defTabSz="914400" rtl="0" eaLnBrk="1" latinLnBrk="0" hangingPunct="1">
+              <a:defRPr sz="1800" kern="1200">
+                <a:solidFill>
+                  <a:schemeClr val="tx1"/>
+                </a:solidFill>
+                <a:latin typeface="+mn-lt"/>
+                <a:ea typeface="+mn-ea"/>
+                <a:cs typeface="+mn-cs"/>
+              </a:defRPr>
+            </a:lvl1pPr>
+            <a:lvl2pPr marL="457200" algn="l" defTabSz="914400" rtl="0" eaLnBrk="1" latinLnBrk="0" hangingPunct="1">
+              <a:defRPr sz="1800" kern="1200">
+                <a:solidFill>
+                  <a:schemeClr val="tx1"/>
+                </a:solidFill>
+                <a:latin typeface="+mn-lt"/>
+                <a:ea typeface="+mn-ea"/>
+                <a:cs typeface="+mn-cs"/>
+              </a:defRPr>
+            </a:lvl2pPr>
+            <a:lvl3pPr marL="914400" algn="l" defTabSz="914400" rtl="0" eaLnBrk="1" latinLnBrk="0" hangingPunct="1">
+              <a:defRPr sz="1800" kern="1200">
+                <a:solidFill>
+                  <a:schemeClr val="tx1"/>
+                </a:solidFill>
+                <a:latin typeface="+mn-lt"/>
+                <a:ea typeface="+mn-ea"/>
+                <a:cs typeface="+mn-cs"/>
+              </a:defRPr>
+            </a:lvl3pPr>
+            <a:lvl4pPr marL="1371600" algn="l" defTabSz="914400" rtl="0" eaLnBrk="1" latinLnBrk="0" hangingPunct="1">
+              <a:defRPr sz="1800" kern="1200">
+                <a:solidFill>
+                  <a:schemeClr val="tx1"/>
+                </a:solidFill>
+                <a:latin typeface="+mn-lt"/>
+                <a:ea typeface="+mn-ea"/>
+                <a:cs typeface="+mn-cs"/>
+              </a:defRPr>
+            </a:lvl4pPr>
+            <a:lvl5pPr marL="1828800" algn="l" defTabSz="914400" rtl="0" eaLnBrk="1" latinLnBrk="0" hangingPunct="1">
+              <a:defRPr sz="1800" kern="1200">
+                <a:solidFill>
+                  <a:schemeClr val="tx1"/>
+                </a:solidFill>
+                <a:latin typeface="+mn-lt"/>
+                <a:ea typeface="+mn-ea"/>
+                <a:cs typeface="+mn-cs"/>
+              </a:defRPr>
+            </a:lvl5pPr>
+            <a:lvl6pPr marL="2286000" algn="l" defTabSz="914400" rtl="0" eaLnBrk="1" latinLnBrk="0" hangingPunct="1">
+              <a:defRPr sz="1800" kern="1200">
+                <a:solidFill>
+                  <a:schemeClr val="tx1"/>
+                </a:solidFill>
+                <a:latin typeface="+mn-lt"/>
+                <a:ea typeface="+mn-ea"/>
+                <a:cs typeface="+mn-cs"/>
+              </a:defRPr>
+            </a:lvl6pPr>
+            <a:lvl7pPr marL="2743200" algn="l" defTabSz="914400" rtl="0" eaLnBrk="1" latinLnBrk="0" hangingPunct="1">
+              <a:defRPr sz="1800" kern="1200">
+                <a:solidFill>
+                  <a:schemeClr val="tx1"/>
+                </a:solidFill>
+                <a:latin typeface="+mn-lt"/>
+                <a:ea typeface="+mn-ea"/>
+                <a:cs typeface="+mn-cs"/>
+              </a:defRPr>
+            </a:lvl7pPr>
+            <a:lvl8pPr marL="3200400" algn="l" defTabSz="914400" rtl="0" eaLnBrk="1" latinLnBrk="0" hangingPunct="1">
+              <a:defRPr sz="1800" kern="1200">
+                <a:solidFill>
+                  <a:schemeClr val="tx1"/>
+                </a:solidFill>
+                <a:latin typeface="+mn-lt"/>
+                <a:ea typeface="+mn-ea"/>
+                <a:cs typeface="+mn-cs"/>
+              </a:defRPr>
+            </a:lvl8pPr>
+            <a:lvl9pPr marL="3657600" algn="l" defTabSz="914400" rtl="0" eaLnBrk="1" latinLnBrk="0" hangingPunct="1">
+              <a:defRPr sz="1800" kern="1200">
+                <a:solidFill>
+                  <a:schemeClr val="tx1"/>
+                </a:solidFill>
+                <a:latin typeface="+mn-lt"/>
+                <a:ea typeface="+mn-ea"/>
+                <a:cs typeface="+mn-cs"/>
+              </a:defRPr>
+            </a:lvl9pPr>
+          </a:lstStyle>
+          <a:p>
+            <a:r>
+              <a:rPr lang="en-US" sz="1200" dirty="0">
+                <a:solidFill>
+                  <a:schemeClr val="bg1"/>
+                </a:solidFill>
+              </a:rPr>
+              <a:t>18-26 February 2026</a:t>
+            </a:r>
+          </a:p>
+        </p:txBody>
+      </p:sp>
+      <p:pic>
+        <p:nvPicPr>
+          <p:cNvPr id="7" name="Picture 6">
+            <a:extLst>
+              <a:ext uri="{FF2B5EF4-FFF2-40B4-BE49-F238E27FC236}">
+                <a16:creationId xmlns:a16="http://schemas.microsoft.com/office/drawing/2014/main" id="{EBA8D579-5F4C-5146-19B0-FADC45DAAE19}"/>
+              </a:ext>
+            </a:extLst>
+          </p:cNvPr>
+          <p:cNvPicPr>
+            <a:picLocks noChangeAspect="1"/>
+          </p:cNvPicPr>
+          <p:nvPr/>
+        </p:nvPicPr>
+        <p:blipFill>
+          <a:blip r:embed="rId2"/>
+          <a:stretch>
+            <a:fillRect/>
+          </a:stretch>
+        </p:blipFill>
+        <p:spPr>
+          <a:xfrm>
+            <a:off x="777055" y="1316677"/>
+            <a:ext cx="7357654" cy="4224646"/>
+          </a:xfrm>
+          <a:prstGeom prst="rect">
+            <a:avLst/>
+          </a:prstGeom>
+        </p:spPr>
+      </p:pic>
+      <p:sp>
+        <p:nvSpPr>
+          <p:cNvPr id="8" name="TextBox 7">
+            <a:extLst>
+              <a:ext uri="{FF2B5EF4-FFF2-40B4-BE49-F238E27FC236}">
+                <a16:creationId xmlns:a16="http://schemas.microsoft.com/office/drawing/2014/main" id="{60C993B2-396E-F635-826D-C81FD70E310D}"/>
+              </a:ext>
+            </a:extLst>
+          </p:cNvPr>
+          <p:cNvSpPr txBox="1"/>
+          <p:nvPr/>
+        </p:nvSpPr>
+        <p:spPr>
+          <a:xfrm>
+            <a:off x="7824158" y="2406769"/>
+            <a:ext cx="3590787" cy="1477328"/>
+          </a:xfrm>
+          <a:prstGeom prst="rect">
+            <a:avLst/>
+          </a:prstGeom>
+          <a:noFill/>
+        </p:spPr>
+        <p:txBody>
+          <a:bodyPr wrap="square" rtlCol="0">
+            <a:spAutoFit/>
+          </a:bodyPr>
+          <a:lstStyle/>
+          <a:p>
+            <a:pPr marL="285750" indent="-285750">
+              <a:buFont typeface="Arial" panose="020B0604020202020204" pitchFamily="34" charset="0"/>
+              <a:buChar char="•"/>
+            </a:pPr>
+            <a:r>
+              <a:rPr lang="en-GB" dirty="0">
+                <a:solidFill>
+                  <a:srgbClr val="0070C0"/>
+                </a:solidFill>
+              </a:rPr>
+              <a:t>For demo purposes, only 50000 will be used to train the model; for real use cases, the data volume needs to be increased considerably</a:t>
+            </a:r>
+            <a:endParaRPr lang="ro-RO" dirty="0">
+              <a:solidFill>
+                <a:srgbClr val="0070C0"/>
+              </a:solidFill>
+            </a:endParaRPr>
+          </a:p>
+        </p:txBody>
+      </p:sp>
+      <p:sp>
+        <p:nvSpPr>
+          <p:cNvPr id="9" name="TextBox 8">
+            <a:extLst>
+              <a:ext uri="{FF2B5EF4-FFF2-40B4-BE49-F238E27FC236}">
+                <a16:creationId xmlns:a16="http://schemas.microsoft.com/office/drawing/2014/main" id="{17B6C132-407C-3114-0AB8-3CED365AC271}"/>
+              </a:ext>
+            </a:extLst>
+          </p:cNvPr>
+          <p:cNvSpPr txBox="1"/>
+          <p:nvPr/>
+        </p:nvSpPr>
+        <p:spPr>
+          <a:xfrm>
+            <a:off x="7232688" y="4974189"/>
+            <a:ext cx="3590787" cy="646331"/>
+          </a:xfrm>
+          <a:prstGeom prst="rect">
+            <a:avLst/>
+          </a:prstGeom>
+          <a:noFill/>
+        </p:spPr>
+        <p:txBody>
+          <a:bodyPr wrap="square" rtlCol="0">
+            <a:spAutoFit/>
+          </a:bodyPr>
+          <a:lstStyle/>
+          <a:p>
+            <a:pPr marL="285750" indent="-285750">
+              <a:buFont typeface="Arial" panose="020B0604020202020204" pitchFamily="34" charset="0"/>
+              <a:buChar char="•"/>
+            </a:pPr>
+            <a:r>
+              <a:rPr lang="en-GB" dirty="0">
+                <a:solidFill>
+                  <a:srgbClr val="0070C0"/>
+                </a:solidFill>
+              </a:rPr>
+              <a:t>Data is converted into Python </a:t>
+            </a:r>
+            <a:r>
+              <a:rPr lang="en-GB" dirty="0" err="1">
+                <a:solidFill>
+                  <a:srgbClr val="0070C0"/>
+                </a:solidFill>
+              </a:rPr>
+              <a:t>dataframe</a:t>
+            </a:r>
+            <a:r>
+              <a:rPr lang="en-GB" dirty="0">
+                <a:solidFill>
+                  <a:srgbClr val="0070C0"/>
+                </a:solidFill>
+              </a:rPr>
+              <a:t> format</a:t>
+            </a:r>
+            <a:endParaRPr lang="ro-RO" dirty="0">
+              <a:solidFill>
+                <a:srgbClr val="0070C0"/>
+              </a:solidFill>
+            </a:endParaRPr>
+          </a:p>
+        </p:txBody>
+      </p:sp>
+    </p:spTree>
+    <p:extLst>
+      <p:ext uri="{BB962C8B-B14F-4D97-AF65-F5344CB8AC3E}">
+        <p14:creationId xmlns:p14="http://schemas.microsoft.com/office/powerpoint/2010/main" val="3095719389"/>
+      </p:ext>
+    </p:extLst>
+  </p:cSld>
+  <p:clrMapOvr>
+    <a:masterClrMapping/>
+  </p:clrMapOvr>
+</p:sld>
+</file>
+
+<file path=ppt/slides/slide28.xml><?xml version="1.0" encoding="utf-8"?>
+<p:sld xmlns:a="http://schemas.openxmlformats.org/drawingml/2006/main" xmlns:r="http://schemas.openxmlformats.org/officeDocument/2006/relationships" xmlns:p="http://schemas.openxmlformats.org/presentationml/2006/main">
+  <p:cSld>
+    <p:spTree>
+      <p:nvGrpSpPr>
+        <p:cNvPr id="1" name="">
+          <a:extLst>
+            <a:ext uri="{FF2B5EF4-FFF2-40B4-BE49-F238E27FC236}">
+              <a16:creationId xmlns:a16="http://schemas.microsoft.com/office/drawing/2014/main" id="{946CFCBC-D546-3490-FBB8-95785CF8D98D}"/>
+            </a:ext>
+          </a:extLst>
+        </p:cNvPr>
+        <p:cNvGrpSpPr/>
+        <p:nvPr/>
+      </p:nvGrpSpPr>
+      <p:grpSpPr>
+        <a:xfrm>
+          <a:off x="0" y="0"/>
+          <a:ext cx="0" cy="0"/>
+          <a:chOff x="0" y="0"/>
+          <a:chExt cx="0" cy="0"/>
+        </a:xfrm>
+      </p:grpSpPr>
+      <p:sp>
+        <p:nvSpPr>
+          <p:cNvPr id="3" name="Title 2">
+            <a:extLst>
+              <a:ext uri="{FF2B5EF4-FFF2-40B4-BE49-F238E27FC236}">
+                <a16:creationId xmlns:a16="http://schemas.microsoft.com/office/drawing/2014/main" id="{55AF6D98-F847-62AA-CC7C-9C8D43EC165B}"/>
+              </a:ext>
+            </a:extLst>
+          </p:cNvPr>
+          <p:cNvSpPr>
+            <a:spLocks noGrp="1"/>
+          </p:cNvSpPr>
+          <p:nvPr>
+            <p:ph type="title"/>
+          </p:nvPr>
+        </p:nvSpPr>
+        <p:spPr>
+          <a:xfrm>
+            <a:off x="1044475" y="389468"/>
+            <a:ext cx="10230250" cy="645284"/>
+          </a:xfrm>
+        </p:spPr>
+        <p:txBody>
+          <a:bodyPr/>
+          <a:lstStyle/>
+          <a:p>
+            <a:r>
+              <a:rPr lang="en-GB" sz="3600" dirty="0"/>
+              <a:t>Prepare data for the model</a:t>
+            </a:r>
+            <a:endParaRPr lang="ro-RO" sz="3600" dirty="0"/>
+          </a:p>
+        </p:txBody>
+      </p:sp>
+      <p:sp>
+        <p:nvSpPr>
+          <p:cNvPr id="6" name="Footer Placeholder 4">
+            <a:extLst>
+              <a:ext uri="{FF2B5EF4-FFF2-40B4-BE49-F238E27FC236}">
+                <a16:creationId xmlns:a16="http://schemas.microsoft.com/office/drawing/2014/main" id="{D2EB76C5-9230-C582-36C9-54D403644E1B}"/>
+              </a:ext>
+            </a:extLst>
+          </p:cNvPr>
+          <p:cNvSpPr txBox="1">
+            <a:spLocks/>
+          </p:cNvSpPr>
+          <p:nvPr/>
+        </p:nvSpPr>
+        <p:spPr>
+          <a:xfrm>
+            <a:off x="7717816" y="6470318"/>
+            <a:ext cx="2274318" cy="181094"/>
+          </a:xfrm>
+          <a:prstGeom prst="rect">
+            <a:avLst/>
+          </a:prstGeom>
+        </p:spPr>
+        <p:txBody>
+          <a:bodyPr vert="horz" lIns="0" tIns="45720" rIns="0" bIns="45720" rtlCol="0" anchor="ctr"/>
+          <a:lstStyle>
+            <a:defPPr>
+              <a:defRPr lang="en-US"/>
+            </a:defPPr>
+            <a:lvl1pPr marL="0" algn="l" defTabSz="914400" rtl="0" eaLnBrk="1" latinLnBrk="0" hangingPunct="1">
+              <a:defRPr sz="1200" b="0" kern="1200">
+                <a:solidFill>
+                  <a:schemeClr val="bg1"/>
+                </a:solidFill>
+                <a:latin typeface="+mn-lt"/>
+                <a:ea typeface="+mn-ea"/>
+                <a:cs typeface="+mn-cs"/>
+              </a:defRPr>
+            </a:lvl1pPr>
+            <a:lvl2pPr marL="457200" algn="l" defTabSz="914400" rtl="0" eaLnBrk="1" latinLnBrk="0" hangingPunct="1">
+              <a:defRPr sz="1800" kern="1200">
+                <a:solidFill>
+                  <a:schemeClr val="tx1"/>
+                </a:solidFill>
+                <a:latin typeface="+mn-lt"/>
+                <a:ea typeface="+mn-ea"/>
+                <a:cs typeface="+mn-cs"/>
+              </a:defRPr>
+            </a:lvl2pPr>
+            <a:lvl3pPr marL="914400" algn="l" defTabSz="914400" rtl="0" eaLnBrk="1" latinLnBrk="0" hangingPunct="1">
+              <a:defRPr sz="1800" kern="1200">
+                <a:solidFill>
+                  <a:schemeClr val="tx1"/>
+                </a:solidFill>
+                <a:latin typeface="+mn-lt"/>
+                <a:ea typeface="+mn-ea"/>
+                <a:cs typeface="+mn-cs"/>
+              </a:defRPr>
+            </a:lvl3pPr>
+            <a:lvl4pPr marL="1371600" algn="l" defTabSz="914400" rtl="0" eaLnBrk="1" latinLnBrk="0" hangingPunct="1">
+              <a:defRPr sz="1800" kern="1200">
+                <a:solidFill>
+                  <a:schemeClr val="tx1"/>
+                </a:solidFill>
+                <a:latin typeface="+mn-lt"/>
+                <a:ea typeface="+mn-ea"/>
+                <a:cs typeface="+mn-cs"/>
+              </a:defRPr>
+            </a:lvl4pPr>
+            <a:lvl5pPr marL="1828800" algn="l" defTabSz="914400" rtl="0" eaLnBrk="1" latinLnBrk="0" hangingPunct="1">
+              <a:defRPr sz="1800" kern="1200">
+                <a:solidFill>
+                  <a:schemeClr val="tx1"/>
+                </a:solidFill>
+                <a:latin typeface="+mn-lt"/>
+                <a:ea typeface="+mn-ea"/>
+                <a:cs typeface="+mn-cs"/>
+              </a:defRPr>
+            </a:lvl5pPr>
+            <a:lvl6pPr marL="2286000" algn="l" defTabSz="914400" rtl="0" eaLnBrk="1" latinLnBrk="0" hangingPunct="1">
+              <a:defRPr sz="1800" kern="1200">
+                <a:solidFill>
+                  <a:schemeClr val="tx1"/>
+                </a:solidFill>
+                <a:latin typeface="+mn-lt"/>
+                <a:ea typeface="+mn-ea"/>
+                <a:cs typeface="+mn-cs"/>
+              </a:defRPr>
+            </a:lvl6pPr>
+            <a:lvl7pPr marL="2743200" algn="l" defTabSz="914400" rtl="0" eaLnBrk="1" latinLnBrk="0" hangingPunct="1">
+              <a:defRPr sz="1800" kern="1200">
+                <a:solidFill>
+                  <a:schemeClr val="tx1"/>
+                </a:solidFill>
+                <a:latin typeface="+mn-lt"/>
+                <a:ea typeface="+mn-ea"/>
+                <a:cs typeface="+mn-cs"/>
+              </a:defRPr>
+            </a:lvl7pPr>
+            <a:lvl8pPr marL="3200400" algn="l" defTabSz="914400" rtl="0" eaLnBrk="1" latinLnBrk="0" hangingPunct="1">
+              <a:defRPr sz="1800" kern="1200">
+                <a:solidFill>
+                  <a:schemeClr val="tx1"/>
+                </a:solidFill>
+                <a:latin typeface="+mn-lt"/>
+                <a:ea typeface="+mn-ea"/>
+                <a:cs typeface="+mn-cs"/>
+              </a:defRPr>
+            </a:lvl8pPr>
+            <a:lvl9pPr marL="3657600" algn="l" defTabSz="914400" rtl="0" eaLnBrk="1" latinLnBrk="0" hangingPunct="1">
+              <a:defRPr sz="1800" kern="1200">
+                <a:solidFill>
+                  <a:schemeClr val="tx1"/>
+                </a:solidFill>
+                <a:latin typeface="+mn-lt"/>
+                <a:ea typeface="+mn-ea"/>
+                <a:cs typeface="+mn-cs"/>
+              </a:defRPr>
+            </a:lvl9pPr>
+          </a:lstStyle>
+          <a:p>
+            <a:r>
+              <a:rPr lang="en-US" dirty="0"/>
+              <a:t>Data Analysis Case Study</a:t>
+            </a:r>
+          </a:p>
+        </p:txBody>
+      </p:sp>
+      <p:sp>
+        <p:nvSpPr>
+          <p:cNvPr id="11" name="Date Placeholder 5">
+            <a:extLst>
+              <a:ext uri="{FF2B5EF4-FFF2-40B4-BE49-F238E27FC236}">
+                <a16:creationId xmlns:a16="http://schemas.microsoft.com/office/drawing/2014/main" id="{D78B44A7-0FBA-12F2-C51A-3849E659EF5B}"/>
+              </a:ext>
+            </a:extLst>
+          </p:cNvPr>
+          <p:cNvSpPr txBox="1">
+            <a:spLocks/>
+          </p:cNvSpPr>
+          <p:nvPr/>
+        </p:nvSpPr>
+        <p:spPr>
+          <a:xfrm>
+            <a:off x="10061984" y="6468532"/>
+            <a:ext cx="1522982" cy="182880"/>
+          </a:xfrm>
+          <a:prstGeom prst="rect">
+            <a:avLst/>
+          </a:prstGeom>
+        </p:spPr>
+        <p:txBody>
+          <a:bodyPr lIns="0" tIns="0" rIns="0" bIns="0"/>
+          <a:lstStyle>
+            <a:defPPr>
+              <a:defRPr lang="en-US"/>
+            </a:defPPr>
+            <a:lvl1pPr marL="0" algn="l" defTabSz="914400" rtl="0" eaLnBrk="1" latinLnBrk="0" hangingPunct="1">
+              <a:defRPr sz="1800" kern="1200">
+                <a:solidFill>
+                  <a:schemeClr val="tx1"/>
+                </a:solidFill>
+                <a:latin typeface="+mn-lt"/>
+                <a:ea typeface="+mn-ea"/>
+                <a:cs typeface="+mn-cs"/>
+              </a:defRPr>
+            </a:lvl1pPr>
+            <a:lvl2pPr marL="457200" algn="l" defTabSz="914400" rtl="0" eaLnBrk="1" latinLnBrk="0" hangingPunct="1">
+              <a:defRPr sz="1800" kern="1200">
+                <a:solidFill>
+                  <a:schemeClr val="tx1"/>
+                </a:solidFill>
+                <a:latin typeface="+mn-lt"/>
+                <a:ea typeface="+mn-ea"/>
+                <a:cs typeface="+mn-cs"/>
+              </a:defRPr>
+            </a:lvl2pPr>
+            <a:lvl3pPr marL="914400" algn="l" defTabSz="914400" rtl="0" eaLnBrk="1" latinLnBrk="0" hangingPunct="1">
+              <a:defRPr sz="1800" kern="1200">
+                <a:solidFill>
+                  <a:schemeClr val="tx1"/>
+                </a:solidFill>
+                <a:latin typeface="+mn-lt"/>
+                <a:ea typeface="+mn-ea"/>
+                <a:cs typeface="+mn-cs"/>
+              </a:defRPr>
+            </a:lvl3pPr>
+            <a:lvl4pPr marL="1371600" algn="l" defTabSz="914400" rtl="0" eaLnBrk="1" latinLnBrk="0" hangingPunct="1">
+              <a:defRPr sz="1800" kern="1200">
+                <a:solidFill>
+                  <a:schemeClr val="tx1"/>
+                </a:solidFill>
+                <a:latin typeface="+mn-lt"/>
+                <a:ea typeface="+mn-ea"/>
+                <a:cs typeface="+mn-cs"/>
+              </a:defRPr>
+            </a:lvl4pPr>
+            <a:lvl5pPr marL="1828800" algn="l" defTabSz="914400" rtl="0" eaLnBrk="1" latinLnBrk="0" hangingPunct="1">
+              <a:defRPr sz="1800" kern="1200">
+                <a:solidFill>
+                  <a:schemeClr val="tx1"/>
+                </a:solidFill>
+                <a:latin typeface="+mn-lt"/>
+                <a:ea typeface="+mn-ea"/>
+                <a:cs typeface="+mn-cs"/>
+              </a:defRPr>
+            </a:lvl5pPr>
+            <a:lvl6pPr marL="2286000" algn="l" defTabSz="914400" rtl="0" eaLnBrk="1" latinLnBrk="0" hangingPunct="1">
+              <a:defRPr sz="1800" kern="1200">
+                <a:solidFill>
+                  <a:schemeClr val="tx1"/>
+                </a:solidFill>
+                <a:latin typeface="+mn-lt"/>
+                <a:ea typeface="+mn-ea"/>
+                <a:cs typeface="+mn-cs"/>
+              </a:defRPr>
+            </a:lvl6pPr>
+            <a:lvl7pPr marL="2743200" algn="l" defTabSz="914400" rtl="0" eaLnBrk="1" latinLnBrk="0" hangingPunct="1">
+              <a:defRPr sz="1800" kern="1200">
+                <a:solidFill>
+                  <a:schemeClr val="tx1"/>
+                </a:solidFill>
+                <a:latin typeface="+mn-lt"/>
+                <a:ea typeface="+mn-ea"/>
+                <a:cs typeface="+mn-cs"/>
+              </a:defRPr>
+            </a:lvl7pPr>
+            <a:lvl8pPr marL="3200400" algn="l" defTabSz="914400" rtl="0" eaLnBrk="1" latinLnBrk="0" hangingPunct="1">
+              <a:defRPr sz="1800" kern="1200">
+                <a:solidFill>
+                  <a:schemeClr val="tx1"/>
+                </a:solidFill>
+                <a:latin typeface="+mn-lt"/>
+                <a:ea typeface="+mn-ea"/>
+                <a:cs typeface="+mn-cs"/>
+              </a:defRPr>
+            </a:lvl8pPr>
+            <a:lvl9pPr marL="3657600" algn="l" defTabSz="914400" rtl="0" eaLnBrk="1" latinLnBrk="0" hangingPunct="1">
+              <a:defRPr sz="1800" kern="1200">
+                <a:solidFill>
+                  <a:schemeClr val="tx1"/>
+                </a:solidFill>
+                <a:latin typeface="+mn-lt"/>
+                <a:ea typeface="+mn-ea"/>
+                <a:cs typeface="+mn-cs"/>
+              </a:defRPr>
+            </a:lvl9pPr>
+          </a:lstStyle>
+          <a:p>
+            <a:r>
+              <a:rPr lang="en-US" sz="1200" dirty="0">
+                <a:solidFill>
+                  <a:schemeClr val="bg1"/>
+                </a:solidFill>
+              </a:rPr>
+              <a:t>18-26 February 2026</a:t>
+            </a:r>
+          </a:p>
+        </p:txBody>
+      </p:sp>
+      <p:pic>
+        <p:nvPicPr>
+          <p:cNvPr id="4" name="Picture 3">
+            <a:extLst>
+              <a:ext uri="{FF2B5EF4-FFF2-40B4-BE49-F238E27FC236}">
+                <a16:creationId xmlns:a16="http://schemas.microsoft.com/office/drawing/2014/main" id="{8388452E-5EEA-32CC-F85D-10E7830FEC28}"/>
+              </a:ext>
+            </a:extLst>
+          </p:cNvPr>
+          <p:cNvPicPr>
+            <a:picLocks noChangeAspect="1"/>
+          </p:cNvPicPr>
+          <p:nvPr/>
+        </p:nvPicPr>
+        <p:blipFill>
+          <a:blip r:embed="rId2"/>
+          <a:stretch>
+            <a:fillRect/>
+          </a:stretch>
+        </p:blipFill>
+        <p:spPr>
+          <a:xfrm>
+            <a:off x="437333" y="1660415"/>
+            <a:ext cx="8784305" cy="4063913"/>
+          </a:xfrm>
+          <a:prstGeom prst="rect">
+            <a:avLst/>
+          </a:prstGeom>
+        </p:spPr>
+      </p:pic>
+      <p:sp>
+        <p:nvSpPr>
+          <p:cNvPr id="5" name="TextBox 4">
+            <a:extLst>
+              <a:ext uri="{FF2B5EF4-FFF2-40B4-BE49-F238E27FC236}">
+                <a16:creationId xmlns:a16="http://schemas.microsoft.com/office/drawing/2014/main" id="{B71C4752-64D0-AA73-6AB5-BEA85399BE6B}"/>
+              </a:ext>
+            </a:extLst>
+          </p:cNvPr>
+          <p:cNvSpPr txBox="1"/>
+          <p:nvPr/>
+        </p:nvSpPr>
+        <p:spPr>
+          <a:xfrm>
+            <a:off x="7884543" y="5035897"/>
+            <a:ext cx="3493699" cy="646331"/>
+          </a:xfrm>
+          <a:prstGeom prst="rect">
+            <a:avLst/>
+          </a:prstGeom>
+          <a:noFill/>
+        </p:spPr>
+        <p:txBody>
+          <a:bodyPr wrap="square" rtlCol="0">
+            <a:spAutoFit/>
+          </a:bodyPr>
+          <a:lstStyle/>
+          <a:p>
+            <a:pPr marL="285750" indent="-285750">
+              <a:buFont typeface="Arial" panose="020B0604020202020204" pitchFamily="34" charset="0"/>
+              <a:buChar char="•"/>
+            </a:pPr>
+            <a:r>
+              <a:rPr lang="en-GB" dirty="0">
+                <a:solidFill>
+                  <a:srgbClr val="0070C0"/>
+                </a:solidFill>
+              </a:rPr>
+              <a:t>The target variable is the rider status</a:t>
+            </a:r>
+            <a:endParaRPr lang="ro-RO" dirty="0">
+              <a:solidFill>
+                <a:srgbClr val="0070C0"/>
+              </a:solidFill>
+            </a:endParaRPr>
+          </a:p>
+        </p:txBody>
+      </p:sp>
+    </p:spTree>
+    <p:extLst>
+      <p:ext uri="{BB962C8B-B14F-4D97-AF65-F5344CB8AC3E}">
+        <p14:creationId xmlns:p14="http://schemas.microsoft.com/office/powerpoint/2010/main" val="1530432536"/>
+      </p:ext>
+    </p:extLst>
+  </p:cSld>
+  <p:clrMapOvr>
+    <a:masterClrMapping/>
+  </p:clrMapOvr>
+</p:sld>
+</file>
+
+<file path=ppt/slides/slide29.xml><?xml version="1.0" encoding="utf-8"?>
+<p:sld xmlns:a="http://schemas.openxmlformats.org/drawingml/2006/main" xmlns:r="http://schemas.openxmlformats.org/officeDocument/2006/relationships" xmlns:p="http://schemas.openxmlformats.org/presentationml/2006/main">
+  <p:cSld>
+    <p:spTree>
+      <p:nvGrpSpPr>
+        <p:cNvPr id="1" name="">
+          <a:extLst>
+            <a:ext uri="{FF2B5EF4-FFF2-40B4-BE49-F238E27FC236}">
+              <a16:creationId xmlns:a16="http://schemas.microsoft.com/office/drawing/2014/main" id="{0D2D62B5-9417-E71E-897A-FA49E7F0FB99}"/>
+            </a:ext>
+          </a:extLst>
+        </p:cNvPr>
+        <p:cNvGrpSpPr/>
+        <p:nvPr/>
+      </p:nvGrpSpPr>
+      <p:grpSpPr>
+        <a:xfrm>
+          <a:off x="0" y="0"/>
+          <a:ext cx="0" cy="0"/>
+          <a:chOff x="0" y="0"/>
+          <a:chExt cx="0" cy="0"/>
+        </a:xfrm>
+      </p:grpSpPr>
+      <p:sp>
+        <p:nvSpPr>
+          <p:cNvPr id="3" name="Title 2">
+            <a:extLst>
+              <a:ext uri="{FF2B5EF4-FFF2-40B4-BE49-F238E27FC236}">
+                <a16:creationId xmlns:a16="http://schemas.microsoft.com/office/drawing/2014/main" id="{1AA77A20-3D1A-8433-D9FD-9A96376EFC63}"/>
+              </a:ext>
+            </a:extLst>
+          </p:cNvPr>
+          <p:cNvSpPr>
+            <a:spLocks noGrp="1"/>
+          </p:cNvSpPr>
+          <p:nvPr>
+            <p:ph type="title"/>
+          </p:nvPr>
+        </p:nvSpPr>
+        <p:spPr>
+          <a:xfrm>
+            <a:off x="1044475" y="389468"/>
+            <a:ext cx="10230250" cy="645284"/>
+          </a:xfrm>
+        </p:spPr>
+        <p:txBody>
+          <a:bodyPr/>
+          <a:lstStyle/>
+          <a:p>
+            <a:r>
+              <a:rPr lang="en-GB" sz="3600" dirty="0"/>
+              <a:t>Train the model</a:t>
+            </a:r>
+            <a:endParaRPr lang="ro-RO" sz="3600" dirty="0"/>
+          </a:p>
+        </p:txBody>
+      </p:sp>
+      <p:sp>
+        <p:nvSpPr>
+          <p:cNvPr id="6" name="Footer Placeholder 4">
+            <a:extLst>
+              <a:ext uri="{FF2B5EF4-FFF2-40B4-BE49-F238E27FC236}">
+                <a16:creationId xmlns:a16="http://schemas.microsoft.com/office/drawing/2014/main" id="{2164BA47-D673-F18E-B578-CF92B5C94CCA}"/>
+              </a:ext>
+            </a:extLst>
+          </p:cNvPr>
+          <p:cNvSpPr txBox="1">
+            <a:spLocks/>
+          </p:cNvSpPr>
+          <p:nvPr/>
+        </p:nvSpPr>
+        <p:spPr>
+          <a:xfrm>
+            <a:off x="7717816" y="6470318"/>
+            <a:ext cx="2274318" cy="181094"/>
+          </a:xfrm>
+          <a:prstGeom prst="rect">
+            <a:avLst/>
+          </a:prstGeom>
+        </p:spPr>
+        <p:txBody>
+          <a:bodyPr vert="horz" lIns="0" tIns="45720" rIns="0" bIns="45720" rtlCol="0" anchor="ctr"/>
+          <a:lstStyle>
+            <a:defPPr>
+              <a:defRPr lang="en-US"/>
+            </a:defPPr>
+            <a:lvl1pPr marL="0" algn="l" defTabSz="914400" rtl="0" eaLnBrk="1" latinLnBrk="0" hangingPunct="1">
+              <a:defRPr sz="1200" b="0" kern="1200">
+                <a:solidFill>
+                  <a:schemeClr val="bg1"/>
+                </a:solidFill>
+                <a:latin typeface="+mn-lt"/>
+                <a:ea typeface="+mn-ea"/>
+                <a:cs typeface="+mn-cs"/>
+              </a:defRPr>
+            </a:lvl1pPr>
+            <a:lvl2pPr marL="457200" algn="l" defTabSz="914400" rtl="0" eaLnBrk="1" latinLnBrk="0" hangingPunct="1">
+              <a:defRPr sz="1800" kern="1200">
+                <a:solidFill>
+                  <a:schemeClr val="tx1"/>
+                </a:solidFill>
+                <a:latin typeface="+mn-lt"/>
+                <a:ea typeface="+mn-ea"/>
+                <a:cs typeface="+mn-cs"/>
+              </a:defRPr>
+            </a:lvl2pPr>
+            <a:lvl3pPr marL="914400" algn="l" defTabSz="914400" rtl="0" eaLnBrk="1" latinLnBrk="0" hangingPunct="1">
+              <a:defRPr sz="1800" kern="1200">
+                <a:solidFill>
+                  <a:schemeClr val="tx1"/>
+                </a:solidFill>
+                <a:latin typeface="+mn-lt"/>
+                <a:ea typeface="+mn-ea"/>
+                <a:cs typeface="+mn-cs"/>
+              </a:defRPr>
+            </a:lvl3pPr>
+            <a:lvl4pPr marL="1371600" algn="l" defTabSz="914400" rtl="0" eaLnBrk="1" latinLnBrk="0" hangingPunct="1">
+              <a:defRPr sz="1800" kern="1200">
+                <a:solidFill>
+                  <a:schemeClr val="tx1"/>
+                </a:solidFill>
+                <a:latin typeface="+mn-lt"/>
+                <a:ea typeface="+mn-ea"/>
+                <a:cs typeface="+mn-cs"/>
+              </a:defRPr>
+            </a:lvl4pPr>
+            <a:lvl5pPr marL="1828800" algn="l" defTabSz="914400" rtl="0" eaLnBrk="1" latinLnBrk="0" hangingPunct="1">
+              <a:defRPr sz="1800" kern="1200">
+                <a:solidFill>
+                  <a:schemeClr val="tx1"/>
+                </a:solidFill>
+                <a:latin typeface="+mn-lt"/>
+                <a:ea typeface="+mn-ea"/>
+                <a:cs typeface="+mn-cs"/>
+              </a:defRPr>
+            </a:lvl5pPr>
+            <a:lvl6pPr marL="2286000" algn="l" defTabSz="914400" rtl="0" eaLnBrk="1" latinLnBrk="0" hangingPunct="1">
+              <a:defRPr sz="1800" kern="1200">
+                <a:solidFill>
+                  <a:schemeClr val="tx1"/>
+                </a:solidFill>
+                <a:latin typeface="+mn-lt"/>
+                <a:ea typeface="+mn-ea"/>
+                <a:cs typeface="+mn-cs"/>
+              </a:defRPr>
+            </a:lvl6pPr>
+            <a:lvl7pPr marL="2743200" algn="l" defTabSz="914400" rtl="0" eaLnBrk="1" latinLnBrk="0" hangingPunct="1">
+              <a:defRPr sz="1800" kern="1200">
+                <a:solidFill>
+                  <a:schemeClr val="tx1"/>
+                </a:solidFill>
+                <a:latin typeface="+mn-lt"/>
+                <a:ea typeface="+mn-ea"/>
+                <a:cs typeface="+mn-cs"/>
+              </a:defRPr>
+            </a:lvl7pPr>
+            <a:lvl8pPr marL="3200400" algn="l" defTabSz="914400" rtl="0" eaLnBrk="1" latinLnBrk="0" hangingPunct="1">
+              <a:defRPr sz="1800" kern="1200">
+                <a:solidFill>
+                  <a:schemeClr val="tx1"/>
+                </a:solidFill>
+                <a:latin typeface="+mn-lt"/>
+                <a:ea typeface="+mn-ea"/>
+                <a:cs typeface="+mn-cs"/>
+              </a:defRPr>
+            </a:lvl8pPr>
+            <a:lvl9pPr marL="3657600" algn="l" defTabSz="914400" rtl="0" eaLnBrk="1" latinLnBrk="0" hangingPunct="1">
+              <a:defRPr sz="1800" kern="1200">
+                <a:solidFill>
+                  <a:schemeClr val="tx1"/>
+                </a:solidFill>
+                <a:latin typeface="+mn-lt"/>
+                <a:ea typeface="+mn-ea"/>
+                <a:cs typeface="+mn-cs"/>
+              </a:defRPr>
+            </a:lvl9pPr>
+          </a:lstStyle>
+          <a:p>
+            <a:r>
+              <a:rPr lang="en-US" dirty="0"/>
+              <a:t>Data Analysis Case Study</a:t>
+            </a:r>
+          </a:p>
+        </p:txBody>
+      </p:sp>
+      <p:sp>
+        <p:nvSpPr>
+          <p:cNvPr id="11" name="Date Placeholder 5">
+            <a:extLst>
+              <a:ext uri="{FF2B5EF4-FFF2-40B4-BE49-F238E27FC236}">
+                <a16:creationId xmlns:a16="http://schemas.microsoft.com/office/drawing/2014/main" id="{6B53375D-15A6-8739-1613-F9F1120E2AFA}"/>
+              </a:ext>
+            </a:extLst>
+          </p:cNvPr>
+          <p:cNvSpPr txBox="1">
+            <a:spLocks/>
+          </p:cNvSpPr>
+          <p:nvPr/>
+        </p:nvSpPr>
+        <p:spPr>
+          <a:xfrm>
+            <a:off x="10061984" y="6468532"/>
+            <a:ext cx="1522982" cy="182880"/>
+          </a:xfrm>
+          <a:prstGeom prst="rect">
+            <a:avLst/>
+          </a:prstGeom>
+        </p:spPr>
+        <p:txBody>
+          <a:bodyPr lIns="0" tIns="0" rIns="0" bIns="0"/>
+          <a:lstStyle>
+            <a:defPPr>
+              <a:defRPr lang="en-US"/>
+            </a:defPPr>
+            <a:lvl1pPr marL="0" algn="l" defTabSz="914400" rtl="0" eaLnBrk="1" latinLnBrk="0" hangingPunct="1">
+              <a:defRPr sz="1800" kern="1200">
+                <a:solidFill>
+                  <a:schemeClr val="tx1"/>
+                </a:solidFill>
+                <a:latin typeface="+mn-lt"/>
+                <a:ea typeface="+mn-ea"/>
+                <a:cs typeface="+mn-cs"/>
+              </a:defRPr>
+            </a:lvl1pPr>
+            <a:lvl2pPr marL="457200" algn="l" defTabSz="914400" rtl="0" eaLnBrk="1" latinLnBrk="0" hangingPunct="1">
+              <a:defRPr sz="1800" kern="1200">
+                <a:solidFill>
+                  <a:schemeClr val="tx1"/>
+                </a:solidFill>
+                <a:latin typeface="+mn-lt"/>
+                <a:ea typeface="+mn-ea"/>
+                <a:cs typeface="+mn-cs"/>
+              </a:defRPr>
+            </a:lvl2pPr>
+            <a:lvl3pPr marL="914400" algn="l" defTabSz="914400" rtl="0" eaLnBrk="1" latinLnBrk="0" hangingPunct="1">
+              <a:defRPr sz="1800" kern="1200">
+                <a:solidFill>
+                  <a:schemeClr val="tx1"/>
+                </a:solidFill>
+                <a:latin typeface="+mn-lt"/>
+                <a:ea typeface="+mn-ea"/>
+                <a:cs typeface="+mn-cs"/>
+              </a:defRPr>
+            </a:lvl3pPr>
+            <a:lvl4pPr marL="1371600" algn="l" defTabSz="914400" rtl="0" eaLnBrk="1" latinLnBrk="0" hangingPunct="1">
+              <a:defRPr sz="1800" kern="1200">
+                <a:solidFill>
+                  <a:schemeClr val="tx1"/>
+                </a:solidFill>
+                <a:latin typeface="+mn-lt"/>
+                <a:ea typeface="+mn-ea"/>
+                <a:cs typeface="+mn-cs"/>
+              </a:defRPr>
+            </a:lvl4pPr>
+            <a:lvl5pPr marL="1828800" algn="l" defTabSz="914400" rtl="0" eaLnBrk="1" latinLnBrk="0" hangingPunct="1">
+              <a:defRPr sz="1800" kern="1200">
+                <a:solidFill>
+                  <a:schemeClr val="tx1"/>
+                </a:solidFill>
+                <a:latin typeface="+mn-lt"/>
+                <a:ea typeface="+mn-ea"/>
+                <a:cs typeface="+mn-cs"/>
+              </a:defRPr>
+            </a:lvl5pPr>
+            <a:lvl6pPr marL="2286000" algn="l" defTabSz="914400" rtl="0" eaLnBrk="1" latinLnBrk="0" hangingPunct="1">
+              <a:defRPr sz="1800" kern="1200">
+                <a:solidFill>
+                  <a:schemeClr val="tx1"/>
+                </a:solidFill>
+                <a:latin typeface="+mn-lt"/>
+                <a:ea typeface="+mn-ea"/>
+                <a:cs typeface="+mn-cs"/>
+              </a:defRPr>
+            </a:lvl6pPr>
+            <a:lvl7pPr marL="2743200" algn="l" defTabSz="914400" rtl="0" eaLnBrk="1" latinLnBrk="0" hangingPunct="1">
+              <a:defRPr sz="1800" kern="1200">
+                <a:solidFill>
+                  <a:schemeClr val="tx1"/>
+                </a:solidFill>
+                <a:latin typeface="+mn-lt"/>
+                <a:ea typeface="+mn-ea"/>
+                <a:cs typeface="+mn-cs"/>
+              </a:defRPr>
+            </a:lvl7pPr>
+            <a:lvl8pPr marL="3200400" algn="l" defTabSz="914400" rtl="0" eaLnBrk="1" latinLnBrk="0" hangingPunct="1">
+              <a:defRPr sz="1800" kern="1200">
+                <a:solidFill>
+                  <a:schemeClr val="tx1"/>
+                </a:solidFill>
+                <a:latin typeface="+mn-lt"/>
+                <a:ea typeface="+mn-ea"/>
+                <a:cs typeface="+mn-cs"/>
+              </a:defRPr>
+            </a:lvl8pPr>
+            <a:lvl9pPr marL="3657600" algn="l" defTabSz="914400" rtl="0" eaLnBrk="1" latinLnBrk="0" hangingPunct="1">
+              <a:defRPr sz="1800" kern="1200">
+                <a:solidFill>
+                  <a:schemeClr val="tx1"/>
+                </a:solidFill>
+                <a:latin typeface="+mn-lt"/>
+                <a:ea typeface="+mn-ea"/>
+                <a:cs typeface="+mn-cs"/>
+              </a:defRPr>
+            </a:lvl9pPr>
+          </a:lstStyle>
+          <a:p>
+            <a:r>
+              <a:rPr lang="en-US" sz="1200" dirty="0">
+                <a:solidFill>
+                  <a:schemeClr val="bg1"/>
+                </a:solidFill>
+              </a:rPr>
+              <a:t>18-26 February 2026</a:t>
+            </a:r>
+          </a:p>
+        </p:txBody>
+      </p:sp>
+      <p:pic>
+        <p:nvPicPr>
+          <p:cNvPr id="7" name="Picture 6">
+            <a:extLst>
+              <a:ext uri="{FF2B5EF4-FFF2-40B4-BE49-F238E27FC236}">
+                <a16:creationId xmlns:a16="http://schemas.microsoft.com/office/drawing/2014/main" id="{D57901CF-A629-EDDC-9AF8-2B2FCF5DF3B8}"/>
+              </a:ext>
+            </a:extLst>
+          </p:cNvPr>
+          <p:cNvPicPr>
+            <a:picLocks noChangeAspect="1"/>
+          </p:cNvPicPr>
+          <p:nvPr/>
+        </p:nvPicPr>
+        <p:blipFill>
+          <a:blip r:embed="rId2"/>
+          <a:stretch>
+            <a:fillRect/>
+          </a:stretch>
+        </p:blipFill>
+        <p:spPr>
+          <a:xfrm>
+            <a:off x="1044475" y="1357686"/>
+            <a:ext cx="5763377" cy="4884218"/>
+          </a:xfrm>
+          <a:prstGeom prst="rect">
+            <a:avLst/>
+          </a:prstGeom>
+        </p:spPr>
+      </p:pic>
+      <p:sp>
+        <p:nvSpPr>
+          <p:cNvPr id="8" name="TextBox 7">
+            <a:extLst>
+              <a:ext uri="{FF2B5EF4-FFF2-40B4-BE49-F238E27FC236}">
+                <a16:creationId xmlns:a16="http://schemas.microsoft.com/office/drawing/2014/main" id="{C50E9609-9A1A-88AA-918B-673641356BBB}"/>
+              </a:ext>
+            </a:extLst>
+          </p:cNvPr>
+          <p:cNvSpPr txBox="1"/>
+          <p:nvPr/>
+        </p:nvSpPr>
+        <p:spPr>
+          <a:xfrm>
+            <a:off x="6676845" y="5684808"/>
+            <a:ext cx="4470680" cy="646331"/>
+          </a:xfrm>
+          <a:prstGeom prst="rect">
+            <a:avLst/>
+          </a:prstGeom>
+          <a:noFill/>
+        </p:spPr>
+        <p:txBody>
+          <a:bodyPr wrap="square" rtlCol="0">
+            <a:spAutoFit/>
+          </a:bodyPr>
+          <a:lstStyle/>
+          <a:p>
+            <a:pPr marL="285750" indent="-285750">
+              <a:buFont typeface="Arial" panose="020B0604020202020204" pitchFamily="34" charset="0"/>
+              <a:buChar char="•"/>
+            </a:pPr>
+            <a:r>
+              <a:rPr lang="en-GB" dirty="0">
+                <a:solidFill>
+                  <a:srgbClr val="0C3AE2"/>
+                </a:solidFill>
+              </a:rPr>
+              <a:t>We always compute the accuracy of the model</a:t>
+            </a:r>
+            <a:endParaRPr lang="ro-RO" dirty="0">
+              <a:solidFill>
+                <a:srgbClr val="0C3AE2"/>
+              </a:solidFill>
+            </a:endParaRPr>
+          </a:p>
+        </p:txBody>
+      </p:sp>
+    </p:spTree>
+    <p:extLst>
+      <p:ext uri="{BB962C8B-B14F-4D97-AF65-F5344CB8AC3E}">
+        <p14:creationId xmlns:p14="http://schemas.microsoft.com/office/powerpoint/2010/main" val="1444017642"/>
       </p:ext>
     </p:extLst>
   </p:cSld>
@@ -18425,6 +21326,1689 @@
     <p:extLst>
       <p:ext uri="{BB962C8B-B14F-4D97-AF65-F5344CB8AC3E}">
         <p14:creationId xmlns:p14="http://schemas.microsoft.com/office/powerpoint/2010/main" val="4017832845"/>
+      </p:ext>
+    </p:extLst>
+  </p:cSld>
+  <p:clrMapOvr>
+    <a:masterClrMapping/>
+  </p:clrMapOvr>
+</p:sld>
+</file>
+
+<file path=ppt/slides/slide30.xml><?xml version="1.0" encoding="utf-8"?>
+<p:sld xmlns:a="http://schemas.openxmlformats.org/drawingml/2006/main" xmlns:r="http://schemas.openxmlformats.org/officeDocument/2006/relationships" xmlns:p="http://schemas.openxmlformats.org/presentationml/2006/main">
+  <p:cSld>
+    <p:spTree>
+      <p:nvGrpSpPr>
+        <p:cNvPr id="1" name="">
+          <a:extLst>
+            <a:ext uri="{FF2B5EF4-FFF2-40B4-BE49-F238E27FC236}">
+              <a16:creationId xmlns:a16="http://schemas.microsoft.com/office/drawing/2014/main" id="{8F4F8701-20F4-BC87-4D19-0FFE557AC568}"/>
+            </a:ext>
+          </a:extLst>
+        </p:cNvPr>
+        <p:cNvGrpSpPr/>
+        <p:nvPr/>
+      </p:nvGrpSpPr>
+      <p:grpSpPr>
+        <a:xfrm>
+          <a:off x="0" y="0"/>
+          <a:ext cx="0" cy="0"/>
+          <a:chOff x="0" y="0"/>
+          <a:chExt cx="0" cy="0"/>
+        </a:xfrm>
+      </p:grpSpPr>
+      <p:sp>
+        <p:nvSpPr>
+          <p:cNvPr id="3" name="Title 2">
+            <a:extLst>
+              <a:ext uri="{FF2B5EF4-FFF2-40B4-BE49-F238E27FC236}">
+                <a16:creationId xmlns:a16="http://schemas.microsoft.com/office/drawing/2014/main" id="{6F65AEE5-76B7-FD54-AEB1-A53257A5CCA7}"/>
+              </a:ext>
+            </a:extLst>
+          </p:cNvPr>
+          <p:cNvSpPr>
+            <a:spLocks noGrp="1"/>
+          </p:cNvSpPr>
+          <p:nvPr>
+            <p:ph type="title"/>
+          </p:nvPr>
+        </p:nvSpPr>
+        <p:spPr>
+          <a:xfrm>
+            <a:off x="1044475" y="389468"/>
+            <a:ext cx="10230250" cy="645284"/>
+          </a:xfrm>
+        </p:spPr>
+        <p:txBody>
+          <a:bodyPr/>
+          <a:lstStyle/>
+          <a:p>
+            <a:r>
+              <a:rPr lang="en-GB" sz="3200" dirty="0"/>
+              <a:t>Build the membership recommendation calculator</a:t>
+            </a:r>
+            <a:endParaRPr lang="ro-RO" sz="3200" dirty="0"/>
+          </a:p>
+        </p:txBody>
+      </p:sp>
+      <p:sp>
+        <p:nvSpPr>
+          <p:cNvPr id="6" name="Footer Placeholder 4">
+            <a:extLst>
+              <a:ext uri="{FF2B5EF4-FFF2-40B4-BE49-F238E27FC236}">
+                <a16:creationId xmlns:a16="http://schemas.microsoft.com/office/drawing/2014/main" id="{1814C88F-FCB0-71AB-B171-DC1DCBD4BE05}"/>
+              </a:ext>
+            </a:extLst>
+          </p:cNvPr>
+          <p:cNvSpPr txBox="1">
+            <a:spLocks/>
+          </p:cNvSpPr>
+          <p:nvPr/>
+        </p:nvSpPr>
+        <p:spPr>
+          <a:xfrm>
+            <a:off x="7717816" y="6470318"/>
+            <a:ext cx="2274318" cy="181094"/>
+          </a:xfrm>
+          <a:prstGeom prst="rect">
+            <a:avLst/>
+          </a:prstGeom>
+        </p:spPr>
+        <p:txBody>
+          <a:bodyPr vert="horz" lIns="0" tIns="45720" rIns="0" bIns="45720" rtlCol="0" anchor="ctr"/>
+          <a:lstStyle>
+            <a:defPPr>
+              <a:defRPr lang="en-US"/>
+            </a:defPPr>
+            <a:lvl1pPr marL="0" algn="l" defTabSz="914400" rtl="0" eaLnBrk="1" latinLnBrk="0" hangingPunct="1">
+              <a:defRPr sz="1200" b="0" kern="1200">
+                <a:solidFill>
+                  <a:schemeClr val="bg1"/>
+                </a:solidFill>
+                <a:latin typeface="+mn-lt"/>
+                <a:ea typeface="+mn-ea"/>
+                <a:cs typeface="+mn-cs"/>
+              </a:defRPr>
+            </a:lvl1pPr>
+            <a:lvl2pPr marL="457200" algn="l" defTabSz="914400" rtl="0" eaLnBrk="1" latinLnBrk="0" hangingPunct="1">
+              <a:defRPr sz="1800" kern="1200">
+                <a:solidFill>
+                  <a:schemeClr val="tx1"/>
+                </a:solidFill>
+                <a:latin typeface="+mn-lt"/>
+                <a:ea typeface="+mn-ea"/>
+                <a:cs typeface="+mn-cs"/>
+              </a:defRPr>
+            </a:lvl2pPr>
+            <a:lvl3pPr marL="914400" algn="l" defTabSz="914400" rtl="0" eaLnBrk="1" latinLnBrk="0" hangingPunct="1">
+              <a:defRPr sz="1800" kern="1200">
+                <a:solidFill>
+                  <a:schemeClr val="tx1"/>
+                </a:solidFill>
+                <a:latin typeface="+mn-lt"/>
+                <a:ea typeface="+mn-ea"/>
+                <a:cs typeface="+mn-cs"/>
+              </a:defRPr>
+            </a:lvl3pPr>
+            <a:lvl4pPr marL="1371600" algn="l" defTabSz="914400" rtl="0" eaLnBrk="1" latinLnBrk="0" hangingPunct="1">
+              <a:defRPr sz="1800" kern="1200">
+                <a:solidFill>
+                  <a:schemeClr val="tx1"/>
+                </a:solidFill>
+                <a:latin typeface="+mn-lt"/>
+                <a:ea typeface="+mn-ea"/>
+                <a:cs typeface="+mn-cs"/>
+              </a:defRPr>
+            </a:lvl4pPr>
+            <a:lvl5pPr marL="1828800" algn="l" defTabSz="914400" rtl="0" eaLnBrk="1" latinLnBrk="0" hangingPunct="1">
+              <a:defRPr sz="1800" kern="1200">
+                <a:solidFill>
+                  <a:schemeClr val="tx1"/>
+                </a:solidFill>
+                <a:latin typeface="+mn-lt"/>
+                <a:ea typeface="+mn-ea"/>
+                <a:cs typeface="+mn-cs"/>
+              </a:defRPr>
+            </a:lvl5pPr>
+            <a:lvl6pPr marL="2286000" algn="l" defTabSz="914400" rtl="0" eaLnBrk="1" latinLnBrk="0" hangingPunct="1">
+              <a:defRPr sz="1800" kern="1200">
+                <a:solidFill>
+                  <a:schemeClr val="tx1"/>
+                </a:solidFill>
+                <a:latin typeface="+mn-lt"/>
+                <a:ea typeface="+mn-ea"/>
+                <a:cs typeface="+mn-cs"/>
+              </a:defRPr>
+            </a:lvl6pPr>
+            <a:lvl7pPr marL="2743200" algn="l" defTabSz="914400" rtl="0" eaLnBrk="1" latinLnBrk="0" hangingPunct="1">
+              <a:defRPr sz="1800" kern="1200">
+                <a:solidFill>
+                  <a:schemeClr val="tx1"/>
+                </a:solidFill>
+                <a:latin typeface="+mn-lt"/>
+                <a:ea typeface="+mn-ea"/>
+                <a:cs typeface="+mn-cs"/>
+              </a:defRPr>
+            </a:lvl7pPr>
+            <a:lvl8pPr marL="3200400" algn="l" defTabSz="914400" rtl="0" eaLnBrk="1" latinLnBrk="0" hangingPunct="1">
+              <a:defRPr sz="1800" kern="1200">
+                <a:solidFill>
+                  <a:schemeClr val="tx1"/>
+                </a:solidFill>
+                <a:latin typeface="+mn-lt"/>
+                <a:ea typeface="+mn-ea"/>
+                <a:cs typeface="+mn-cs"/>
+              </a:defRPr>
+            </a:lvl8pPr>
+            <a:lvl9pPr marL="3657600" algn="l" defTabSz="914400" rtl="0" eaLnBrk="1" latinLnBrk="0" hangingPunct="1">
+              <a:defRPr sz="1800" kern="1200">
+                <a:solidFill>
+                  <a:schemeClr val="tx1"/>
+                </a:solidFill>
+                <a:latin typeface="+mn-lt"/>
+                <a:ea typeface="+mn-ea"/>
+                <a:cs typeface="+mn-cs"/>
+              </a:defRPr>
+            </a:lvl9pPr>
+          </a:lstStyle>
+          <a:p>
+            <a:r>
+              <a:rPr lang="en-US" dirty="0"/>
+              <a:t>Data Analysis Case Study</a:t>
+            </a:r>
+          </a:p>
+        </p:txBody>
+      </p:sp>
+      <p:sp>
+        <p:nvSpPr>
+          <p:cNvPr id="11" name="Date Placeholder 5">
+            <a:extLst>
+              <a:ext uri="{FF2B5EF4-FFF2-40B4-BE49-F238E27FC236}">
+                <a16:creationId xmlns:a16="http://schemas.microsoft.com/office/drawing/2014/main" id="{415C2119-256A-5C0E-77EC-0DA5315F026A}"/>
+              </a:ext>
+            </a:extLst>
+          </p:cNvPr>
+          <p:cNvSpPr txBox="1">
+            <a:spLocks/>
+          </p:cNvSpPr>
+          <p:nvPr/>
+        </p:nvSpPr>
+        <p:spPr>
+          <a:xfrm>
+            <a:off x="10061984" y="6468532"/>
+            <a:ext cx="1522982" cy="182880"/>
+          </a:xfrm>
+          <a:prstGeom prst="rect">
+            <a:avLst/>
+          </a:prstGeom>
+        </p:spPr>
+        <p:txBody>
+          <a:bodyPr lIns="0" tIns="0" rIns="0" bIns="0"/>
+          <a:lstStyle>
+            <a:defPPr>
+              <a:defRPr lang="en-US"/>
+            </a:defPPr>
+            <a:lvl1pPr marL="0" algn="l" defTabSz="914400" rtl="0" eaLnBrk="1" latinLnBrk="0" hangingPunct="1">
+              <a:defRPr sz="1800" kern="1200">
+                <a:solidFill>
+                  <a:schemeClr val="tx1"/>
+                </a:solidFill>
+                <a:latin typeface="+mn-lt"/>
+                <a:ea typeface="+mn-ea"/>
+                <a:cs typeface="+mn-cs"/>
+              </a:defRPr>
+            </a:lvl1pPr>
+            <a:lvl2pPr marL="457200" algn="l" defTabSz="914400" rtl="0" eaLnBrk="1" latinLnBrk="0" hangingPunct="1">
+              <a:defRPr sz="1800" kern="1200">
+                <a:solidFill>
+                  <a:schemeClr val="tx1"/>
+                </a:solidFill>
+                <a:latin typeface="+mn-lt"/>
+                <a:ea typeface="+mn-ea"/>
+                <a:cs typeface="+mn-cs"/>
+              </a:defRPr>
+            </a:lvl2pPr>
+            <a:lvl3pPr marL="914400" algn="l" defTabSz="914400" rtl="0" eaLnBrk="1" latinLnBrk="0" hangingPunct="1">
+              <a:defRPr sz="1800" kern="1200">
+                <a:solidFill>
+                  <a:schemeClr val="tx1"/>
+                </a:solidFill>
+                <a:latin typeface="+mn-lt"/>
+                <a:ea typeface="+mn-ea"/>
+                <a:cs typeface="+mn-cs"/>
+              </a:defRPr>
+            </a:lvl3pPr>
+            <a:lvl4pPr marL="1371600" algn="l" defTabSz="914400" rtl="0" eaLnBrk="1" latinLnBrk="0" hangingPunct="1">
+              <a:defRPr sz="1800" kern="1200">
+                <a:solidFill>
+                  <a:schemeClr val="tx1"/>
+                </a:solidFill>
+                <a:latin typeface="+mn-lt"/>
+                <a:ea typeface="+mn-ea"/>
+                <a:cs typeface="+mn-cs"/>
+              </a:defRPr>
+            </a:lvl4pPr>
+            <a:lvl5pPr marL="1828800" algn="l" defTabSz="914400" rtl="0" eaLnBrk="1" latinLnBrk="0" hangingPunct="1">
+              <a:defRPr sz="1800" kern="1200">
+                <a:solidFill>
+                  <a:schemeClr val="tx1"/>
+                </a:solidFill>
+                <a:latin typeface="+mn-lt"/>
+                <a:ea typeface="+mn-ea"/>
+                <a:cs typeface="+mn-cs"/>
+              </a:defRPr>
+            </a:lvl5pPr>
+            <a:lvl6pPr marL="2286000" algn="l" defTabSz="914400" rtl="0" eaLnBrk="1" latinLnBrk="0" hangingPunct="1">
+              <a:defRPr sz="1800" kern="1200">
+                <a:solidFill>
+                  <a:schemeClr val="tx1"/>
+                </a:solidFill>
+                <a:latin typeface="+mn-lt"/>
+                <a:ea typeface="+mn-ea"/>
+                <a:cs typeface="+mn-cs"/>
+              </a:defRPr>
+            </a:lvl6pPr>
+            <a:lvl7pPr marL="2743200" algn="l" defTabSz="914400" rtl="0" eaLnBrk="1" latinLnBrk="0" hangingPunct="1">
+              <a:defRPr sz="1800" kern="1200">
+                <a:solidFill>
+                  <a:schemeClr val="tx1"/>
+                </a:solidFill>
+                <a:latin typeface="+mn-lt"/>
+                <a:ea typeface="+mn-ea"/>
+                <a:cs typeface="+mn-cs"/>
+              </a:defRPr>
+            </a:lvl7pPr>
+            <a:lvl8pPr marL="3200400" algn="l" defTabSz="914400" rtl="0" eaLnBrk="1" latinLnBrk="0" hangingPunct="1">
+              <a:defRPr sz="1800" kern="1200">
+                <a:solidFill>
+                  <a:schemeClr val="tx1"/>
+                </a:solidFill>
+                <a:latin typeface="+mn-lt"/>
+                <a:ea typeface="+mn-ea"/>
+                <a:cs typeface="+mn-cs"/>
+              </a:defRPr>
+            </a:lvl8pPr>
+            <a:lvl9pPr marL="3657600" algn="l" defTabSz="914400" rtl="0" eaLnBrk="1" latinLnBrk="0" hangingPunct="1">
+              <a:defRPr sz="1800" kern="1200">
+                <a:solidFill>
+                  <a:schemeClr val="tx1"/>
+                </a:solidFill>
+                <a:latin typeface="+mn-lt"/>
+                <a:ea typeface="+mn-ea"/>
+                <a:cs typeface="+mn-cs"/>
+              </a:defRPr>
+            </a:lvl9pPr>
+          </a:lstStyle>
+          <a:p>
+            <a:r>
+              <a:rPr lang="en-US" sz="1200" dirty="0">
+                <a:solidFill>
+                  <a:schemeClr val="bg1"/>
+                </a:solidFill>
+              </a:rPr>
+              <a:t>18-26 February 2026</a:t>
+            </a:r>
+          </a:p>
+        </p:txBody>
+      </p:sp>
+      <p:pic>
+        <p:nvPicPr>
+          <p:cNvPr id="4" name="Picture 3">
+            <a:extLst>
+              <a:ext uri="{FF2B5EF4-FFF2-40B4-BE49-F238E27FC236}">
+                <a16:creationId xmlns:a16="http://schemas.microsoft.com/office/drawing/2014/main" id="{05E72CE8-89EE-E070-740C-F4E1C4B38DA1}"/>
+              </a:ext>
+            </a:extLst>
+          </p:cNvPr>
+          <p:cNvPicPr>
+            <a:picLocks noChangeAspect="1"/>
+          </p:cNvPicPr>
+          <p:nvPr/>
+        </p:nvPicPr>
+        <p:blipFill>
+          <a:blip r:embed="rId2"/>
+          <a:stretch>
+            <a:fillRect/>
+          </a:stretch>
+        </p:blipFill>
+        <p:spPr>
+          <a:xfrm>
+            <a:off x="833330" y="1530582"/>
+            <a:ext cx="7508413" cy="4412934"/>
+          </a:xfrm>
+          <a:prstGeom prst="rect">
+            <a:avLst/>
+          </a:prstGeom>
+        </p:spPr>
+      </p:pic>
+    </p:spTree>
+    <p:extLst>
+      <p:ext uri="{BB962C8B-B14F-4D97-AF65-F5344CB8AC3E}">
+        <p14:creationId xmlns:p14="http://schemas.microsoft.com/office/powerpoint/2010/main" val="938725909"/>
+      </p:ext>
+    </p:extLst>
+  </p:cSld>
+  <p:clrMapOvr>
+    <a:masterClrMapping/>
+  </p:clrMapOvr>
+</p:sld>
+</file>
+
+<file path=ppt/slides/slide31.xml><?xml version="1.0" encoding="utf-8"?>
+<p:sld xmlns:a="http://schemas.openxmlformats.org/drawingml/2006/main" xmlns:r="http://schemas.openxmlformats.org/officeDocument/2006/relationships" xmlns:p="http://schemas.openxmlformats.org/presentationml/2006/main">
+  <p:cSld>
+    <p:spTree>
+      <p:nvGrpSpPr>
+        <p:cNvPr id="1" name=""/>
+        <p:cNvGrpSpPr/>
+        <p:nvPr/>
+      </p:nvGrpSpPr>
+      <p:grpSpPr>
+        <a:xfrm>
+          <a:off x="0" y="0"/>
+          <a:ext cx="0" cy="0"/>
+          <a:chOff x="0" y="0"/>
+          <a:chExt cx="0" cy="0"/>
+        </a:xfrm>
+      </p:grpSpPr>
+      <p:sp>
+        <p:nvSpPr>
+          <p:cNvPr id="2" name="Title 1">
+            <a:extLst>
+              <a:ext uri="{FF2B5EF4-FFF2-40B4-BE49-F238E27FC236}">
+                <a16:creationId xmlns:a16="http://schemas.microsoft.com/office/drawing/2014/main" id="{83AB1B63-B26E-8081-1706-83036DDBF2AA}"/>
+              </a:ext>
+            </a:extLst>
+          </p:cNvPr>
+          <p:cNvSpPr>
+            <a:spLocks noGrp="1"/>
+          </p:cNvSpPr>
+          <p:nvPr>
+            <p:ph type="title"/>
+          </p:nvPr>
+        </p:nvSpPr>
+        <p:spPr/>
+        <p:txBody>
+          <a:bodyPr/>
+          <a:lstStyle/>
+          <a:p>
+            <a:r>
+              <a:rPr lang="en-GB" dirty="0"/>
+              <a:t>Calculator demo</a:t>
+            </a:r>
+            <a:endParaRPr lang="ro-RO" dirty="0"/>
+          </a:p>
+        </p:txBody>
+      </p:sp>
+      <p:pic>
+        <p:nvPicPr>
+          <p:cNvPr id="4" name="Picture 3">
+            <a:extLst>
+              <a:ext uri="{FF2B5EF4-FFF2-40B4-BE49-F238E27FC236}">
+                <a16:creationId xmlns:a16="http://schemas.microsoft.com/office/drawing/2014/main" id="{DC06273E-1BD4-CF7E-49B1-54B273DD8DB5}"/>
+              </a:ext>
+            </a:extLst>
+          </p:cNvPr>
+          <p:cNvPicPr>
+            <a:picLocks noChangeAspect="1"/>
+          </p:cNvPicPr>
+          <p:nvPr/>
+        </p:nvPicPr>
+        <p:blipFill>
+          <a:blip r:embed="rId2"/>
+          <a:stretch>
+            <a:fillRect/>
+          </a:stretch>
+        </p:blipFill>
+        <p:spPr>
+          <a:xfrm>
+            <a:off x="1278651" y="1875228"/>
+            <a:ext cx="4372585" cy="638264"/>
+          </a:xfrm>
+          <a:prstGeom prst="rect">
+            <a:avLst/>
+          </a:prstGeom>
+        </p:spPr>
+      </p:pic>
+      <p:sp>
+        <p:nvSpPr>
+          <p:cNvPr id="5" name="TextBox 4">
+            <a:extLst>
+              <a:ext uri="{FF2B5EF4-FFF2-40B4-BE49-F238E27FC236}">
+                <a16:creationId xmlns:a16="http://schemas.microsoft.com/office/drawing/2014/main" id="{3D253109-12CE-9A65-1577-62ABE61D7274}"/>
+              </a:ext>
+            </a:extLst>
+          </p:cNvPr>
+          <p:cNvSpPr txBox="1"/>
+          <p:nvPr/>
+        </p:nvSpPr>
+        <p:spPr>
+          <a:xfrm>
+            <a:off x="1044475" y="1475118"/>
+            <a:ext cx="886781" cy="400110"/>
+          </a:xfrm>
+          <a:prstGeom prst="rect">
+            <a:avLst/>
+          </a:prstGeom>
+          <a:noFill/>
+        </p:spPr>
+        <p:txBody>
+          <a:bodyPr wrap="none" rtlCol="0">
+            <a:spAutoFit/>
+          </a:bodyPr>
+          <a:lstStyle/>
+          <a:p>
+            <a:r>
+              <a:rPr lang="en-GB" sz="2000" b="1" dirty="0">
+                <a:solidFill>
+                  <a:srgbClr val="FF0000"/>
+                </a:solidFill>
+              </a:rPr>
+              <a:t>Input:</a:t>
+            </a:r>
+            <a:endParaRPr lang="ro-RO" sz="2000" b="1" dirty="0">
+              <a:solidFill>
+                <a:srgbClr val="FF0000"/>
+              </a:solidFill>
+            </a:endParaRPr>
+          </a:p>
+        </p:txBody>
+      </p:sp>
+      <p:sp>
+        <p:nvSpPr>
+          <p:cNvPr id="6" name="TextBox 5">
+            <a:extLst>
+              <a:ext uri="{FF2B5EF4-FFF2-40B4-BE49-F238E27FC236}">
+                <a16:creationId xmlns:a16="http://schemas.microsoft.com/office/drawing/2014/main" id="{898B12A2-0B20-13BC-4949-E6584839B031}"/>
+              </a:ext>
+            </a:extLst>
+          </p:cNvPr>
+          <p:cNvSpPr txBox="1"/>
+          <p:nvPr/>
+        </p:nvSpPr>
+        <p:spPr>
+          <a:xfrm>
+            <a:off x="1164565" y="2596551"/>
+            <a:ext cx="6676845" cy="1200329"/>
+          </a:xfrm>
+          <a:prstGeom prst="rect">
+            <a:avLst/>
+          </a:prstGeom>
+          <a:noFill/>
+        </p:spPr>
+        <p:txBody>
+          <a:bodyPr wrap="square" rtlCol="0">
+            <a:spAutoFit/>
+          </a:bodyPr>
+          <a:lstStyle/>
+          <a:p>
+            <a:r>
+              <a:rPr lang="en-GB" dirty="0">
+                <a:solidFill>
+                  <a:schemeClr val="bg1"/>
+                </a:solidFill>
+              </a:rPr>
+              <a:t>We test the calculator for a casual rider that:</a:t>
+            </a:r>
+          </a:p>
+          <a:p>
+            <a:pPr marL="285750" indent="-285750">
+              <a:buFontTx/>
+              <a:buChar char="-"/>
+            </a:pPr>
+            <a:r>
+              <a:rPr lang="en-GB" dirty="0">
+                <a:solidFill>
+                  <a:schemeClr val="bg1"/>
+                </a:solidFill>
+              </a:rPr>
+              <a:t>Rents bikes for an average of 12.75 minutes;</a:t>
+            </a:r>
+          </a:p>
+          <a:p>
+            <a:pPr marL="285750" indent="-285750">
+              <a:buFontTx/>
+              <a:buChar char="-"/>
+            </a:pPr>
+            <a:r>
+              <a:rPr lang="en-GB" dirty="0">
+                <a:solidFill>
+                  <a:schemeClr val="bg1"/>
+                </a:solidFill>
+              </a:rPr>
+              <a:t>Usually rides around 8AM, and on Tuesdays;</a:t>
+            </a:r>
+          </a:p>
+          <a:p>
+            <a:pPr marL="285750" indent="-285750">
+              <a:buFontTx/>
+              <a:buChar char="-"/>
+            </a:pPr>
+            <a:r>
+              <a:rPr lang="en-GB" dirty="0">
+                <a:solidFill>
+                  <a:schemeClr val="bg1"/>
+                </a:solidFill>
+              </a:rPr>
+              <a:t>Always chooses electric bikes.</a:t>
+            </a:r>
+            <a:endParaRPr lang="ro-RO" dirty="0">
+              <a:solidFill>
+                <a:schemeClr val="bg1"/>
+              </a:solidFill>
+            </a:endParaRPr>
+          </a:p>
+        </p:txBody>
+      </p:sp>
+      <p:sp>
+        <p:nvSpPr>
+          <p:cNvPr id="7" name="TextBox 6">
+            <a:extLst>
+              <a:ext uri="{FF2B5EF4-FFF2-40B4-BE49-F238E27FC236}">
+                <a16:creationId xmlns:a16="http://schemas.microsoft.com/office/drawing/2014/main" id="{60B48F94-0E13-E077-F80F-51A8D3D8E25D}"/>
+              </a:ext>
+            </a:extLst>
+          </p:cNvPr>
+          <p:cNvSpPr txBox="1"/>
+          <p:nvPr/>
+        </p:nvSpPr>
+        <p:spPr>
+          <a:xfrm>
+            <a:off x="1164565" y="3875236"/>
+            <a:ext cx="1103187" cy="400110"/>
+          </a:xfrm>
+          <a:prstGeom prst="rect">
+            <a:avLst/>
+          </a:prstGeom>
+          <a:noFill/>
+        </p:spPr>
+        <p:txBody>
+          <a:bodyPr wrap="none" rtlCol="0">
+            <a:spAutoFit/>
+          </a:bodyPr>
+          <a:lstStyle/>
+          <a:p>
+            <a:r>
+              <a:rPr lang="en-GB" sz="2000" b="1" dirty="0">
+                <a:solidFill>
+                  <a:srgbClr val="FF0000"/>
+                </a:solidFill>
+              </a:rPr>
+              <a:t>Output:</a:t>
+            </a:r>
+            <a:endParaRPr lang="ro-RO" sz="2000" b="1" dirty="0">
+              <a:solidFill>
+                <a:srgbClr val="FF0000"/>
+              </a:solidFill>
+            </a:endParaRPr>
+          </a:p>
+        </p:txBody>
+      </p:sp>
+      <p:pic>
+        <p:nvPicPr>
+          <p:cNvPr id="9" name="Picture 8">
+            <a:extLst>
+              <a:ext uri="{FF2B5EF4-FFF2-40B4-BE49-F238E27FC236}">
+                <a16:creationId xmlns:a16="http://schemas.microsoft.com/office/drawing/2014/main" id="{E2A201B7-FC87-91E6-74F9-0D1F7BF52484}"/>
+              </a:ext>
+            </a:extLst>
+          </p:cNvPr>
+          <p:cNvPicPr>
+            <a:picLocks noChangeAspect="1"/>
+          </p:cNvPicPr>
+          <p:nvPr/>
+        </p:nvPicPr>
+        <p:blipFill>
+          <a:blip r:embed="rId3"/>
+          <a:stretch>
+            <a:fillRect/>
+          </a:stretch>
+        </p:blipFill>
+        <p:spPr>
+          <a:xfrm>
+            <a:off x="1278651" y="4263233"/>
+            <a:ext cx="4372585" cy="948272"/>
+          </a:xfrm>
+          <a:prstGeom prst="rect">
+            <a:avLst/>
+          </a:prstGeom>
+        </p:spPr>
+      </p:pic>
+      <p:sp>
+        <p:nvSpPr>
+          <p:cNvPr id="10" name="TextBox 9">
+            <a:extLst>
+              <a:ext uri="{FF2B5EF4-FFF2-40B4-BE49-F238E27FC236}">
+                <a16:creationId xmlns:a16="http://schemas.microsoft.com/office/drawing/2014/main" id="{8C6D7051-84FC-7169-551F-15DC80B6134C}"/>
+              </a:ext>
+            </a:extLst>
+          </p:cNvPr>
+          <p:cNvSpPr txBox="1"/>
+          <p:nvPr/>
+        </p:nvSpPr>
+        <p:spPr>
+          <a:xfrm>
+            <a:off x="971908" y="5077693"/>
+            <a:ext cx="9319405" cy="646331"/>
+          </a:xfrm>
+          <a:prstGeom prst="rect">
+            <a:avLst/>
+          </a:prstGeom>
+          <a:noFill/>
+        </p:spPr>
+        <p:txBody>
+          <a:bodyPr wrap="square" rtlCol="0">
+            <a:spAutoFit/>
+          </a:bodyPr>
+          <a:lstStyle/>
+          <a:p>
+            <a:r>
+              <a:rPr lang="en-GB" dirty="0">
+                <a:solidFill>
+                  <a:schemeClr val="bg1"/>
+                </a:solidFill>
+              </a:rPr>
+              <a:t>The calculator estimates that rider’s behaviour has a similarity of 73% to the behaviour of current members.</a:t>
+            </a:r>
+            <a:endParaRPr lang="ro-RO" dirty="0">
+              <a:solidFill>
+                <a:schemeClr val="bg1"/>
+              </a:solidFill>
+            </a:endParaRPr>
+          </a:p>
+        </p:txBody>
+      </p:sp>
+      <p:sp>
+        <p:nvSpPr>
+          <p:cNvPr id="11" name="TextBox 10">
+            <a:extLst>
+              <a:ext uri="{FF2B5EF4-FFF2-40B4-BE49-F238E27FC236}">
+                <a16:creationId xmlns:a16="http://schemas.microsoft.com/office/drawing/2014/main" id="{3D6DB3D8-0D5E-669D-3B75-3F860FC47F57}"/>
+              </a:ext>
+            </a:extLst>
+          </p:cNvPr>
+          <p:cNvSpPr txBox="1"/>
+          <p:nvPr/>
+        </p:nvSpPr>
+        <p:spPr>
+          <a:xfrm>
+            <a:off x="971907" y="5822201"/>
+            <a:ext cx="9319405" cy="523220"/>
+          </a:xfrm>
+          <a:prstGeom prst="rect">
+            <a:avLst/>
+          </a:prstGeom>
+          <a:noFill/>
+        </p:spPr>
+        <p:txBody>
+          <a:bodyPr wrap="square" rtlCol="0">
+            <a:spAutoFit/>
+          </a:bodyPr>
+          <a:lstStyle/>
+          <a:p>
+            <a:r>
+              <a:rPr lang="en-GB" sz="1400" b="1" dirty="0">
+                <a:solidFill>
+                  <a:schemeClr val="bg1"/>
+                </a:solidFill>
+              </a:rPr>
+              <a:t>Note</a:t>
+            </a:r>
+            <a:r>
+              <a:rPr lang="en-GB" sz="1400" dirty="0">
+                <a:solidFill>
+                  <a:schemeClr val="bg1"/>
+                </a:solidFill>
+              </a:rPr>
+              <a:t>: the relatively low accuracy of the model (approx. 70%) is due to the limited volume of data that is fed into the model, as well as possibly high discrepancies in the data</a:t>
+            </a:r>
+            <a:endParaRPr lang="ro-RO" sz="1400" dirty="0">
+              <a:solidFill>
+                <a:schemeClr val="bg1"/>
+              </a:solidFill>
+            </a:endParaRPr>
+          </a:p>
+        </p:txBody>
+      </p:sp>
+    </p:spTree>
+    <p:extLst>
+      <p:ext uri="{BB962C8B-B14F-4D97-AF65-F5344CB8AC3E}">
+        <p14:creationId xmlns:p14="http://schemas.microsoft.com/office/powerpoint/2010/main" val="3301087357"/>
+      </p:ext>
+    </p:extLst>
+  </p:cSld>
+  <p:clrMapOvr>
+    <a:masterClrMapping/>
+  </p:clrMapOvr>
+</p:sld>
+</file>
+
+<file path=ppt/slides/slide32.xml><?xml version="1.0" encoding="utf-8"?>
+<p:sld xmlns:a="http://schemas.openxmlformats.org/drawingml/2006/main" xmlns:r="http://schemas.openxmlformats.org/officeDocument/2006/relationships" xmlns:p="http://schemas.openxmlformats.org/presentationml/2006/main">
+  <p:cSld>
+    <p:spTree>
+      <p:nvGrpSpPr>
+        <p:cNvPr id="1" name="">
+          <a:extLst>
+            <a:ext uri="{FF2B5EF4-FFF2-40B4-BE49-F238E27FC236}">
+              <a16:creationId xmlns:a16="http://schemas.microsoft.com/office/drawing/2014/main" id="{070803D1-4851-730E-6257-279D4AADAA4E}"/>
+            </a:ext>
+          </a:extLst>
+        </p:cNvPr>
+        <p:cNvGrpSpPr/>
+        <p:nvPr/>
+      </p:nvGrpSpPr>
+      <p:grpSpPr>
+        <a:xfrm>
+          <a:off x="0" y="0"/>
+          <a:ext cx="0" cy="0"/>
+          <a:chOff x="0" y="0"/>
+          <a:chExt cx="0" cy="0"/>
+        </a:xfrm>
+      </p:grpSpPr>
+      <p:sp>
+        <p:nvSpPr>
+          <p:cNvPr id="9" name="Title 8">
+            <a:extLst>
+              <a:ext uri="{FF2B5EF4-FFF2-40B4-BE49-F238E27FC236}">
+                <a16:creationId xmlns:a16="http://schemas.microsoft.com/office/drawing/2014/main" id="{020CC891-1A25-5370-C542-ECC7CCFBFDE8}"/>
+              </a:ext>
+            </a:extLst>
+          </p:cNvPr>
+          <p:cNvSpPr>
+            <a:spLocks noGrp="1"/>
+          </p:cNvSpPr>
+          <p:nvPr>
+            <p:ph type="title"/>
+          </p:nvPr>
+        </p:nvSpPr>
+        <p:spPr>
+          <a:xfrm>
+            <a:off x="1028699" y="999068"/>
+            <a:ext cx="10582456" cy="645284"/>
+          </a:xfrm>
+        </p:spPr>
+        <p:txBody>
+          <a:bodyPr/>
+          <a:lstStyle/>
+          <a:p>
+            <a:r>
+              <a:rPr lang="en-GB" dirty="0"/>
+              <a:t>Tools</a:t>
+            </a:r>
+            <a:endParaRPr lang="ro-RO" dirty="0"/>
+          </a:p>
+        </p:txBody>
+      </p:sp>
+      <p:sp>
+        <p:nvSpPr>
+          <p:cNvPr id="8" name="Slide Number Placeholder 7">
+            <a:extLst>
+              <a:ext uri="{FF2B5EF4-FFF2-40B4-BE49-F238E27FC236}">
+                <a16:creationId xmlns:a16="http://schemas.microsoft.com/office/drawing/2014/main" id="{EF63EEA4-2D44-0E5F-EF04-0DF4B14C2EE3}"/>
+              </a:ext>
+            </a:extLst>
+          </p:cNvPr>
+          <p:cNvSpPr>
+            <a:spLocks noGrp="1"/>
+          </p:cNvSpPr>
+          <p:nvPr>
+            <p:ph type="sldNum" sz="quarter" idx="4294967295"/>
+          </p:nvPr>
+        </p:nvSpPr>
+        <p:spPr>
+          <a:xfrm>
+            <a:off x="11779250" y="6292850"/>
+            <a:ext cx="412750" cy="182563"/>
+          </a:xfrm>
+        </p:spPr>
+        <p:txBody>
+          <a:bodyPr/>
+          <a:lstStyle/>
+          <a:p>
+            <a:fld id="{7782931A-7D25-4B4B-9464-57AE418934A3}" type="slidenum">
+              <a:rPr lang="en-US" smtClean="0"/>
+              <a:pPr/>
+              <a:t>32</a:t>
+            </a:fld>
+            <a:endParaRPr lang="en-US"/>
+          </a:p>
+        </p:txBody>
+      </p:sp>
+      <p:sp>
+        <p:nvSpPr>
+          <p:cNvPr id="12" name="TextBox 11">
+            <a:extLst>
+              <a:ext uri="{FF2B5EF4-FFF2-40B4-BE49-F238E27FC236}">
+                <a16:creationId xmlns:a16="http://schemas.microsoft.com/office/drawing/2014/main" id="{6B675EAC-1292-6CA6-A9C8-1D84B6755FF6}"/>
+              </a:ext>
+            </a:extLst>
+          </p:cNvPr>
+          <p:cNvSpPr txBox="1"/>
+          <p:nvPr/>
+        </p:nvSpPr>
+        <p:spPr>
+          <a:xfrm>
+            <a:off x="1104181" y="2286000"/>
+            <a:ext cx="10506974" cy="2677656"/>
+          </a:xfrm>
+          <a:prstGeom prst="rect">
+            <a:avLst/>
+          </a:prstGeom>
+          <a:noFill/>
+        </p:spPr>
+        <p:txBody>
+          <a:bodyPr wrap="square" rtlCol="0">
+            <a:spAutoFit/>
+          </a:bodyPr>
+          <a:lstStyle/>
+          <a:p>
+            <a:pPr marL="285750" indent="-285750">
+              <a:buFont typeface="Wingdings" panose="05000000000000000000" pitchFamily="2" charset="2"/>
+              <a:buChar char="Ø"/>
+            </a:pPr>
+            <a:r>
+              <a:rPr lang="en-GB" sz="2400" dirty="0">
+                <a:solidFill>
+                  <a:schemeClr val="bg1"/>
+                </a:solidFill>
+              </a:rPr>
+              <a:t>Spreadsheets editor: Microsoft Excel 2019</a:t>
+            </a:r>
+          </a:p>
+          <a:p>
+            <a:pPr marL="285750" indent="-285750">
+              <a:buFont typeface="Wingdings" panose="05000000000000000000" pitchFamily="2" charset="2"/>
+              <a:buChar char="Ø"/>
+            </a:pPr>
+            <a:r>
+              <a:rPr lang="en-GB" sz="2400" dirty="0">
+                <a:solidFill>
+                  <a:schemeClr val="bg1"/>
+                </a:solidFill>
+              </a:rPr>
+              <a:t>Relational Data Base Management System: </a:t>
+            </a:r>
+            <a:r>
+              <a:rPr lang="en-GB" sz="2400" dirty="0" err="1">
+                <a:solidFill>
+                  <a:schemeClr val="bg1"/>
+                </a:solidFill>
+              </a:rPr>
+              <a:t>BigQuery</a:t>
+            </a:r>
+            <a:r>
+              <a:rPr lang="en-GB" sz="2400" dirty="0">
+                <a:solidFill>
+                  <a:schemeClr val="bg1"/>
+                </a:solidFill>
+              </a:rPr>
+              <a:t> (with SQL syntax)</a:t>
+            </a:r>
+          </a:p>
+          <a:p>
+            <a:pPr marL="285750" indent="-285750">
+              <a:buFont typeface="Wingdings" panose="05000000000000000000" pitchFamily="2" charset="2"/>
+              <a:buChar char="Ø"/>
+            </a:pPr>
+            <a:r>
+              <a:rPr lang="en-GB" sz="2400" dirty="0">
+                <a:solidFill>
+                  <a:schemeClr val="bg1"/>
+                </a:solidFill>
+              </a:rPr>
+              <a:t>Visualizations: Tableau Public</a:t>
+            </a:r>
+          </a:p>
+          <a:p>
+            <a:pPr marL="285750" indent="-285750">
+              <a:buFont typeface="Wingdings" panose="05000000000000000000" pitchFamily="2" charset="2"/>
+              <a:buChar char="Ø"/>
+            </a:pPr>
+            <a:r>
+              <a:rPr lang="en-GB" sz="2400" dirty="0">
+                <a:solidFill>
+                  <a:schemeClr val="bg1"/>
+                </a:solidFill>
+              </a:rPr>
+              <a:t>Python 3.10 (with scikit-learn, pandas, google-cloud libraries)</a:t>
+            </a:r>
+          </a:p>
+          <a:p>
+            <a:pPr marL="285750" indent="-285750">
+              <a:buFont typeface="Wingdings" panose="05000000000000000000" pitchFamily="2" charset="2"/>
+              <a:buChar char="Ø"/>
+            </a:pPr>
+            <a:r>
+              <a:rPr lang="en-GB" sz="2400" dirty="0">
+                <a:solidFill>
+                  <a:schemeClr val="bg1"/>
+                </a:solidFill>
+              </a:rPr>
+              <a:t>All code/resources can be accessed on GitHub profile: https://github.com/stefancrasmareanu-a11y/Case_study_bike_sharing_company/</a:t>
+            </a:r>
+            <a:endParaRPr lang="ro-RO" sz="2400" dirty="0">
+              <a:solidFill>
+                <a:schemeClr val="bg1"/>
+              </a:solidFill>
+            </a:endParaRPr>
+          </a:p>
+        </p:txBody>
+      </p:sp>
+      <p:sp>
+        <p:nvSpPr>
+          <p:cNvPr id="13" name="Footer Placeholder 4">
+            <a:extLst>
+              <a:ext uri="{FF2B5EF4-FFF2-40B4-BE49-F238E27FC236}">
+                <a16:creationId xmlns:a16="http://schemas.microsoft.com/office/drawing/2014/main" id="{7CC1FC98-A728-377B-DEDB-BD6CAF1299AB}"/>
+              </a:ext>
+            </a:extLst>
+          </p:cNvPr>
+          <p:cNvSpPr txBox="1">
+            <a:spLocks/>
+          </p:cNvSpPr>
+          <p:nvPr/>
+        </p:nvSpPr>
+        <p:spPr>
+          <a:xfrm>
+            <a:off x="7478023" y="6381766"/>
+            <a:ext cx="2274318" cy="181094"/>
+          </a:xfrm>
+          <a:prstGeom prst="rect">
+            <a:avLst/>
+          </a:prstGeom>
+        </p:spPr>
+        <p:txBody>
+          <a:bodyPr vert="horz" lIns="0" tIns="45720" rIns="0" bIns="45720" rtlCol="0" anchor="ctr"/>
+          <a:lstStyle>
+            <a:defPPr>
+              <a:defRPr lang="en-US"/>
+            </a:defPPr>
+            <a:lvl1pPr marL="0" algn="l" defTabSz="914400" rtl="0" eaLnBrk="1" latinLnBrk="0" hangingPunct="1">
+              <a:defRPr sz="1200" b="0" kern="1200">
+                <a:solidFill>
+                  <a:schemeClr val="bg1"/>
+                </a:solidFill>
+                <a:latin typeface="+mn-lt"/>
+                <a:ea typeface="+mn-ea"/>
+                <a:cs typeface="+mn-cs"/>
+              </a:defRPr>
+            </a:lvl1pPr>
+            <a:lvl2pPr marL="457200" algn="l" defTabSz="914400" rtl="0" eaLnBrk="1" latinLnBrk="0" hangingPunct="1">
+              <a:defRPr sz="1800" kern="1200">
+                <a:solidFill>
+                  <a:schemeClr val="tx1"/>
+                </a:solidFill>
+                <a:latin typeface="+mn-lt"/>
+                <a:ea typeface="+mn-ea"/>
+                <a:cs typeface="+mn-cs"/>
+              </a:defRPr>
+            </a:lvl2pPr>
+            <a:lvl3pPr marL="914400" algn="l" defTabSz="914400" rtl="0" eaLnBrk="1" latinLnBrk="0" hangingPunct="1">
+              <a:defRPr sz="1800" kern="1200">
+                <a:solidFill>
+                  <a:schemeClr val="tx1"/>
+                </a:solidFill>
+                <a:latin typeface="+mn-lt"/>
+                <a:ea typeface="+mn-ea"/>
+                <a:cs typeface="+mn-cs"/>
+              </a:defRPr>
+            </a:lvl3pPr>
+            <a:lvl4pPr marL="1371600" algn="l" defTabSz="914400" rtl="0" eaLnBrk="1" latinLnBrk="0" hangingPunct="1">
+              <a:defRPr sz="1800" kern="1200">
+                <a:solidFill>
+                  <a:schemeClr val="tx1"/>
+                </a:solidFill>
+                <a:latin typeface="+mn-lt"/>
+                <a:ea typeface="+mn-ea"/>
+                <a:cs typeface="+mn-cs"/>
+              </a:defRPr>
+            </a:lvl4pPr>
+            <a:lvl5pPr marL="1828800" algn="l" defTabSz="914400" rtl="0" eaLnBrk="1" latinLnBrk="0" hangingPunct="1">
+              <a:defRPr sz="1800" kern="1200">
+                <a:solidFill>
+                  <a:schemeClr val="tx1"/>
+                </a:solidFill>
+                <a:latin typeface="+mn-lt"/>
+                <a:ea typeface="+mn-ea"/>
+                <a:cs typeface="+mn-cs"/>
+              </a:defRPr>
+            </a:lvl5pPr>
+            <a:lvl6pPr marL="2286000" algn="l" defTabSz="914400" rtl="0" eaLnBrk="1" latinLnBrk="0" hangingPunct="1">
+              <a:defRPr sz="1800" kern="1200">
+                <a:solidFill>
+                  <a:schemeClr val="tx1"/>
+                </a:solidFill>
+                <a:latin typeface="+mn-lt"/>
+                <a:ea typeface="+mn-ea"/>
+                <a:cs typeface="+mn-cs"/>
+              </a:defRPr>
+            </a:lvl6pPr>
+            <a:lvl7pPr marL="2743200" algn="l" defTabSz="914400" rtl="0" eaLnBrk="1" latinLnBrk="0" hangingPunct="1">
+              <a:defRPr sz="1800" kern="1200">
+                <a:solidFill>
+                  <a:schemeClr val="tx1"/>
+                </a:solidFill>
+                <a:latin typeface="+mn-lt"/>
+                <a:ea typeface="+mn-ea"/>
+                <a:cs typeface="+mn-cs"/>
+              </a:defRPr>
+            </a:lvl7pPr>
+            <a:lvl8pPr marL="3200400" algn="l" defTabSz="914400" rtl="0" eaLnBrk="1" latinLnBrk="0" hangingPunct="1">
+              <a:defRPr sz="1800" kern="1200">
+                <a:solidFill>
+                  <a:schemeClr val="tx1"/>
+                </a:solidFill>
+                <a:latin typeface="+mn-lt"/>
+                <a:ea typeface="+mn-ea"/>
+                <a:cs typeface="+mn-cs"/>
+              </a:defRPr>
+            </a:lvl8pPr>
+            <a:lvl9pPr marL="3657600" algn="l" defTabSz="914400" rtl="0" eaLnBrk="1" latinLnBrk="0" hangingPunct="1">
+              <a:defRPr sz="1800" kern="1200">
+                <a:solidFill>
+                  <a:schemeClr val="tx1"/>
+                </a:solidFill>
+                <a:latin typeface="+mn-lt"/>
+                <a:ea typeface="+mn-ea"/>
+                <a:cs typeface="+mn-cs"/>
+              </a:defRPr>
+            </a:lvl9pPr>
+          </a:lstStyle>
+          <a:p>
+            <a:r>
+              <a:rPr lang="en-US" dirty="0"/>
+              <a:t>Data Analysis Case Study</a:t>
+            </a:r>
+          </a:p>
+        </p:txBody>
+      </p:sp>
+      <p:sp>
+        <p:nvSpPr>
+          <p:cNvPr id="14" name="Date Placeholder 5">
+            <a:extLst>
+              <a:ext uri="{FF2B5EF4-FFF2-40B4-BE49-F238E27FC236}">
+                <a16:creationId xmlns:a16="http://schemas.microsoft.com/office/drawing/2014/main" id="{77333B79-60C8-7471-9411-84E4495B2B41}"/>
+              </a:ext>
+            </a:extLst>
+          </p:cNvPr>
+          <p:cNvSpPr txBox="1">
+            <a:spLocks/>
+          </p:cNvSpPr>
+          <p:nvPr/>
+        </p:nvSpPr>
+        <p:spPr>
+          <a:xfrm>
+            <a:off x="9822191" y="6379980"/>
+            <a:ext cx="1522982" cy="182880"/>
+          </a:xfrm>
+          <a:prstGeom prst="rect">
+            <a:avLst/>
+          </a:prstGeom>
+        </p:spPr>
+        <p:txBody>
+          <a:bodyPr lIns="0" tIns="0" rIns="0" bIns="0"/>
+          <a:lstStyle>
+            <a:defPPr>
+              <a:defRPr lang="en-US"/>
+            </a:defPPr>
+            <a:lvl1pPr marL="0" algn="l" defTabSz="914400" rtl="0" eaLnBrk="1" latinLnBrk="0" hangingPunct="1">
+              <a:defRPr sz="1800" kern="1200">
+                <a:solidFill>
+                  <a:schemeClr val="tx1"/>
+                </a:solidFill>
+                <a:latin typeface="+mn-lt"/>
+                <a:ea typeface="+mn-ea"/>
+                <a:cs typeface="+mn-cs"/>
+              </a:defRPr>
+            </a:lvl1pPr>
+            <a:lvl2pPr marL="457200" algn="l" defTabSz="914400" rtl="0" eaLnBrk="1" latinLnBrk="0" hangingPunct="1">
+              <a:defRPr sz="1800" kern="1200">
+                <a:solidFill>
+                  <a:schemeClr val="tx1"/>
+                </a:solidFill>
+                <a:latin typeface="+mn-lt"/>
+                <a:ea typeface="+mn-ea"/>
+                <a:cs typeface="+mn-cs"/>
+              </a:defRPr>
+            </a:lvl2pPr>
+            <a:lvl3pPr marL="914400" algn="l" defTabSz="914400" rtl="0" eaLnBrk="1" latinLnBrk="0" hangingPunct="1">
+              <a:defRPr sz="1800" kern="1200">
+                <a:solidFill>
+                  <a:schemeClr val="tx1"/>
+                </a:solidFill>
+                <a:latin typeface="+mn-lt"/>
+                <a:ea typeface="+mn-ea"/>
+                <a:cs typeface="+mn-cs"/>
+              </a:defRPr>
+            </a:lvl3pPr>
+            <a:lvl4pPr marL="1371600" algn="l" defTabSz="914400" rtl="0" eaLnBrk="1" latinLnBrk="0" hangingPunct="1">
+              <a:defRPr sz="1800" kern="1200">
+                <a:solidFill>
+                  <a:schemeClr val="tx1"/>
+                </a:solidFill>
+                <a:latin typeface="+mn-lt"/>
+                <a:ea typeface="+mn-ea"/>
+                <a:cs typeface="+mn-cs"/>
+              </a:defRPr>
+            </a:lvl4pPr>
+            <a:lvl5pPr marL="1828800" algn="l" defTabSz="914400" rtl="0" eaLnBrk="1" latinLnBrk="0" hangingPunct="1">
+              <a:defRPr sz="1800" kern="1200">
+                <a:solidFill>
+                  <a:schemeClr val="tx1"/>
+                </a:solidFill>
+                <a:latin typeface="+mn-lt"/>
+                <a:ea typeface="+mn-ea"/>
+                <a:cs typeface="+mn-cs"/>
+              </a:defRPr>
+            </a:lvl5pPr>
+            <a:lvl6pPr marL="2286000" algn="l" defTabSz="914400" rtl="0" eaLnBrk="1" latinLnBrk="0" hangingPunct="1">
+              <a:defRPr sz="1800" kern="1200">
+                <a:solidFill>
+                  <a:schemeClr val="tx1"/>
+                </a:solidFill>
+                <a:latin typeface="+mn-lt"/>
+                <a:ea typeface="+mn-ea"/>
+                <a:cs typeface="+mn-cs"/>
+              </a:defRPr>
+            </a:lvl6pPr>
+            <a:lvl7pPr marL="2743200" algn="l" defTabSz="914400" rtl="0" eaLnBrk="1" latinLnBrk="0" hangingPunct="1">
+              <a:defRPr sz="1800" kern="1200">
+                <a:solidFill>
+                  <a:schemeClr val="tx1"/>
+                </a:solidFill>
+                <a:latin typeface="+mn-lt"/>
+                <a:ea typeface="+mn-ea"/>
+                <a:cs typeface="+mn-cs"/>
+              </a:defRPr>
+            </a:lvl7pPr>
+            <a:lvl8pPr marL="3200400" algn="l" defTabSz="914400" rtl="0" eaLnBrk="1" latinLnBrk="0" hangingPunct="1">
+              <a:defRPr sz="1800" kern="1200">
+                <a:solidFill>
+                  <a:schemeClr val="tx1"/>
+                </a:solidFill>
+                <a:latin typeface="+mn-lt"/>
+                <a:ea typeface="+mn-ea"/>
+                <a:cs typeface="+mn-cs"/>
+              </a:defRPr>
+            </a:lvl8pPr>
+            <a:lvl9pPr marL="3657600" algn="l" defTabSz="914400" rtl="0" eaLnBrk="1" latinLnBrk="0" hangingPunct="1">
+              <a:defRPr sz="1800" kern="1200">
+                <a:solidFill>
+                  <a:schemeClr val="tx1"/>
+                </a:solidFill>
+                <a:latin typeface="+mn-lt"/>
+                <a:ea typeface="+mn-ea"/>
+                <a:cs typeface="+mn-cs"/>
+              </a:defRPr>
+            </a:lvl9pPr>
+          </a:lstStyle>
+          <a:p>
+            <a:r>
+              <a:rPr lang="en-US" sz="1200" dirty="0">
+                <a:solidFill>
+                  <a:schemeClr val="bg1"/>
+                </a:solidFill>
+              </a:rPr>
+              <a:t>18-26 February 2026</a:t>
+            </a:r>
+          </a:p>
+        </p:txBody>
+      </p:sp>
+    </p:spTree>
+    <p:extLst>
+      <p:ext uri="{BB962C8B-B14F-4D97-AF65-F5344CB8AC3E}">
+        <p14:creationId xmlns:p14="http://schemas.microsoft.com/office/powerpoint/2010/main" val="3086147702"/>
+      </p:ext>
+    </p:extLst>
+  </p:cSld>
+  <p:clrMapOvr>
+    <a:masterClrMapping/>
+  </p:clrMapOvr>
+</p:sld>
+</file>
+
+<file path=ppt/slides/slide33.xml><?xml version="1.0" encoding="utf-8"?>
+<p:sld xmlns:a="http://schemas.openxmlformats.org/drawingml/2006/main" xmlns:r="http://schemas.openxmlformats.org/officeDocument/2006/relationships" xmlns:p="http://schemas.openxmlformats.org/presentationml/2006/main">
+  <p:cSld>
+    <p:spTree>
+      <p:nvGrpSpPr>
+        <p:cNvPr id="1" name=""/>
+        <p:cNvGrpSpPr/>
+        <p:nvPr/>
+      </p:nvGrpSpPr>
+      <p:grpSpPr>
+        <a:xfrm>
+          <a:off x="0" y="0"/>
+          <a:ext cx="0" cy="0"/>
+          <a:chOff x="0" y="0"/>
+          <a:chExt cx="0" cy="0"/>
+        </a:xfrm>
+      </p:grpSpPr>
+      <p:sp>
+        <p:nvSpPr>
+          <p:cNvPr id="2" name="Title 1">
+            <a:extLst>
+              <a:ext uri="{FF2B5EF4-FFF2-40B4-BE49-F238E27FC236}">
+                <a16:creationId xmlns:a16="http://schemas.microsoft.com/office/drawing/2014/main" id="{2AB67F85-B014-E54D-AC82-A789515E821B}"/>
+              </a:ext>
+            </a:extLst>
+          </p:cNvPr>
+          <p:cNvSpPr>
+            <a:spLocks noGrp="1"/>
+          </p:cNvSpPr>
+          <p:nvPr>
+            <p:ph type="title"/>
+          </p:nvPr>
+        </p:nvSpPr>
+        <p:spPr/>
+        <p:txBody>
+          <a:bodyPr/>
+          <a:lstStyle/>
+          <a:p>
+            <a:r>
+              <a:rPr lang="en-US" dirty="0"/>
+              <a:t>Thank you!</a:t>
+            </a:r>
+          </a:p>
+        </p:txBody>
+      </p:sp>
+      <p:sp>
+        <p:nvSpPr>
+          <p:cNvPr id="3" name="Content Placeholder 2">
+            <a:extLst>
+              <a:ext uri="{FF2B5EF4-FFF2-40B4-BE49-F238E27FC236}">
+                <a16:creationId xmlns:a16="http://schemas.microsoft.com/office/drawing/2014/main" id="{8D87CE19-F795-8240-B223-A5CA7C9DE0E5}"/>
+              </a:ext>
+            </a:extLst>
+          </p:cNvPr>
+          <p:cNvSpPr>
+            <a:spLocks noGrp="1"/>
+          </p:cNvSpPr>
+          <p:nvPr>
+            <p:ph sz="half" idx="1"/>
+          </p:nvPr>
+        </p:nvSpPr>
+        <p:spPr/>
+        <p:txBody>
+          <a:bodyPr/>
+          <a:lstStyle/>
+          <a:p>
+            <a:r>
+              <a:rPr lang="en-US" dirty="0"/>
+              <a:t>For any question regarding this study, feel free to contact me. Any feedback is appreciated!</a:t>
+            </a:r>
+          </a:p>
+        </p:txBody>
+      </p:sp>
+      <p:pic>
+        <p:nvPicPr>
+          <p:cNvPr id="7" name="Picture Placeholder 6" descr="White Darts">
+            <a:extLst>
+              <a:ext uri="{FF2B5EF4-FFF2-40B4-BE49-F238E27FC236}">
+                <a16:creationId xmlns:a16="http://schemas.microsoft.com/office/drawing/2014/main" id="{8A7A839A-FCAC-2F45-B138-DD0DC7C61FB3}"/>
+              </a:ext>
+            </a:extLst>
+          </p:cNvPr>
+          <p:cNvPicPr>
+            <a:picLocks noGrp="1" noChangeAspect="1"/>
+          </p:cNvPicPr>
+          <p:nvPr>
+            <p:ph type="pic" sz="quarter" idx="10"/>
+          </p:nvPr>
+        </p:nvPicPr>
+        <p:blipFill>
+          <a:blip r:embed="rId2">
+            <a:extLst>
+              <a:ext uri="{28A0092B-C50C-407E-A947-70E740481C1C}">
+                <a14:useLocalDpi xmlns:a14="http://schemas.microsoft.com/office/drawing/2010/main" val="0"/>
+              </a:ext>
+            </a:extLst>
+          </a:blip>
+          <a:srcRect/>
+          <a:stretch>
+            <a:fillRect/>
+          </a:stretch>
+        </p:blipFill>
+        <p:spPr/>
+      </p:pic>
+      <p:sp>
+        <p:nvSpPr>
+          <p:cNvPr id="5" name="Content Placeholder 4">
+            <a:extLst>
+              <a:ext uri="{FF2B5EF4-FFF2-40B4-BE49-F238E27FC236}">
+                <a16:creationId xmlns:a16="http://schemas.microsoft.com/office/drawing/2014/main" id="{788D6534-C18A-6F43-BFAE-88E2F83FD9B4}"/>
+              </a:ext>
+            </a:extLst>
+          </p:cNvPr>
+          <p:cNvSpPr>
+            <a:spLocks noGrp="1"/>
+          </p:cNvSpPr>
+          <p:nvPr>
+            <p:ph sz="quarter" idx="12"/>
+          </p:nvPr>
+        </p:nvSpPr>
+        <p:spPr/>
+        <p:txBody>
+          <a:bodyPr/>
+          <a:lstStyle/>
+          <a:p>
+            <a:r>
+              <a:rPr lang="en-US" b="1" dirty="0"/>
+              <a:t>Stefan </a:t>
+            </a:r>
+            <a:r>
+              <a:rPr lang="en-US" b="1" dirty="0" err="1"/>
+              <a:t>Crasmareanu</a:t>
+            </a:r>
+            <a:r>
+              <a:rPr lang="en-US" dirty="0"/>
+              <a:t>      </a:t>
+            </a:r>
+          </a:p>
+          <a:p>
+            <a:r>
+              <a:rPr lang="en-US" dirty="0"/>
+              <a:t>stefancrasmareanu@gmail.com</a:t>
+            </a:r>
+          </a:p>
+        </p:txBody>
+      </p:sp>
+      <p:sp>
+        <p:nvSpPr>
+          <p:cNvPr id="8" name="Slide Number Placeholder 7">
+            <a:extLst>
+              <a:ext uri="{FF2B5EF4-FFF2-40B4-BE49-F238E27FC236}">
+                <a16:creationId xmlns:a16="http://schemas.microsoft.com/office/drawing/2014/main" id="{8A0CAF6B-5914-4E2F-90A1-4B2D92D5ADC0}"/>
+              </a:ext>
+            </a:extLst>
+          </p:cNvPr>
+          <p:cNvSpPr>
+            <a:spLocks noGrp="1"/>
+          </p:cNvSpPr>
+          <p:nvPr>
+            <p:ph type="sldNum" sz="quarter" idx="15"/>
+          </p:nvPr>
+        </p:nvSpPr>
+        <p:spPr/>
+        <p:txBody>
+          <a:bodyPr/>
+          <a:lstStyle/>
+          <a:p>
+            <a:fld id="{7782931A-7D25-4B4B-9464-57AE418934A3}" type="slidenum">
+              <a:rPr lang="en-US" smtClean="0"/>
+              <a:pPr/>
+              <a:t>33</a:t>
+            </a:fld>
+            <a:endParaRPr lang="en-US"/>
+          </a:p>
+        </p:txBody>
+      </p:sp>
+      <p:sp>
+        <p:nvSpPr>
+          <p:cNvPr id="4" name="Footer Placeholder 4">
+            <a:extLst>
+              <a:ext uri="{FF2B5EF4-FFF2-40B4-BE49-F238E27FC236}">
+                <a16:creationId xmlns:a16="http://schemas.microsoft.com/office/drawing/2014/main" id="{3B14A411-9C63-7B11-80AB-D12AC338CE29}"/>
+              </a:ext>
+            </a:extLst>
+          </p:cNvPr>
+          <p:cNvSpPr txBox="1">
+            <a:spLocks/>
+          </p:cNvSpPr>
+          <p:nvPr/>
+        </p:nvSpPr>
+        <p:spPr>
+          <a:xfrm>
+            <a:off x="7478023" y="6381766"/>
+            <a:ext cx="2274318" cy="181094"/>
+          </a:xfrm>
+          <a:prstGeom prst="rect">
+            <a:avLst/>
+          </a:prstGeom>
+        </p:spPr>
+        <p:txBody>
+          <a:bodyPr vert="horz" lIns="0" tIns="45720" rIns="0" bIns="45720" rtlCol="0" anchor="ctr"/>
+          <a:lstStyle>
+            <a:defPPr>
+              <a:defRPr lang="en-US"/>
+            </a:defPPr>
+            <a:lvl1pPr marL="0" algn="l" defTabSz="914400" rtl="0" eaLnBrk="1" latinLnBrk="0" hangingPunct="1">
+              <a:defRPr sz="1200" b="0" kern="1200">
+                <a:solidFill>
+                  <a:schemeClr val="bg1"/>
+                </a:solidFill>
+                <a:latin typeface="+mn-lt"/>
+                <a:ea typeface="+mn-ea"/>
+                <a:cs typeface="+mn-cs"/>
+              </a:defRPr>
+            </a:lvl1pPr>
+            <a:lvl2pPr marL="457200" algn="l" defTabSz="914400" rtl="0" eaLnBrk="1" latinLnBrk="0" hangingPunct="1">
+              <a:defRPr sz="1800" kern="1200">
+                <a:solidFill>
+                  <a:schemeClr val="tx1"/>
+                </a:solidFill>
+                <a:latin typeface="+mn-lt"/>
+                <a:ea typeface="+mn-ea"/>
+                <a:cs typeface="+mn-cs"/>
+              </a:defRPr>
+            </a:lvl2pPr>
+            <a:lvl3pPr marL="914400" algn="l" defTabSz="914400" rtl="0" eaLnBrk="1" latinLnBrk="0" hangingPunct="1">
+              <a:defRPr sz="1800" kern="1200">
+                <a:solidFill>
+                  <a:schemeClr val="tx1"/>
+                </a:solidFill>
+                <a:latin typeface="+mn-lt"/>
+                <a:ea typeface="+mn-ea"/>
+                <a:cs typeface="+mn-cs"/>
+              </a:defRPr>
+            </a:lvl3pPr>
+            <a:lvl4pPr marL="1371600" algn="l" defTabSz="914400" rtl="0" eaLnBrk="1" latinLnBrk="0" hangingPunct="1">
+              <a:defRPr sz="1800" kern="1200">
+                <a:solidFill>
+                  <a:schemeClr val="tx1"/>
+                </a:solidFill>
+                <a:latin typeface="+mn-lt"/>
+                <a:ea typeface="+mn-ea"/>
+                <a:cs typeface="+mn-cs"/>
+              </a:defRPr>
+            </a:lvl4pPr>
+            <a:lvl5pPr marL="1828800" algn="l" defTabSz="914400" rtl="0" eaLnBrk="1" latinLnBrk="0" hangingPunct="1">
+              <a:defRPr sz="1800" kern="1200">
+                <a:solidFill>
+                  <a:schemeClr val="tx1"/>
+                </a:solidFill>
+                <a:latin typeface="+mn-lt"/>
+                <a:ea typeface="+mn-ea"/>
+                <a:cs typeface="+mn-cs"/>
+              </a:defRPr>
+            </a:lvl5pPr>
+            <a:lvl6pPr marL="2286000" algn="l" defTabSz="914400" rtl="0" eaLnBrk="1" latinLnBrk="0" hangingPunct="1">
+              <a:defRPr sz="1800" kern="1200">
+                <a:solidFill>
+                  <a:schemeClr val="tx1"/>
+                </a:solidFill>
+                <a:latin typeface="+mn-lt"/>
+                <a:ea typeface="+mn-ea"/>
+                <a:cs typeface="+mn-cs"/>
+              </a:defRPr>
+            </a:lvl6pPr>
+            <a:lvl7pPr marL="2743200" algn="l" defTabSz="914400" rtl="0" eaLnBrk="1" latinLnBrk="0" hangingPunct="1">
+              <a:defRPr sz="1800" kern="1200">
+                <a:solidFill>
+                  <a:schemeClr val="tx1"/>
+                </a:solidFill>
+                <a:latin typeface="+mn-lt"/>
+                <a:ea typeface="+mn-ea"/>
+                <a:cs typeface="+mn-cs"/>
+              </a:defRPr>
+            </a:lvl7pPr>
+            <a:lvl8pPr marL="3200400" algn="l" defTabSz="914400" rtl="0" eaLnBrk="1" latinLnBrk="0" hangingPunct="1">
+              <a:defRPr sz="1800" kern="1200">
+                <a:solidFill>
+                  <a:schemeClr val="tx1"/>
+                </a:solidFill>
+                <a:latin typeface="+mn-lt"/>
+                <a:ea typeface="+mn-ea"/>
+                <a:cs typeface="+mn-cs"/>
+              </a:defRPr>
+            </a:lvl8pPr>
+            <a:lvl9pPr marL="3657600" algn="l" defTabSz="914400" rtl="0" eaLnBrk="1" latinLnBrk="0" hangingPunct="1">
+              <a:defRPr sz="1800" kern="1200">
+                <a:solidFill>
+                  <a:schemeClr val="tx1"/>
+                </a:solidFill>
+                <a:latin typeface="+mn-lt"/>
+                <a:ea typeface="+mn-ea"/>
+                <a:cs typeface="+mn-cs"/>
+              </a:defRPr>
+            </a:lvl9pPr>
+          </a:lstStyle>
+          <a:p>
+            <a:r>
+              <a:rPr lang="en-US" dirty="0"/>
+              <a:t>Data Analysis Case Study</a:t>
+            </a:r>
+          </a:p>
+        </p:txBody>
+      </p:sp>
+      <p:sp>
+        <p:nvSpPr>
+          <p:cNvPr id="9" name="Date Placeholder 5">
+            <a:extLst>
+              <a:ext uri="{FF2B5EF4-FFF2-40B4-BE49-F238E27FC236}">
+                <a16:creationId xmlns:a16="http://schemas.microsoft.com/office/drawing/2014/main" id="{8B67EBFD-B5B3-4AC4-6A3E-16F118EDC700}"/>
+              </a:ext>
+            </a:extLst>
+          </p:cNvPr>
+          <p:cNvSpPr txBox="1">
+            <a:spLocks/>
+          </p:cNvSpPr>
+          <p:nvPr/>
+        </p:nvSpPr>
+        <p:spPr>
+          <a:xfrm>
+            <a:off x="9822191" y="6379980"/>
+            <a:ext cx="1522982" cy="182880"/>
+          </a:xfrm>
+          <a:prstGeom prst="rect">
+            <a:avLst/>
+          </a:prstGeom>
+        </p:spPr>
+        <p:txBody>
+          <a:bodyPr lIns="0" tIns="0" rIns="0" bIns="0"/>
+          <a:lstStyle>
+            <a:defPPr>
+              <a:defRPr lang="en-US"/>
+            </a:defPPr>
+            <a:lvl1pPr marL="0" algn="l" defTabSz="914400" rtl="0" eaLnBrk="1" latinLnBrk="0" hangingPunct="1">
+              <a:defRPr sz="1800" kern="1200">
+                <a:solidFill>
+                  <a:schemeClr val="tx1"/>
+                </a:solidFill>
+                <a:latin typeface="+mn-lt"/>
+                <a:ea typeface="+mn-ea"/>
+                <a:cs typeface="+mn-cs"/>
+              </a:defRPr>
+            </a:lvl1pPr>
+            <a:lvl2pPr marL="457200" algn="l" defTabSz="914400" rtl="0" eaLnBrk="1" latinLnBrk="0" hangingPunct="1">
+              <a:defRPr sz="1800" kern="1200">
+                <a:solidFill>
+                  <a:schemeClr val="tx1"/>
+                </a:solidFill>
+                <a:latin typeface="+mn-lt"/>
+                <a:ea typeface="+mn-ea"/>
+                <a:cs typeface="+mn-cs"/>
+              </a:defRPr>
+            </a:lvl2pPr>
+            <a:lvl3pPr marL="914400" algn="l" defTabSz="914400" rtl="0" eaLnBrk="1" latinLnBrk="0" hangingPunct="1">
+              <a:defRPr sz="1800" kern="1200">
+                <a:solidFill>
+                  <a:schemeClr val="tx1"/>
+                </a:solidFill>
+                <a:latin typeface="+mn-lt"/>
+                <a:ea typeface="+mn-ea"/>
+                <a:cs typeface="+mn-cs"/>
+              </a:defRPr>
+            </a:lvl3pPr>
+            <a:lvl4pPr marL="1371600" algn="l" defTabSz="914400" rtl="0" eaLnBrk="1" latinLnBrk="0" hangingPunct="1">
+              <a:defRPr sz="1800" kern="1200">
+                <a:solidFill>
+                  <a:schemeClr val="tx1"/>
+                </a:solidFill>
+                <a:latin typeface="+mn-lt"/>
+                <a:ea typeface="+mn-ea"/>
+                <a:cs typeface="+mn-cs"/>
+              </a:defRPr>
+            </a:lvl4pPr>
+            <a:lvl5pPr marL="1828800" algn="l" defTabSz="914400" rtl="0" eaLnBrk="1" latinLnBrk="0" hangingPunct="1">
+              <a:defRPr sz="1800" kern="1200">
+                <a:solidFill>
+                  <a:schemeClr val="tx1"/>
+                </a:solidFill>
+                <a:latin typeface="+mn-lt"/>
+                <a:ea typeface="+mn-ea"/>
+                <a:cs typeface="+mn-cs"/>
+              </a:defRPr>
+            </a:lvl5pPr>
+            <a:lvl6pPr marL="2286000" algn="l" defTabSz="914400" rtl="0" eaLnBrk="1" latinLnBrk="0" hangingPunct="1">
+              <a:defRPr sz="1800" kern="1200">
+                <a:solidFill>
+                  <a:schemeClr val="tx1"/>
+                </a:solidFill>
+                <a:latin typeface="+mn-lt"/>
+                <a:ea typeface="+mn-ea"/>
+                <a:cs typeface="+mn-cs"/>
+              </a:defRPr>
+            </a:lvl6pPr>
+            <a:lvl7pPr marL="2743200" algn="l" defTabSz="914400" rtl="0" eaLnBrk="1" latinLnBrk="0" hangingPunct="1">
+              <a:defRPr sz="1800" kern="1200">
+                <a:solidFill>
+                  <a:schemeClr val="tx1"/>
+                </a:solidFill>
+                <a:latin typeface="+mn-lt"/>
+                <a:ea typeface="+mn-ea"/>
+                <a:cs typeface="+mn-cs"/>
+              </a:defRPr>
+            </a:lvl7pPr>
+            <a:lvl8pPr marL="3200400" algn="l" defTabSz="914400" rtl="0" eaLnBrk="1" latinLnBrk="0" hangingPunct="1">
+              <a:defRPr sz="1800" kern="1200">
+                <a:solidFill>
+                  <a:schemeClr val="tx1"/>
+                </a:solidFill>
+                <a:latin typeface="+mn-lt"/>
+                <a:ea typeface="+mn-ea"/>
+                <a:cs typeface="+mn-cs"/>
+              </a:defRPr>
+            </a:lvl8pPr>
+            <a:lvl9pPr marL="3657600" algn="l" defTabSz="914400" rtl="0" eaLnBrk="1" latinLnBrk="0" hangingPunct="1">
+              <a:defRPr sz="1800" kern="1200">
+                <a:solidFill>
+                  <a:schemeClr val="tx1"/>
+                </a:solidFill>
+                <a:latin typeface="+mn-lt"/>
+                <a:ea typeface="+mn-ea"/>
+                <a:cs typeface="+mn-cs"/>
+              </a:defRPr>
+            </a:lvl9pPr>
+          </a:lstStyle>
+          <a:p>
+            <a:r>
+              <a:rPr lang="en-US" sz="1200" dirty="0">
+                <a:solidFill>
+                  <a:schemeClr val="bg1"/>
+                </a:solidFill>
+              </a:rPr>
+              <a:t>18-26 February 2026</a:t>
+            </a:r>
+          </a:p>
+        </p:txBody>
+      </p:sp>
+    </p:spTree>
+    <p:extLst>
+      <p:ext uri="{BB962C8B-B14F-4D97-AF65-F5344CB8AC3E}">
+        <p14:creationId xmlns:p14="http://schemas.microsoft.com/office/powerpoint/2010/main" val="1743235640"/>
       </p:ext>
     </p:extLst>
   </p:cSld>
@@ -21866,21 +26450,21 @@
 </file>
 
 <file path=customXml/item1.xml><?xml version="1.0" encoding="utf-8"?>
+<?mso-contentType ?>
+<FormTemplates xmlns="http://schemas.microsoft.com/sharepoint/v3/contenttype/forms">
+  <Display>DocumentLibraryForm</Display>
+  <Edit>DocumentLibraryForm</Edit>
+  <New>DocumentLibraryForm</New>
+</FormTemplates>
+</file>
+
+<file path=customXml/item2.xml><?xml version="1.0" encoding="utf-8"?>
 <p:properties xmlns:p="http://schemas.microsoft.com/office/2006/metadata/properties" xmlns:xsi="http://www.w3.org/2001/XMLSchema-instance" xmlns:pc="http://schemas.microsoft.com/office/infopath/2007/PartnerControls">
   <documentManagement>
     <Status xmlns="71af3243-3dd4-4a8d-8c0d-dd76da1f02a5">Not started</Status>
     <MediaServiceKeyPoints xmlns="71af3243-3dd4-4a8d-8c0d-dd76da1f02a5" xsi:nil="true"/>
   </documentManagement>
 </p:properties>
-</file>
-
-<file path=customXml/item2.xml><?xml version="1.0" encoding="utf-8"?>
-<?mso-contentType ?>
-<FormTemplates xmlns="http://schemas.microsoft.com/sharepoint/v3/contenttype/forms">
-  <Display>DocumentLibraryForm</Display>
-  <Edit>DocumentLibraryForm</Edit>
-  <New>DocumentLibraryForm</New>
-</FormTemplates>
 </file>
 
 <file path=customXml/item3.xml><?xml version="1.0" encoding="utf-8"?>
@@ -22105,19 +26689,19 @@
 </file>
 
 <file path=customXml/itemProps1.xml><?xml version="1.0" encoding="utf-8"?>
+<ds:datastoreItem xmlns:ds="http://schemas.openxmlformats.org/officeDocument/2006/customXml" ds:itemID="{3149A8C3-21EC-4C35-871F-CCC7148089A3}">
+  <ds:schemaRefs>
+    <ds:schemaRef ds:uri="http://schemas.microsoft.com/sharepoint/v3/contenttype/forms"/>
+  </ds:schemaRefs>
+</ds:datastoreItem>
+</file>
+
+<file path=customXml/itemProps2.xml><?xml version="1.0" encoding="utf-8"?>
 <ds:datastoreItem xmlns:ds="http://schemas.openxmlformats.org/officeDocument/2006/customXml" ds:itemID="{081B53F0-FE0E-4C4C-84FF-93580062270A}">
   <ds:schemaRefs>
     <ds:schemaRef ds:uri="http://schemas.microsoft.com/office/2006/metadata/properties"/>
     <ds:schemaRef ds:uri="http://schemas.microsoft.com/office/infopath/2007/PartnerControls"/>
     <ds:schemaRef ds:uri="71af3243-3dd4-4a8d-8c0d-dd76da1f02a5"/>
-  </ds:schemaRefs>
-</ds:datastoreItem>
-</file>
-
-<file path=customXml/itemProps2.xml><?xml version="1.0" encoding="utf-8"?>
-<ds:datastoreItem xmlns:ds="http://schemas.openxmlformats.org/officeDocument/2006/customXml" ds:itemID="{3149A8C3-21EC-4C35-871F-CCC7148089A3}">
-  <ds:schemaRefs>
-    <ds:schemaRef ds:uri="http://schemas.microsoft.com/sharepoint/v3/contenttype/forms"/>
   </ds:schemaRefs>
 </ds:datastoreItem>
 </file>
